--- a/digests/2026-10-17-4/oh-my-claudecode/slides-vi.pptx
+++ b/digests/2026-10-17-4/oh-my-claudecode/slides-vi.pptx
@@ -38,6 +38,7 @@
     <p:sldId id="286" r:id="rId37"/>
     <p:sldId id="287" r:id="rId38"/>
     <p:sldId id="288" r:id="rId39"/>
+    <p:sldId id="289" r:id="rId40"/>
   </p:sldIdLst>
   <p:sldSz cx="12192000" cy="6858000" type="screen4x3"/>
   <p:notesSz cx="6858000" cy="9144000"/>
@@ -3629,7 +3630,7 @@
                 </a:solidFill>
                 <a:latin typeface="Calibri"/>
               </a:rPr>
-              <a:t>1/33</a:t>
+              <a:t>1/34</a:t>
             </a:r>
           </a:p>
         </p:txBody>
@@ -3672,7 +3673,7 @@
         <p:spPr>
           <a:xfrm>
             <a:off x="685800" y="6426200"/>
-            <a:ext cx="327890" cy="88900"/>
+            <a:ext cx="318247" cy="88900"/>
           </a:xfrm>
           <a:prstGeom prst="rect">
             <a:avLst/>
@@ -4095,7 +4096,7 @@
                 </a:solidFill>
                 <a:latin typeface="Calibri"/>
               </a:rPr>
-              <a:t>10/33</a:t>
+              <a:t>10/34</a:t>
             </a:r>
           </a:p>
         </p:txBody>
@@ -4138,7 +4139,7 @@
         <p:spPr>
           <a:xfrm>
             <a:off x="685800" y="6426200"/>
-            <a:ext cx="3278909" cy="88900"/>
+            <a:ext cx="3182470" cy="88900"/>
           </a:xfrm>
           <a:prstGeom prst="rect">
             <a:avLst/>
@@ -4466,11 +4467,11 @@
         <p:spPr>
           <a:xfrm>
             <a:off x="685800" y="2658872"/>
-            <a:ext cx="10820400" cy="669544"/>
+            <a:ext cx="10820400" cy="1059688"/>
           </a:xfrm>
           <a:prstGeom prst="roundRect">
             <a:avLst>
-              <a:gd name="adj" fmla="val 30349"/>
+              <a:gd name="adj" fmla="val 19175"/>
             </a:avLst>
           </a:prstGeom>
           <a:solidFill>
@@ -4496,7 +4497,7 @@
         </p:nvSpPr>
         <p:spPr>
           <a:xfrm>
-            <a:off x="965200" y="2739643"/>
+            <a:off x="965200" y="2934716"/>
             <a:ext cx="508000" cy="508000"/>
           </a:xfrm>
           <a:prstGeom prst="ellipse">
@@ -4535,7 +4536,7 @@
         <p:spPr>
           <a:xfrm>
             <a:off x="1701800" y="2798572"/>
-            <a:ext cx="9525000" cy="390144"/>
+            <a:ext cx="9525000" cy="780288"/>
           </a:xfrm>
           <a:prstGeom prst="rect">
             <a:avLst/>
@@ -4591,7 +4592,7 @@
         </p:nvSpPr>
         <p:spPr>
           <a:xfrm>
-            <a:off x="685800" y="3455416"/>
+            <a:off x="685800" y="3845559"/>
             <a:ext cx="10820400" cy="706119"/>
           </a:xfrm>
           <a:prstGeom prst="roundRect">
@@ -4622,7 +4623,7 @@
         </p:nvSpPr>
         <p:spPr>
           <a:xfrm>
-            <a:off x="965200" y="3633216"/>
+            <a:off x="965200" y="4023359"/>
             <a:ext cx="10261600" cy="350519"/>
           </a:xfrm>
           <a:prstGeom prst="rect">
@@ -4687,7 +4688,7 @@
                 </a:solidFill>
                 <a:latin typeface="Calibri"/>
               </a:rPr>
-              <a:t>11/33</a:t>
+              <a:t>11/34</a:t>
             </a:r>
           </a:p>
         </p:txBody>
@@ -4730,7 +4731,7 @@
         <p:spPr>
           <a:xfrm>
             <a:off x="685800" y="6426200"/>
-            <a:ext cx="3606800" cy="88900"/>
+            <a:ext cx="3500717" cy="88900"/>
           </a:xfrm>
           <a:prstGeom prst="rect">
             <a:avLst/>
@@ -5353,7 +5354,7 @@
                 </a:solidFill>
                 <a:latin typeface="Calibri"/>
               </a:rPr>
-              <a:t>12/33</a:t>
+              <a:t>12/34</a:t>
             </a:r>
           </a:p>
         </p:txBody>
@@ -5396,7 +5397,7 @@
         <p:spPr>
           <a:xfrm>
             <a:off x="685800" y="6426200"/>
-            <a:ext cx="3934690" cy="88900"/>
+            <a:ext cx="3818964" cy="88900"/>
           </a:xfrm>
           <a:prstGeom prst="rect">
             <a:avLst/>
@@ -5983,7 +5984,7 @@
                 </a:solidFill>
                 <a:latin typeface="Calibri"/>
               </a:rPr>
-              <a:t>13/33</a:t>
+              <a:t>13/34</a:t>
             </a:r>
           </a:p>
         </p:txBody>
@@ -6026,7 +6027,7 @@
         <p:spPr>
           <a:xfrm>
             <a:off x="685800" y="6426200"/>
-            <a:ext cx="4262581" cy="88900"/>
+            <a:ext cx="4137211" cy="88900"/>
           </a:xfrm>
           <a:prstGeom prst="rect">
             <a:avLst/>
@@ -6293,7 +6294,7 @@
                 </a:solidFill>
                 <a:latin typeface="Calibri"/>
               </a:rPr>
-              <a:t>14/33</a:t>
+              <a:t>14/34</a:t>
             </a:r>
           </a:p>
         </p:txBody>
@@ -6336,7 +6337,7 @@
         <p:spPr>
           <a:xfrm>
             <a:off x="685800" y="6426200"/>
-            <a:ext cx="4590472" cy="88900"/>
+            <a:ext cx="4455458" cy="88900"/>
           </a:xfrm>
           <a:prstGeom prst="rect">
             <a:avLst/>
@@ -6556,11 +6557,11 @@
         <p:spPr>
           <a:xfrm>
             <a:off x="685800" y="2219960"/>
-            <a:ext cx="10820400" cy="669544"/>
+            <a:ext cx="10820400" cy="1059688"/>
           </a:xfrm>
           <a:prstGeom prst="roundRect">
             <a:avLst>
-              <a:gd name="adj" fmla="val 30349"/>
+              <a:gd name="adj" fmla="val 19175"/>
             </a:avLst>
           </a:prstGeom>
           <a:solidFill>
@@ -6586,7 +6587,7 @@
         </p:nvSpPr>
         <p:spPr>
           <a:xfrm>
-            <a:off x="965200" y="2300731"/>
+            <a:off x="965200" y="2495804"/>
             <a:ext cx="508000" cy="508000"/>
           </a:xfrm>
           <a:prstGeom prst="ellipse">
@@ -6625,7 +6626,7 @@
         <p:spPr>
           <a:xfrm>
             <a:off x="1701800" y="2359660"/>
-            <a:ext cx="9525000" cy="390144"/>
+            <a:ext cx="9525000" cy="780288"/>
           </a:xfrm>
           <a:prstGeom prst="rect">
             <a:avLst/>
@@ -6663,7 +6664,7 @@
         </p:nvSpPr>
         <p:spPr>
           <a:xfrm>
-            <a:off x="685800" y="3016504"/>
+            <a:off x="685800" y="3406648"/>
             <a:ext cx="10820400" cy="1449832"/>
           </a:xfrm>
           <a:prstGeom prst="roundRect">
@@ -6694,7 +6695,7 @@
         </p:nvSpPr>
         <p:spPr>
           <a:xfrm>
-            <a:off x="965200" y="3487419"/>
+            <a:off x="965200" y="3877564"/>
             <a:ext cx="508000" cy="508000"/>
           </a:xfrm>
           <a:prstGeom prst="ellipse">
@@ -6732,7 +6733,7 @@
         </p:nvSpPr>
         <p:spPr>
           <a:xfrm>
-            <a:off x="1701800" y="3156204"/>
+            <a:off x="1701800" y="3546348"/>
             <a:ext cx="9525000" cy="1170432"/>
           </a:xfrm>
           <a:prstGeom prst="rect">
@@ -6771,7 +6772,7 @@
         </p:nvSpPr>
         <p:spPr>
           <a:xfrm>
-            <a:off x="685800" y="4593335"/>
+            <a:off x="685800" y="4983480"/>
             <a:ext cx="10820400" cy="706119"/>
           </a:xfrm>
           <a:prstGeom prst="roundRect">
@@ -6802,7 +6803,7 @@
         </p:nvSpPr>
         <p:spPr>
           <a:xfrm>
-            <a:off x="965200" y="4771135"/>
+            <a:off x="965200" y="5161280"/>
             <a:ext cx="10261600" cy="350519"/>
           </a:xfrm>
           <a:prstGeom prst="rect">
@@ -6867,7 +6868,7 @@
                 </a:solidFill>
                 <a:latin typeface="Calibri"/>
               </a:rPr>
-              <a:t>15/33</a:t>
+              <a:t>15/34</a:t>
             </a:r>
           </a:p>
         </p:txBody>
@@ -6910,7 +6911,7 @@
         <p:spPr>
           <a:xfrm>
             <a:off x="685800" y="6426200"/>
-            <a:ext cx="4918363" cy="88900"/>
+            <a:ext cx="4773705" cy="88900"/>
           </a:xfrm>
           <a:prstGeom prst="rect">
             <a:avLst/>
@@ -7029,7 +7030,7 @@
                 </a:solidFill>
                 <a:latin typeface="Calibri"/>
               </a:rPr>
-              <a:t>Bước 7</a:t>
+              <a:t>Bước 7 (1/2)</a:t>
             </a:r>
           </a:p>
         </p:txBody>
@@ -7382,11 +7383,11 @@
         <p:spPr>
           <a:xfrm>
             <a:off x="685800" y="4203192"/>
-            <a:ext cx="10820400" cy="1059688"/>
+            <a:ext cx="10820400" cy="1449832"/>
           </a:xfrm>
           <a:prstGeom prst="roundRect">
             <a:avLst>
-              <a:gd name="adj" fmla="val 19175"/>
+              <a:gd name="adj" fmla="val 14015"/>
             </a:avLst>
           </a:prstGeom>
           <a:solidFill>
@@ -7412,7 +7413,7 @@
         </p:nvSpPr>
         <p:spPr>
           <a:xfrm>
-            <a:off x="965200" y="4479035"/>
+            <a:off x="965200" y="4674108"/>
             <a:ext cx="508000" cy="508000"/>
           </a:xfrm>
           <a:prstGeom prst="ellipse">
@@ -7451,7 +7452,7 @@
         <p:spPr>
           <a:xfrm>
             <a:off x="1701800" y="4342892"/>
-            <a:ext cx="9525000" cy="780288"/>
+            <a:ext cx="9525000" cy="1170432"/>
           </a:xfrm>
           <a:prstGeom prst="rect">
             <a:avLst/>
@@ -7483,22 +7484,59 @@
       </p:sp>
       <p:sp>
         <p:nvSpPr>
-          <p:cNvPr id="14" name="code block"/>
-          <p:cNvSpPr/>
-          <p:nvPr/>
-        </p:nvSpPr>
-        <p:spPr>
-          <a:xfrm>
-            <a:off x="685800" y="5389880"/>
-            <a:ext cx="10820400" cy="706119"/>
-          </a:xfrm>
-          <a:prstGeom prst="roundRect">
-            <a:avLst>
-              <a:gd name="adj" fmla="val 25179"/>
-            </a:avLst>
-          </a:prstGeom>
-          <a:solidFill>
-            <a:srgbClr val="14161C"/>
+          <p:cNvPr id="14" name="page"/>
+          <p:cNvSpPr txBox="1"/>
+          <p:nvPr/>
+        </p:nvSpPr>
+        <p:spPr>
+          <a:xfrm>
+            <a:off x="9474200" y="304800"/>
+            <a:ext cx="2032000" cy="279400"/>
+          </a:xfrm>
+          <a:prstGeom prst="rect">
+            <a:avLst/>
+          </a:prstGeom>
+          <a:noFill/>
+        </p:spPr>
+        <p:txBody>
+          <a:bodyPr wrap="square" lIns="0" rIns="0" tIns="0" bIns="0" anchor="t">
+            <a:noAutofit/>
+          </a:bodyPr>
+          <a:lstStyle/>
+          <a:p>
+            <a:pPr algn="r">
+              <a:lnSpc>
+                <a:spcPct val="100000"/>
+              </a:lnSpc>
+            </a:pPr>
+            <a:r>
+              <a:rPr sz="1600" b="1">
+                <a:solidFill>
+                  <a:srgbClr val="14161C"/>
+                </a:solidFill>
+                <a:latin typeface="Calibri"/>
+              </a:rPr>
+              <a:t>16/34</a:t>
+            </a:r>
+          </a:p>
+        </p:txBody>
+      </p:sp>
+      <p:sp>
+        <p:nvSpPr>
+          <p:cNvPr id="15" name="rail"/>
+          <p:cNvSpPr/>
+          <p:nvPr/>
+        </p:nvSpPr>
+        <p:spPr>
+          <a:xfrm>
+            <a:off x="685800" y="6451600"/>
+            <a:ext cx="10820400" cy="38100"/>
+          </a:xfrm>
+          <a:prstGeom prst="rect">
+            <a:avLst/>
+          </a:prstGeom>
+          <a:solidFill>
+            <a:srgbClr val="6B6A66"/>
           </a:solidFill>
           <a:ln>
             <a:noFill/>
@@ -7514,98 +7552,20 @@
       </p:sp>
       <p:sp>
         <p:nvSpPr>
-          <p:cNvPr id="15" name="code"/>
-          <p:cNvSpPr txBox="1"/>
-          <p:nvPr/>
-        </p:nvSpPr>
-        <p:spPr>
-          <a:xfrm>
-            <a:off x="965200" y="5567680"/>
-            <a:ext cx="10261600" cy="350519"/>
-          </a:xfrm>
-          <a:prstGeom prst="rect">
-            <a:avLst/>
-          </a:prstGeom>
-          <a:noFill/>
-        </p:spPr>
-        <p:txBody>
-          <a:bodyPr wrap="square" lIns="0" rIns="0" tIns="0" bIns="0" anchor="ctr">
-            <a:noAutofit/>
-          </a:bodyPr>
-          <a:lstStyle/>
-          <a:p>
-            <a:pPr algn="l">
-              <a:lnSpc>
-                <a:spcPct val="100000"/>
-              </a:lnSpc>
-            </a:pPr>
-            <a:r>
-              <a:rPr sz="2000" b="0">
-                <a:solidFill>
-                  <a:srgbClr val="F3EEE3"/>
-                </a:solidFill>
-                <a:latin typeface="Consolas"/>
-              </a:rPr>
-              <a:t>npm i -g oh-my-claude-sisyphus@latest</a:t>
-            </a:r>
-          </a:p>
-        </p:txBody>
-      </p:sp>
-      <p:sp>
-        <p:nvSpPr>
-          <p:cNvPr id="16" name="page"/>
-          <p:cNvSpPr txBox="1"/>
-          <p:nvPr/>
-        </p:nvSpPr>
-        <p:spPr>
-          <a:xfrm>
-            <a:off x="9474200" y="304800"/>
-            <a:ext cx="2032000" cy="279400"/>
-          </a:xfrm>
-          <a:prstGeom prst="rect">
-            <a:avLst/>
-          </a:prstGeom>
-          <a:noFill/>
-        </p:spPr>
-        <p:txBody>
-          <a:bodyPr wrap="square" lIns="0" rIns="0" tIns="0" bIns="0" anchor="t">
-            <a:noAutofit/>
-          </a:bodyPr>
-          <a:lstStyle/>
-          <a:p>
-            <a:pPr algn="r">
-              <a:lnSpc>
-                <a:spcPct val="100000"/>
-              </a:lnSpc>
-            </a:pPr>
-            <a:r>
-              <a:rPr sz="1600" b="1">
-                <a:solidFill>
-                  <a:srgbClr val="14161C"/>
-                </a:solidFill>
-                <a:latin typeface="Calibri"/>
-              </a:rPr>
-              <a:t>16/33</a:t>
-            </a:r>
-          </a:p>
-        </p:txBody>
-      </p:sp>
-      <p:sp>
-        <p:nvSpPr>
-          <p:cNvPr id="17" name="rail"/>
-          <p:cNvSpPr/>
-          <p:nvPr/>
-        </p:nvSpPr>
-        <p:spPr>
-          <a:xfrm>
-            <a:off x="685800" y="6451600"/>
-            <a:ext cx="10820400" cy="38100"/>
-          </a:xfrm>
-          <a:prstGeom prst="rect">
-            <a:avLst/>
-          </a:prstGeom>
-          <a:solidFill>
-            <a:srgbClr val="6B6A66"/>
+          <p:cNvPr id="16" name="progress"/>
+          <p:cNvSpPr/>
+          <p:nvPr/>
+        </p:nvSpPr>
+        <p:spPr>
+          <a:xfrm>
+            <a:off x="685800" y="6426200"/>
+            <a:ext cx="5091952" cy="88900"/>
+          </a:xfrm>
+          <a:prstGeom prst="rect">
+            <a:avLst/>
+          </a:prstGeom>
+          <a:solidFill>
+            <a:srgbClr val="E8472B"/>
           </a:solidFill>
           <a:ln>
             <a:noFill/>
@@ -7621,36 +7581,7 @@
       </p:sp>
       <p:sp>
         <p:nvSpPr>
-          <p:cNvPr id="18" name="progress"/>
-          <p:cNvSpPr/>
-          <p:nvPr/>
-        </p:nvSpPr>
-        <p:spPr>
-          <a:xfrm>
-            <a:off x="685800" y="6426200"/>
-            <a:ext cx="5246254" cy="88900"/>
-          </a:xfrm>
-          <a:prstGeom prst="rect">
-            <a:avLst/>
-          </a:prstGeom>
-          <a:solidFill>
-            <a:srgbClr val="E8472B"/>
-          </a:solidFill>
-          <a:ln>
-            <a:noFill/>
-          </a:ln>
-        </p:spPr>
-        <p:txBody>
-          <a:bodyPr rtlCol="0" anchor="ctr"/>
-          <a:lstStyle/>
-          <a:p>
-            <a:pPr algn="ctr"/>
-          </a:p>
-        </p:txBody>
-      </p:sp>
-      <p:sp>
-        <p:nvSpPr>
-          <p:cNvPr id="19" name="footer"/>
+          <p:cNvPr id="17" name="footer"/>
           <p:cNvSpPr txBox="1"/>
           <p:nvPr/>
         </p:nvSpPr>
@@ -7747,7 +7678,7 @@
                 </a:solidFill>
                 <a:latin typeface="Calibri"/>
               </a:rPr>
-              <a:t>Bước 8</a:t>
+              <a:t>Bước 7 (2/2)</a:t>
             </a:r>
           </a:p>
         </p:txBody>
@@ -7786,356 +7717,20 @@
                 </a:solidFill>
                 <a:latin typeface="Cambria"/>
               </a:rPr>
-              <a:t>Cài tmux</a:t>
-            </a:r>
-          </a:p>
-        </p:txBody>
-      </p:sp>
-      <p:sp>
-        <p:nvSpPr>
-          <p:cNvPr id="4" name="text"/>
-          <p:cNvSpPr txBox="1"/>
+              <a:t>Cài lệnh omc ở terminal (cho omc team)</a:t>
+            </a:r>
+          </a:p>
+        </p:txBody>
+      </p:sp>
+      <p:sp>
+        <p:nvSpPr>
+          <p:cNvPr id="4" name="code block"/>
+          <p:cNvSpPr/>
           <p:nvPr/>
         </p:nvSpPr>
         <p:spPr>
           <a:xfrm>
             <a:off x="685800" y="1326895"/>
-            <a:ext cx="10820400" cy="766064"/>
-          </a:xfrm>
-          <a:prstGeom prst="rect">
-            <a:avLst/>
-          </a:prstGeom>
-          <a:noFill/>
-        </p:spPr>
-        <p:txBody>
-          <a:bodyPr wrap="square" lIns="0" rIns="0" tIns="0" bIns="0" anchor="t">
-            <a:noAutofit/>
-          </a:bodyPr>
-          <a:lstStyle/>
-          <a:p>
-            <a:pPr algn="l">
-              <a:lnSpc>
-                <a:spcPct val="100000"/>
-              </a:lnSpc>
-            </a:pPr>
-            <a:r>
-              <a:rPr sz="2200" b="1">
-                <a:solidFill>
-                  <a:srgbClr val="14161C"/>
-                </a:solidFill>
-                <a:latin typeface="Calibri"/>
-              </a:rPr>
-              <a:t>Mục đích: </a:t>
-            </a:r>
-            <a:r>
-              <a:rPr sz="2200" b="0">
-                <a:solidFill>
-                  <a:srgbClr val="14161C"/>
-                </a:solidFill>
-                <a:latin typeface="Calibri"/>
-              </a:rPr>
-              <a:t>Worker của omc team là các pane tmux; README yêu cầu một phiên tmux đang hoạt động.</a:t>
-            </a:r>
-          </a:p>
-        </p:txBody>
-      </p:sp>
-      <p:sp>
-        <p:nvSpPr>
-          <p:cNvPr id="5" name="card"/>
-          <p:cNvSpPr/>
-          <p:nvPr/>
-        </p:nvSpPr>
-        <p:spPr>
-          <a:xfrm>
-            <a:off x="685800" y="2219960"/>
-            <a:ext cx="10820400" cy="669544"/>
-          </a:xfrm>
-          <a:prstGeom prst="roundRect">
-            <a:avLst>
-              <a:gd name="adj" fmla="val 30349"/>
-            </a:avLst>
-          </a:prstGeom>
-          <a:solidFill>
-            <a:srgbClr val="E8E0CF"/>
-          </a:solidFill>
-          <a:ln>
-            <a:noFill/>
-          </a:ln>
-        </p:spPr>
-        <p:txBody>
-          <a:bodyPr rtlCol="0" anchor="ctr"/>
-          <a:lstStyle/>
-          <a:p>
-            <a:pPr algn="ctr"/>
-          </a:p>
-        </p:txBody>
-      </p:sp>
-      <p:sp>
-        <p:nvSpPr>
-          <p:cNvPr id="6" name="marker 1"/>
-          <p:cNvSpPr/>
-          <p:nvPr/>
-        </p:nvSpPr>
-        <p:spPr>
-          <a:xfrm>
-            <a:off x="965200" y="2300731"/>
-            <a:ext cx="508000" cy="508000"/>
-          </a:xfrm>
-          <a:prstGeom prst="ellipse">
-            <a:avLst/>
-          </a:prstGeom>
-          <a:solidFill>
-            <a:srgbClr val="1F3FD1"/>
-          </a:solidFill>
-          <a:ln>
-            <a:noFill/>
-          </a:ln>
-        </p:spPr>
-        <p:txBody>
-          <a:bodyPr rtlCol="0" anchor="ctr" lIns="0" rIns="0" tIns="0" bIns="0"/>
-          <a:lstStyle/>
-          <a:p>
-            <a:pPr algn="ctr"/>
-            <a:r>
-              <a:rPr sz="2000" b="1">
-                <a:solidFill>
-                  <a:srgbClr val="FFFFFF"/>
-                </a:solidFill>
-                <a:latin typeface="Calibri"/>
-              </a:rPr>
-              <a:t>1</a:t>
-            </a:r>
-          </a:p>
-        </p:txBody>
-      </p:sp>
-      <p:sp>
-        <p:nvSpPr>
-          <p:cNvPr id="7" name="card text"/>
-          <p:cNvSpPr txBox="1"/>
-          <p:nvPr/>
-        </p:nvSpPr>
-        <p:spPr>
-          <a:xfrm>
-            <a:off x="1701800" y="2359660"/>
-            <a:ext cx="9525000" cy="390144"/>
-          </a:xfrm>
-          <a:prstGeom prst="rect">
-            <a:avLst/>
-          </a:prstGeom>
-          <a:noFill/>
-        </p:spPr>
-        <p:txBody>
-          <a:bodyPr wrap="square" lIns="0" rIns="0" tIns="0" bIns="0" anchor="ctr">
-            <a:noAutofit/>
-          </a:bodyPr>
-          <a:lstStyle/>
-          <a:p>
-            <a:pPr algn="l">
-              <a:lnSpc>
-                <a:spcPct val="100000"/>
-              </a:lnSpc>
-            </a:pPr>
-            <a:r>
-              <a:rPr sz="2400" b="0">
-                <a:solidFill>
-                  <a:srgbClr val="14161C"/>
-                </a:solidFill>
-                <a:latin typeface="Calibri"/>
-              </a:rPr>
-              <a:t>Lệnh dưới đây dành cho macOS (Homebrew).</a:t>
-            </a:r>
-          </a:p>
-        </p:txBody>
-      </p:sp>
-      <p:sp>
-        <p:nvSpPr>
-          <p:cNvPr id="8" name="card"/>
-          <p:cNvSpPr/>
-          <p:nvPr/>
-        </p:nvSpPr>
-        <p:spPr>
-          <a:xfrm>
-            <a:off x="685800" y="3016504"/>
-            <a:ext cx="10820400" cy="1449832"/>
-          </a:xfrm>
-          <a:prstGeom prst="roundRect">
-            <a:avLst>
-              <a:gd name="adj" fmla="val 14015"/>
-            </a:avLst>
-          </a:prstGeom>
-          <a:solidFill>
-            <a:srgbClr val="E8E0CF"/>
-          </a:solidFill>
-          <a:ln>
-            <a:noFill/>
-          </a:ln>
-        </p:spPr>
-        <p:txBody>
-          <a:bodyPr rtlCol="0" anchor="ctr"/>
-          <a:lstStyle/>
-          <a:p>
-            <a:pPr algn="ctr"/>
-          </a:p>
-        </p:txBody>
-      </p:sp>
-      <p:sp>
-        <p:nvSpPr>
-          <p:cNvPr id="9" name="marker 2"/>
-          <p:cNvSpPr/>
-          <p:nvPr/>
-        </p:nvSpPr>
-        <p:spPr>
-          <a:xfrm>
-            <a:off x="965200" y="3487419"/>
-            <a:ext cx="508000" cy="508000"/>
-          </a:xfrm>
-          <a:prstGeom prst="ellipse">
-            <a:avLst/>
-          </a:prstGeom>
-          <a:solidFill>
-            <a:srgbClr val="0F766E"/>
-          </a:solidFill>
-          <a:ln>
-            <a:noFill/>
-          </a:ln>
-        </p:spPr>
-        <p:txBody>
-          <a:bodyPr rtlCol="0" anchor="ctr" lIns="0" rIns="0" tIns="0" bIns="0"/>
-          <a:lstStyle/>
-          <a:p>
-            <a:pPr algn="ctr"/>
-            <a:r>
-              <a:rPr sz="2000" b="1">
-                <a:solidFill>
-                  <a:srgbClr val="FFFFFF"/>
-                </a:solidFill>
-                <a:latin typeface="Calibri"/>
-              </a:rPr>
-              <a:t>2</a:t>
-            </a:r>
-          </a:p>
-        </p:txBody>
-      </p:sp>
-      <p:sp>
-        <p:nvSpPr>
-          <p:cNvPr id="10" name="card text"/>
-          <p:cNvSpPr txBox="1"/>
-          <p:nvPr/>
-        </p:nvSpPr>
-        <p:spPr>
-          <a:xfrm>
-            <a:off x="1701800" y="3156204"/>
-            <a:ext cx="9525000" cy="1170432"/>
-          </a:xfrm>
-          <a:prstGeom prst="rect">
-            <a:avLst/>
-          </a:prstGeom>
-          <a:noFill/>
-        </p:spPr>
-        <p:txBody>
-          <a:bodyPr wrap="square" lIns="0" rIns="0" tIns="0" bIns="0" anchor="ctr">
-            <a:noAutofit/>
-          </a:bodyPr>
-          <a:lstStyle/>
-          <a:p>
-            <a:pPr algn="l">
-              <a:lnSpc>
-                <a:spcPct val="100000"/>
-              </a:lnSpc>
-            </a:pPr>
-            <a:r>
-              <a:rPr sz="2400" b="0">
-                <a:solidFill>
-                  <a:srgbClr val="14161C"/>
-                </a:solidFill>
-                <a:latin typeface="Calibri"/>
-              </a:rPr>
-              <a:t>Ubuntu/Debian: </a:t>
-            </a:r>
-            <a:r>
-              <a:rPr sz="2200" b="0">
-                <a:solidFill>
-                  <a:srgbClr val="B02D16"/>
-                </a:solidFill>
-                <a:latin typeface="Consolas"/>
-              </a:rPr>
-              <a:t>sudo apt install tmux</a:t>
-            </a:r>
-            <a:r>
-              <a:rPr sz="2400" b="0">
-                <a:solidFill>
-                  <a:srgbClr val="14161C"/>
-                </a:solidFill>
-                <a:latin typeface="Calibri"/>
-              </a:rPr>
-              <a:t>. Fedora: </a:t>
-            </a:r>
-            <a:r>
-              <a:rPr sz="2200" b="0">
-                <a:solidFill>
-                  <a:srgbClr val="B02D16"/>
-                </a:solidFill>
-                <a:latin typeface="Consolas"/>
-              </a:rPr>
-              <a:t>sudo dnf install tmux</a:t>
-            </a:r>
-            <a:r>
-              <a:rPr sz="2400" b="0">
-                <a:solidFill>
-                  <a:srgbClr val="14161C"/>
-                </a:solidFill>
-                <a:latin typeface="Calibri"/>
-              </a:rPr>
-              <a:t>. Arch: </a:t>
-            </a:r>
-            <a:r>
-              <a:rPr sz="2200" b="0">
-                <a:solidFill>
-                  <a:srgbClr val="B02D16"/>
-                </a:solidFill>
-                <a:latin typeface="Consolas"/>
-              </a:rPr>
-              <a:t>sudo pacman -S tmux</a:t>
-            </a:r>
-            <a:r>
-              <a:rPr sz="2400" b="0">
-                <a:solidFill>
-                  <a:srgbClr val="14161C"/>
-                </a:solidFill>
-                <a:latin typeface="Calibri"/>
-              </a:rPr>
-              <a:t>. Windows: </a:t>
-            </a:r>
-            <a:r>
-              <a:rPr sz="2200" b="0">
-                <a:solidFill>
-                  <a:srgbClr val="B02D16"/>
-                </a:solidFill>
-                <a:latin typeface="Consolas"/>
-              </a:rPr>
-              <a:t>winget install psmux</a:t>
-            </a:r>
-            <a:r>
-              <a:rPr sz="2400" b="0">
-                <a:solidFill>
-                  <a:srgbClr val="14161C"/>
-                </a:solidFill>
-                <a:latin typeface="Calibri"/>
-              </a:rPr>
-              <a:t>; WSL2 dùng tmux trong WSL.</a:t>
-            </a:r>
-          </a:p>
-        </p:txBody>
-      </p:sp>
-      <p:sp>
-        <p:nvSpPr>
-          <p:cNvPr id="11" name="code block"/>
-          <p:cNvSpPr/>
-          <p:nvPr/>
-        </p:nvSpPr>
-        <p:spPr>
-          <a:xfrm>
-            <a:off x="685800" y="4593335"/>
             <a:ext cx="10820400" cy="706119"/>
           </a:xfrm>
           <a:prstGeom prst="roundRect">
@@ -8160,13 +7755,13 @@
       </p:sp>
       <p:sp>
         <p:nvSpPr>
-          <p:cNvPr id="12" name="code"/>
-          <p:cNvSpPr txBox="1"/>
-          <p:nvPr/>
-        </p:nvSpPr>
-        <p:spPr>
-          <a:xfrm>
-            <a:off x="965200" y="4771135"/>
+          <p:cNvPr id="5" name="code"/>
+          <p:cNvSpPr txBox="1"/>
+          <p:nvPr/>
+        </p:nvSpPr>
+        <p:spPr>
+          <a:xfrm>
+            <a:off x="965200" y="1504695"/>
             <a:ext cx="10261600" cy="350519"/>
           </a:xfrm>
           <a:prstGeom prst="rect">
@@ -8192,63 +7787,14 @@
                 </a:solidFill>
                 <a:latin typeface="Consolas"/>
               </a:rPr>
-              <a:t>brew install tmux</a:t>
-            </a:r>
-          </a:p>
-        </p:txBody>
-      </p:sp>
-      <p:sp>
-        <p:nvSpPr>
-          <p:cNvPr id="13" name="text"/>
-          <p:cNvSpPr txBox="1"/>
-          <p:nvPr/>
-        </p:nvSpPr>
-        <p:spPr>
-          <a:xfrm>
-            <a:off x="685800" y="5426456"/>
-            <a:ext cx="10820400" cy="408431"/>
-          </a:xfrm>
-          <a:prstGeom prst="rect">
-            <a:avLst/>
-          </a:prstGeom>
-          <a:noFill/>
-        </p:spPr>
-        <p:txBody>
-          <a:bodyPr wrap="square" lIns="0" rIns="0" tIns="0" bIns="0" anchor="t">
-            <a:noAutofit/>
-          </a:bodyPr>
-          <a:lstStyle/>
-          <a:p>
-            <a:pPr algn="l">
-              <a:lnSpc>
-                <a:spcPct val="100000"/>
-              </a:lnSpc>
-            </a:pPr>
-            <a:r>
-              <a:rPr sz="2200" b="0">
-                <a:solidFill>
-                  <a:srgbClr val="14161C"/>
-                </a:solidFill>
-                <a:latin typeface="Calibri"/>
-              </a:rPr>
-              <a:t>Liên kết trong README: </a:t>
-            </a:r>
-            <a:r>
-              <a:rPr sz="2200" b="0" u="sng">
-                <a:solidFill>
-                  <a:srgbClr val="1F3FD1"/>
-                </a:solidFill>
-                <a:latin typeface="Calibri"/>
-                <a:hlinkClick r:id="rId2"/>
-              </a:rPr>
-              <a:t>tmux</a:t>
-            </a:r>
-          </a:p>
-        </p:txBody>
-      </p:sp>
-      <p:sp>
-        <p:nvSpPr>
-          <p:cNvPr id="14" name="page"/>
+              <a:t>npm i -g oh-my-claude-sisyphus@latest</a:t>
+            </a:r>
+          </a:p>
+        </p:txBody>
+      </p:sp>
+      <p:sp>
+        <p:nvSpPr>
+          <p:cNvPr id="6" name="page"/>
           <p:cNvSpPr txBox="1"/>
           <p:nvPr/>
         </p:nvSpPr>
@@ -8280,14 +7826,14 @@
                 </a:solidFill>
                 <a:latin typeface="Calibri"/>
               </a:rPr>
-              <a:t>17/33</a:t>
-            </a:r>
-          </a:p>
-        </p:txBody>
-      </p:sp>
-      <p:sp>
-        <p:nvSpPr>
-          <p:cNvPr id="15" name="rail"/>
+              <a:t>17/34</a:t>
+            </a:r>
+          </a:p>
+        </p:txBody>
+      </p:sp>
+      <p:sp>
+        <p:nvSpPr>
+          <p:cNvPr id="7" name="rail"/>
           <p:cNvSpPr/>
           <p:nvPr/>
         </p:nvSpPr>
@@ -8316,14 +7862,14 @@
       </p:sp>
       <p:sp>
         <p:nvSpPr>
-          <p:cNvPr id="16" name="progress"/>
+          <p:cNvPr id="8" name="progress"/>
           <p:cNvSpPr/>
           <p:nvPr/>
         </p:nvSpPr>
         <p:spPr>
           <a:xfrm>
             <a:off x="685800" y="6426200"/>
-            <a:ext cx="5574145" cy="88900"/>
+            <a:ext cx="5410200" cy="88900"/>
           </a:xfrm>
           <a:prstGeom prst="rect">
             <a:avLst/>
@@ -8345,7 +7891,7 @@
       </p:sp>
       <p:sp>
         <p:nvSpPr>
-          <p:cNvPr id="17" name="footer"/>
+          <p:cNvPr id="9" name="footer"/>
           <p:cNvSpPr txBox="1"/>
           <p:nvPr/>
         </p:nvSpPr>
@@ -8442,7 +7988,7 @@
                 </a:solidFill>
                 <a:latin typeface="Calibri"/>
               </a:rPr>
-              <a:t>Bước 9 (1/2)</a:t>
+              <a:t>Bước 8</a:t>
             </a:r>
           </a:p>
         </p:txBody>
@@ -8481,7 +8027,7 @@
                 </a:solidFill>
                 <a:latin typeface="Cambria"/>
               </a:rPr>
-              <a:t>Mở worker CLI bằng omc team</a:t>
+              <a:t>Cài tmux</a:t>
             </a:r>
           </a:p>
         </p:txBody>
@@ -8529,7 +8075,7 @@
                 </a:solidFill>
                 <a:latin typeface="Calibri"/>
               </a:rPr>
-              <a:t>Nhờ Codex (hay Gemini, Cursor) làm một phần việc như một worker riêng; worker tự tắt khi xong.</a:t>
+              <a:t>Worker của omc team là các pane tmux; README yêu cầu một phiên tmux đang hoạt động.</a:t>
             </a:r>
           </a:p>
         </p:txBody>
@@ -8543,114 +8089,6 @@
         <p:spPr>
           <a:xfrm>
             <a:off x="685800" y="2219960"/>
-            <a:ext cx="10820400" cy="1059688"/>
-          </a:xfrm>
-          <a:prstGeom prst="roundRect">
-            <a:avLst>
-              <a:gd name="adj" fmla="val 19175"/>
-            </a:avLst>
-          </a:prstGeom>
-          <a:solidFill>
-            <a:srgbClr val="E8E0CF"/>
-          </a:solidFill>
-          <a:ln>
-            <a:noFill/>
-          </a:ln>
-        </p:spPr>
-        <p:txBody>
-          <a:bodyPr rtlCol="0" anchor="ctr"/>
-          <a:lstStyle/>
-          <a:p>
-            <a:pPr algn="ctr"/>
-          </a:p>
-        </p:txBody>
-      </p:sp>
-      <p:sp>
-        <p:nvSpPr>
-          <p:cNvPr id="6" name="marker 1"/>
-          <p:cNvSpPr/>
-          <p:nvPr/>
-        </p:nvSpPr>
-        <p:spPr>
-          <a:xfrm>
-            <a:off x="965200" y="2495804"/>
-            <a:ext cx="508000" cy="508000"/>
-          </a:xfrm>
-          <a:prstGeom prst="ellipse">
-            <a:avLst/>
-          </a:prstGeom>
-          <a:solidFill>
-            <a:srgbClr val="1F3FD1"/>
-          </a:solidFill>
-          <a:ln>
-            <a:noFill/>
-          </a:ln>
-        </p:spPr>
-        <p:txBody>
-          <a:bodyPr rtlCol="0" anchor="ctr" lIns="0" rIns="0" tIns="0" bIns="0"/>
-          <a:lstStyle/>
-          <a:p>
-            <a:pPr algn="ctr"/>
-            <a:r>
-              <a:rPr sz="2000" b="1">
-                <a:solidFill>
-                  <a:srgbClr val="FFFFFF"/>
-                </a:solidFill>
-                <a:latin typeface="Calibri"/>
-              </a:rPr>
-              <a:t>1</a:t>
-            </a:r>
-          </a:p>
-        </p:txBody>
-      </p:sp>
-      <p:sp>
-        <p:nvSpPr>
-          <p:cNvPr id="7" name="card text"/>
-          <p:cNvSpPr txBox="1"/>
-          <p:nvPr/>
-        </p:nvSpPr>
-        <p:spPr>
-          <a:xfrm>
-            <a:off x="1701800" y="2359660"/>
-            <a:ext cx="9525000" cy="780288"/>
-          </a:xfrm>
-          <a:prstGeom prst="rect">
-            <a:avLst/>
-          </a:prstGeom>
-          <a:noFill/>
-        </p:spPr>
-        <p:txBody>
-          <a:bodyPr wrap="square" lIns="0" rIns="0" tIns="0" bIns="0" anchor="ctr">
-            <a:noAutofit/>
-          </a:bodyPr>
-          <a:lstStyle/>
-          <a:p>
-            <a:pPr algn="l">
-              <a:lnSpc>
-                <a:spcPct val="100000"/>
-              </a:lnSpc>
-            </a:pPr>
-            <a:r>
-              <a:rPr sz="2400" b="0">
-                <a:solidFill>
-                  <a:srgbClr val="14161C"/>
-                </a:solidFill>
-                <a:latin typeface="Calibri"/>
-              </a:rPr>
-              <a:t>Làm trong một phiên tmux đang hoạt động: README yêu cầu điều này nhưng không ghi cách mở phiên.</a:t>
-            </a:r>
-          </a:p>
-        </p:txBody>
-      </p:sp>
-      <p:sp>
-        <p:nvSpPr>
-          <p:cNvPr id="8" name="card"/>
-          <p:cNvSpPr/>
-          <p:nvPr/>
-        </p:nvSpPr>
-        <p:spPr>
-          <a:xfrm>
-            <a:off x="685800" y="3406648"/>
             <a:ext cx="10820400" cy="669544"/>
           </a:xfrm>
           <a:prstGeom prst="roundRect">
@@ -8675,20 +8113,20 @@
       </p:sp>
       <p:sp>
         <p:nvSpPr>
-          <p:cNvPr id="9" name="marker 2"/>
-          <p:cNvSpPr/>
-          <p:nvPr/>
-        </p:nvSpPr>
-        <p:spPr>
-          <a:xfrm>
-            <a:off x="965200" y="3487420"/>
+          <p:cNvPr id="6" name="marker 1"/>
+          <p:cNvSpPr/>
+          <p:nvPr/>
+        </p:nvSpPr>
+        <p:spPr>
+          <a:xfrm>
+            <a:off x="965200" y="2300731"/>
             <a:ext cx="508000" cy="508000"/>
           </a:xfrm>
           <a:prstGeom prst="ellipse">
             <a:avLst/>
           </a:prstGeom>
           <a:solidFill>
-            <a:srgbClr val="0F766E"/>
+            <a:srgbClr val="1F3FD1"/>
           </a:solidFill>
           <a:ln>
             <a:noFill/>
@@ -8706,20 +8144,20 @@
                 </a:solidFill>
                 <a:latin typeface="Calibri"/>
               </a:rPr>
-              <a:t>2</a:t>
-            </a:r>
-          </a:p>
-        </p:txBody>
-      </p:sp>
-      <p:sp>
-        <p:nvSpPr>
-          <p:cNvPr id="10" name="card text"/>
-          <p:cNvSpPr txBox="1"/>
-          <p:nvPr/>
-        </p:nvSpPr>
-        <p:spPr>
-          <a:xfrm>
-            <a:off x="1701800" y="3546348"/>
+              <a:t>1</a:t>
+            </a:r>
+          </a:p>
+        </p:txBody>
+      </p:sp>
+      <p:sp>
+        <p:nvSpPr>
+          <p:cNvPr id="7" name="card text"/>
+          <p:cNvSpPr txBox="1"/>
+          <p:nvPr/>
+        </p:nvSpPr>
+        <p:spPr>
+          <a:xfrm>
+            <a:off x="1701800" y="2359660"/>
             <a:ext cx="9525000" cy="390144"/>
           </a:xfrm>
           <a:prstGeom prst="rect">
@@ -8745,25 +8183,25 @@
                 </a:solidFill>
                 <a:latin typeface="Calibri"/>
               </a:rPr>
-              <a:t>Cài và đăng nhập CLI bạn định dùng (ở đây là codex) trước.</a:t>
-            </a:r>
-          </a:p>
-        </p:txBody>
-      </p:sp>
-      <p:sp>
-        <p:nvSpPr>
-          <p:cNvPr id="11" name="card"/>
-          <p:cNvSpPr/>
-          <p:nvPr/>
-        </p:nvSpPr>
-        <p:spPr>
-          <a:xfrm>
-            <a:off x="685800" y="4203192"/>
-            <a:ext cx="10820400" cy="1059688"/>
+              <a:t>Lệnh dưới đây dành cho macOS (Homebrew).</a:t>
+            </a:r>
+          </a:p>
+        </p:txBody>
+      </p:sp>
+      <p:sp>
+        <p:nvSpPr>
+          <p:cNvPr id="8" name="card"/>
+          <p:cNvSpPr/>
+          <p:nvPr/>
+        </p:nvSpPr>
+        <p:spPr>
+          <a:xfrm>
+            <a:off x="685800" y="3016504"/>
+            <a:ext cx="10820400" cy="1449832"/>
           </a:xfrm>
           <a:prstGeom prst="roundRect">
             <a:avLst>
-              <a:gd name="adj" fmla="val 19175"/>
+              <a:gd name="adj" fmla="val 14015"/>
             </a:avLst>
           </a:prstGeom>
           <a:solidFill>
@@ -8783,20 +8221,20 @@
       </p:sp>
       <p:sp>
         <p:nvSpPr>
-          <p:cNvPr id="12" name="marker 3"/>
-          <p:cNvSpPr/>
-          <p:nvPr/>
-        </p:nvSpPr>
-        <p:spPr>
-          <a:xfrm>
-            <a:off x="965200" y="4479036"/>
+          <p:cNvPr id="9" name="marker 2"/>
+          <p:cNvSpPr/>
+          <p:nvPr/>
+        </p:nvSpPr>
+        <p:spPr>
+          <a:xfrm>
+            <a:off x="965200" y="3487419"/>
             <a:ext cx="508000" cy="508000"/>
           </a:xfrm>
           <a:prstGeom prst="ellipse">
             <a:avLst/>
           </a:prstGeom>
           <a:solidFill>
-            <a:srgbClr val="1F3FD1"/>
+            <a:srgbClr val="0F766E"/>
           </a:solidFill>
           <a:ln>
             <a:noFill/>
@@ -8814,21 +8252,21 @@
                 </a:solidFill>
                 <a:latin typeface="Calibri"/>
               </a:rPr>
-              <a:t>3</a:t>
-            </a:r>
-          </a:p>
-        </p:txBody>
-      </p:sp>
-      <p:sp>
-        <p:nvSpPr>
-          <p:cNvPr id="13" name="card text"/>
-          <p:cNvSpPr txBox="1"/>
-          <p:nvPr/>
-        </p:nvSpPr>
-        <p:spPr>
-          <a:xfrm>
-            <a:off x="1701800" y="4342892"/>
-            <a:ext cx="9525000" cy="780288"/>
+              <a:t>2</a:t>
+            </a:r>
+          </a:p>
+        </p:txBody>
+      </p:sp>
+      <p:sp>
+        <p:nvSpPr>
+          <p:cNvPr id="10" name="card text"/>
+          <p:cNvSpPr txBox="1"/>
+          <p:nvPr/>
+        </p:nvSpPr>
+        <p:spPr>
+          <a:xfrm>
+            <a:off x="1701800" y="3156204"/>
+            <a:ext cx="9525000" cy="1170432"/>
           </a:xfrm>
           <a:prstGeom prst="rect">
             <a:avLst/>
@@ -8853,7 +8291,198 @@
                 </a:solidFill>
                 <a:latin typeface="Calibri"/>
               </a:rPr>
-              <a:t>Chạy lệnh dưới đây (một ví dụ trong bảng của README) để mở hai worker Codex xem xét luồng xác thực.</a:t>
+              <a:t>Ubuntu/Debian: </a:t>
+            </a:r>
+            <a:r>
+              <a:rPr sz="2200" b="0">
+                <a:solidFill>
+                  <a:srgbClr val="B02D16"/>
+                </a:solidFill>
+                <a:latin typeface="Consolas"/>
+              </a:rPr>
+              <a:t>sudo apt install tmux</a:t>
+            </a:r>
+            <a:r>
+              <a:rPr sz="2400" b="0">
+                <a:solidFill>
+                  <a:srgbClr val="14161C"/>
+                </a:solidFill>
+                <a:latin typeface="Calibri"/>
+              </a:rPr>
+              <a:t>. Fedora: </a:t>
+            </a:r>
+            <a:r>
+              <a:rPr sz="2200" b="0">
+                <a:solidFill>
+                  <a:srgbClr val="B02D16"/>
+                </a:solidFill>
+                <a:latin typeface="Consolas"/>
+              </a:rPr>
+              <a:t>sudo dnf install tmux</a:t>
+            </a:r>
+            <a:r>
+              <a:rPr sz="2400" b="0">
+                <a:solidFill>
+                  <a:srgbClr val="14161C"/>
+                </a:solidFill>
+                <a:latin typeface="Calibri"/>
+              </a:rPr>
+              <a:t>. Arch: </a:t>
+            </a:r>
+            <a:r>
+              <a:rPr sz="2200" b="0">
+                <a:solidFill>
+                  <a:srgbClr val="B02D16"/>
+                </a:solidFill>
+                <a:latin typeface="Consolas"/>
+              </a:rPr>
+              <a:t>sudo pacman -S tmux</a:t>
+            </a:r>
+            <a:r>
+              <a:rPr sz="2400" b="0">
+                <a:solidFill>
+                  <a:srgbClr val="14161C"/>
+                </a:solidFill>
+                <a:latin typeface="Calibri"/>
+              </a:rPr>
+              <a:t>. Windows: </a:t>
+            </a:r>
+            <a:r>
+              <a:rPr sz="2200" b="0">
+                <a:solidFill>
+                  <a:srgbClr val="B02D16"/>
+                </a:solidFill>
+                <a:latin typeface="Consolas"/>
+              </a:rPr>
+              <a:t>winget install psmux</a:t>
+            </a:r>
+            <a:r>
+              <a:rPr sz="2400" b="0">
+                <a:solidFill>
+                  <a:srgbClr val="14161C"/>
+                </a:solidFill>
+                <a:latin typeface="Calibri"/>
+              </a:rPr>
+              <a:t>; WSL2 dùng tmux trong WSL.</a:t>
+            </a:r>
+          </a:p>
+        </p:txBody>
+      </p:sp>
+      <p:sp>
+        <p:nvSpPr>
+          <p:cNvPr id="11" name="code block"/>
+          <p:cNvSpPr/>
+          <p:nvPr/>
+        </p:nvSpPr>
+        <p:spPr>
+          <a:xfrm>
+            <a:off x="685800" y="4593335"/>
+            <a:ext cx="10820400" cy="706119"/>
+          </a:xfrm>
+          <a:prstGeom prst="roundRect">
+            <a:avLst>
+              <a:gd name="adj" fmla="val 25179"/>
+            </a:avLst>
+          </a:prstGeom>
+          <a:solidFill>
+            <a:srgbClr val="14161C"/>
+          </a:solidFill>
+          <a:ln>
+            <a:noFill/>
+          </a:ln>
+        </p:spPr>
+        <p:txBody>
+          <a:bodyPr rtlCol="0" anchor="ctr"/>
+          <a:lstStyle/>
+          <a:p>
+            <a:pPr algn="ctr"/>
+          </a:p>
+        </p:txBody>
+      </p:sp>
+      <p:sp>
+        <p:nvSpPr>
+          <p:cNvPr id="12" name="code"/>
+          <p:cNvSpPr txBox="1"/>
+          <p:nvPr/>
+        </p:nvSpPr>
+        <p:spPr>
+          <a:xfrm>
+            <a:off x="965200" y="4771135"/>
+            <a:ext cx="10261600" cy="350519"/>
+          </a:xfrm>
+          <a:prstGeom prst="rect">
+            <a:avLst/>
+          </a:prstGeom>
+          <a:noFill/>
+        </p:spPr>
+        <p:txBody>
+          <a:bodyPr wrap="square" lIns="0" rIns="0" tIns="0" bIns="0" anchor="ctr">
+            <a:noAutofit/>
+          </a:bodyPr>
+          <a:lstStyle/>
+          <a:p>
+            <a:pPr algn="l">
+              <a:lnSpc>
+                <a:spcPct val="100000"/>
+              </a:lnSpc>
+            </a:pPr>
+            <a:r>
+              <a:rPr sz="2000" b="0">
+                <a:solidFill>
+                  <a:srgbClr val="F3EEE3"/>
+                </a:solidFill>
+                <a:latin typeface="Consolas"/>
+              </a:rPr>
+              <a:t>brew install tmux</a:t>
+            </a:r>
+          </a:p>
+        </p:txBody>
+      </p:sp>
+      <p:sp>
+        <p:nvSpPr>
+          <p:cNvPr id="13" name="text"/>
+          <p:cNvSpPr txBox="1"/>
+          <p:nvPr/>
+        </p:nvSpPr>
+        <p:spPr>
+          <a:xfrm>
+            <a:off x="685800" y="5426456"/>
+            <a:ext cx="10820400" cy="408431"/>
+          </a:xfrm>
+          <a:prstGeom prst="rect">
+            <a:avLst/>
+          </a:prstGeom>
+          <a:noFill/>
+        </p:spPr>
+        <p:txBody>
+          <a:bodyPr wrap="square" lIns="0" rIns="0" tIns="0" bIns="0" anchor="t">
+            <a:noAutofit/>
+          </a:bodyPr>
+          <a:lstStyle/>
+          <a:p>
+            <a:pPr algn="l">
+              <a:lnSpc>
+                <a:spcPct val="100000"/>
+              </a:lnSpc>
+            </a:pPr>
+            <a:r>
+              <a:rPr sz="2200" b="0">
+                <a:solidFill>
+                  <a:srgbClr val="14161C"/>
+                </a:solidFill>
+                <a:latin typeface="Calibri"/>
+              </a:rPr>
+              <a:t>Liên kết trong README: </a:t>
+            </a:r>
+            <a:r>
+              <a:rPr sz="2200" b="0" u="sng">
+                <a:solidFill>
+                  <a:srgbClr val="1F3FD1"/>
+                </a:solidFill>
+                <a:latin typeface="Calibri"/>
+                <a:hlinkClick r:id="rId2"/>
+              </a:rPr>
+              <a:t>tmux</a:t>
             </a:r>
           </a:p>
         </p:txBody>
@@ -8892,7 +8521,7 @@
                 </a:solidFill>
                 <a:latin typeface="Calibri"/>
               </a:rPr>
-              <a:t>18/33</a:t>
+              <a:t>18/34</a:t>
             </a:r>
           </a:p>
         </p:txBody>
@@ -8935,7 +8564,7 @@
         <p:spPr>
           <a:xfrm>
             <a:off x="685800" y="6426200"/>
-            <a:ext cx="5902036" cy="88900"/>
+            <a:ext cx="5728447" cy="88900"/>
           </a:xfrm>
           <a:prstGeom prst="rect">
             <a:avLst/>
@@ -9054,7 +8683,7 @@
                 </a:solidFill>
                 <a:latin typeface="Calibri"/>
               </a:rPr>
-              <a:t>Bước 9 (2/2)</a:t>
+              <a:t>Bước 9 (1/2)</a:t>
             </a:r>
           </a:p>
         </p:txBody>
@@ -9100,18 +8729,66 @@
       </p:sp>
       <p:sp>
         <p:nvSpPr>
-          <p:cNvPr id="4" name="card"/>
-          <p:cNvSpPr/>
+          <p:cNvPr id="4" name="text"/>
+          <p:cNvSpPr txBox="1"/>
           <p:nvPr/>
         </p:nvSpPr>
         <p:spPr>
           <a:xfrm>
             <a:off x="685800" y="1326895"/>
-            <a:ext cx="10820400" cy="1449832"/>
+            <a:ext cx="10820400" cy="766064"/>
+          </a:xfrm>
+          <a:prstGeom prst="rect">
+            <a:avLst/>
+          </a:prstGeom>
+          <a:noFill/>
+        </p:spPr>
+        <p:txBody>
+          <a:bodyPr wrap="square" lIns="0" rIns="0" tIns="0" bIns="0" anchor="t">
+            <a:noAutofit/>
+          </a:bodyPr>
+          <a:lstStyle/>
+          <a:p>
+            <a:pPr algn="l">
+              <a:lnSpc>
+                <a:spcPct val="100000"/>
+              </a:lnSpc>
+            </a:pPr>
+            <a:r>
+              <a:rPr sz="2200" b="1">
+                <a:solidFill>
+                  <a:srgbClr val="14161C"/>
+                </a:solidFill>
+                <a:latin typeface="Calibri"/>
+              </a:rPr>
+              <a:t>Mục đích: </a:t>
+            </a:r>
+            <a:r>
+              <a:rPr sz="2200" b="0">
+                <a:solidFill>
+                  <a:srgbClr val="14161C"/>
+                </a:solidFill>
+                <a:latin typeface="Calibri"/>
+              </a:rPr>
+              <a:t>Nhờ Codex (hay Gemini, Cursor) làm một phần việc như một worker riêng; worker tự tắt khi xong.</a:t>
+            </a:r>
+          </a:p>
+        </p:txBody>
+      </p:sp>
+      <p:sp>
+        <p:nvSpPr>
+          <p:cNvPr id="5" name="card"/>
+          <p:cNvSpPr/>
+          <p:nvPr/>
+        </p:nvSpPr>
+        <p:spPr>
+          <a:xfrm>
+            <a:off x="685800" y="2219960"/>
+            <a:ext cx="10820400" cy="1059688"/>
           </a:xfrm>
           <a:prstGeom prst="roundRect">
             <a:avLst>
-              <a:gd name="adj" fmla="val 14015"/>
+              <a:gd name="adj" fmla="val 19175"/>
             </a:avLst>
           </a:prstGeom>
           <a:solidFill>
@@ -9131,20 +8808,20 @@
       </p:sp>
       <p:sp>
         <p:nvSpPr>
-          <p:cNvPr id="5" name="marker 4"/>
-          <p:cNvSpPr/>
-          <p:nvPr/>
-        </p:nvSpPr>
-        <p:spPr>
-          <a:xfrm>
-            <a:off x="965200" y="1797812"/>
+          <p:cNvPr id="6" name="marker 1"/>
+          <p:cNvSpPr/>
+          <p:nvPr/>
+        </p:nvSpPr>
+        <p:spPr>
+          <a:xfrm>
+            <a:off x="965200" y="2495804"/>
             <a:ext cx="508000" cy="508000"/>
           </a:xfrm>
           <a:prstGeom prst="ellipse">
             <a:avLst/>
           </a:prstGeom>
           <a:solidFill>
-            <a:srgbClr val="0F766E"/>
+            <a:srgbClr val="1F3FD1"/>
           </a:solidFill>
           <a:ln>
             <a:noFill/>
@@ -9162,21 +8839,21 @@
                 </a:solidFill>
                 <a:latin typeface="Calibri"/>
               </a:rPr>
-              <a:t>4</a:t>
-            </a:r>
-          </a:p>
-        </p:txBody>
-      </p:sp>
-      <p:sp>
-        <p:nvSpPr>
-          <p:cNvPr id="6" name="card text"/>
-          <p:cNvSpPr txBox="1"/>
-          <p:nvPr/>
-        </p:nvSpPr>
-        <p:spPr>
-          <a:xfrm>
-            <a:off x="1701800" y="1466595"/>
-            <a:ext cx="9525000" cy="1170432"/>
+              <a:t>1</a:t>
+            </a:r>
+          </a:p>
+        </p:txBody>
+      </p:sp>
+      <p:sp>
+        <p:nvSpPr>
+          <p:cNvPr id="7" name="card text"/>
+          <p:cNvSpPr txBox="1"/>
+          <p:nvPr/>
+        </p:nvSpPr>
+        <p:spPr>
+          <a:xfrm>
+            <a:off x="1701800" y="2359660"/>
+            <a:ext cx="9525000" cy="780288"/>
           </a:xfrm>
           <a:prstGeom prst="rect">
             <a:avLst/>
@@ -9195,80 +8872,35 @@
               </a:lnSpc>
             </a:pPr>
             <a:r>
-              <a:rPr sz="2200" b="0">
-                <a:solidFill>
-                  <a:srgbClr val="B02D16"/>
-                </a:solidFill>
-                <a:latin typeface="Consolas"/>
-              </a:rPr>
-              <a:t>omc team status</a:t>
-            </a:r>
-            <a:r>
               <a:rPr sz="2400" b="0">
                 <a:solidFill>
                   <a:srgbClr val="14161C"/>
                 </a:solidFill>
                 <a:latin typeface="Calibri"/>
               </a:rPr>
-              <a:t> và </a:t>
-            </a:r>
-            <a:r>
-              <a:rPr sz="2200" b="0">
-                <a:solidFill>
-                  <a:srgbClr val="B02D16"/>
-                </a:solidFill>
-                <a:latin typeface="Consolas"/>
-              </a:rPr>
-              <a:t>omc team shutdown</a:t>
-            </a:r>
-            <a:r>
-              <a:rPr sz="2400" b="0">
-                <a:solidFill>
-                  <a:srgbClr val="14161C"/>
-                </a:solidFill>
-                <a:latin typeface="Calibri"/>
-              </a:rPr>
-              <a:t> cần tên đội đã mở; README không nói cách lấy tên. Xem </a:t>
-            </a:r>
-            <a:r>
-              <a:rPr sz="2200" b="0">
-                <a:solidFill>
-                  <a:srgbClr val="B02D16"/>
-                </a:solidFill>
-                <a:latin typeface="Consolas"/>
-              </a:rPr>
-              <a:t>docs/REFERENCE.md</a:t>
-            </a:r>
-            <a:r>
-              <a:rPr sz="2400" b="0">
-                <a:solidFill>
-                  <a:srgbClr val="14161C"/>
-                </a:solidFill>
-                <a:latin typeface="Calibri"/>
-              </a:rPr>
-              <a:t>: việc review auth flow có tên đội review-auth-flow.</a:t>
-            </a:r>
-          </a:p>
-        </p:txBody>
-      </p:sp>
-      <p:sp>
-        <p:nvSpPr>
-          <p:cNvPr id="7" name="code block"/>
-          <p:cNvSpPr/>
-          <p:nvPr/>
-        </p:nvSpPr>
-        <p:spPr>
-          <a:xfrm>
-            <a:off x="685800" y="2903728"/>
-            <a:ext cx="10820400" cy="706119"/>
+              <a:t>Làm trong một phiên tmux đang hoạt động: README yêu cầu điều này nhưng không ghi cách mở phiên.</a:t>
+            </a:r>
+          </a:p>
+        </p:txBody>
+      </p:sp>
+      <p:sp>
+        <p:nvSpPr>
+          <p:cNvPr id="8" name="card"/>
+          <p:cNvSpPr/>
+          <p:nvPr/>
+        </p:nvSpPr>
+        <p:spPr>
+          <a:xfrm>
+            <a:off x="685800" y="3406648"/>
+            <a:ext cx="10820400" cy="669544"/>
           </a:xfrm>
           <a:prstGeom prst="roundRect">
             <a:avLst>
-              <a:gd name="adj" fmla="val 25179"/>
+              <a:gd name="adj" fmla="val 30349"/>
             </a:avLst>
           </a:prstGeom>
           <a:solidFill>
-            <a:srgbClr val="14161C"/>
+            <a:srgbClr val="E8E0CF"/>
           </a:solidFill>
           <a:ln>
             <a:noFill/>
@@ -9284,14 +8916,52 @@
       </p:sp>
       <p:sp>
         <p:nvSpPr>
-          <p:cNvPr id="8" name="code"/>
-          <p:cNvSpPr txBox="1"/>
-          <p:nvPr/>
-        </p:nvSpPr>
-        <p:spPr>
-          <a:xfrm>
-            <a:off x="965200" y="3081528"/>
-            <a:ext cx="10261600" cy="350519"/>
+          <p:cNvPr id="9" name="marker 2"/>
+          <p:cNvSpPr/>
+          <p:nvPr/>
+        </p:nvSpPr>
+        <p:spPr>
+          <a:xfrm>
+            <a:off x="965200" y="3487420"/>
+            <a:ext cx="508000" cy="508000"/>
+          </a:xfrm>
+          <a:prstGeom prst="ellipse">
+            <a:avLst/>
+          </a:prstGeom>
+          <a:solidFill>
+            <a:srgbClr val="0F766E"/>
+          </a:solidFill>
+          <a:ln>
+            <a:noFill/>
+          </a:ln>
+        </p:spPr>
+        <p:txBody>
+          <a:bodyPr rtlCol="0" anchor="ctr" lIns="0" rIns="0" tIns="0" bIns="0"/>
+          <a:lstStyle/>
+          <a:p>
+            <a:pPr algn="ctr"/>
+            <a:r>
+              <a:rPr sz="2000" b="1">
+                <a:solidFill>
+                  <a:srgbClr val="FFFFFF"/>
+                </a:solidFill>
+                <a:latin typeface="Calibri"/>
+              </a:rPr>
+              <a:t>2</a:t>
+            </a:r>
+          </a:p>
+        </p:txBody>
+      </p:sp>
+      <p:sp>
+        <p:nvSpPr>
+          <p:cNvPr id="10" name="card text"/>
+          <p:cNvSpPr txBox="1"/>
+          <p:nvPr/>
+        </p:nvSpPr>
+        <p:spPr>
+          <a:xfrm>
+            <a:off x="1701800" y="3546348"/>
+            <a:ext cx="9525000" cy="390144"/>
           </a:xfrm>
           <a:prstGeom prst="rect">
             <a:avLst/>
@@ -9310,20 +8980,128 @@
               </a:lnSpc>
             </a:pPr>
             <a:r>
-              <a:rPr sz="2000" b="0">
-                <a:solidFill>
-                  <a:srgbClr val="F3EEE3"/>
-                </a:solidFill>
-                <a:latin typeface="Consolas"/>
-              </a:rPr>
-              <a:t>omc team 2:codex "review auth flow"</a:t>
-            </a:r>
-          </a:p>
-        </p:txBody>
-      </p:sp>
-      <p:sp>
-        <p:nvSpPr>
-          <p:cNvPr id="9" name="page"/>
+              <a:rPr sz="2400" b="0">
+                <a:solidFill>
+                  <a:srgbClr val="14161C"/>
+                </a:solidFill>
+                <a:latin typeface="Calibri"/>
+              </a:rPr>
+              <a:t>Cài và đăng nhập CLI bạn định dùng (ở đây là codex) trước.</a:t>
+            </a:r>
+          </a:p>
+        </p:txBody>
+      </p:sp>
+      <p:sp>
+        <p:nvSpPr>
+          <p:cNvPr id="11" name="card"/>
+          <p:cNvSpPr/>
+          <p:nvPr/>
+        </p:nvSpPr>
+        <p:spPr>
+          <a:xfrm>
+            <a:off x="685800" y="4203192"/>
+            <a:ext cx="10820400" cy="1059688"/>
+          </a:xfrm>
+          <a:prstGeom prst="roundRect">
+            <a:avLst>
+              <a:gd name="adj" fmla="val 19175"/>
+            </a:avLst>
+          </a:prstGeom>
+          <a:solidFill>
+            <a:srgbClr val="E8E0CF"/>
+          </a:solidFill>
+          <a:ln>
+            <a:noFill/>
+          </a:ln>
+        </p:spPr>
+        <p:txBody>
+          <a:bodyPr rtlCol="0" anchor="ctr"/>
+          <a:lstStyle/>
+          <a:p>
+            <a:pPr algn="ctr"/>
+          </a:p>
+        </p:txBody>
+      </p:sp>
+      <p:sp>
+        <p:nvSpPr>
+          <p:cNvPr id="12" name="marker 3"/>
+          <p:cNvSpPr/>
+          <p:nvPr/>
+        </p:nvSpPr>
+        <p:spPr>
+          <a:xfrm>
+            <a:off x="965200" y="4479036"/>
+            <a:ext cx="508000" cy="508000"/>
+          </a:xfrm>
+          <a:prstGeom prst="ellipse">
+            <a:avLst/>
+          </a:prstGeom>
+          <a:solidFill>
+            <a:srgbClr val="1F3FD1"/>
+          </a:solidFill>
+          <a:ln>
+            <a:noFill/>
+          </a:ln>
+        </p:spPr>
+        <p:txBody>
+          <a:bodyPr rtlCol="0" anchor="ctr" lIns="0" rIns="0" tIns="0" bIns="0"/>
+          <a:lstStyle/>
+          <a:p>
+            <a:pPr algn="ctr"/>
+            <a:r>
+              <a:rPr sz="2000" b="1">
+                <a:solidFill>
+                  <a:srgbClr val="FFFFFF"/>
+                </a:solidFill>
+                <a:latin typeface="Calibri"/>
+              </a:rPr>
+              <a:t>3</a:t>
+            </a:r>
+          </a:p>
+        </p:txBody>
+      </p:sp>
+      <p:sp>
+        <p:nvSpPr>
+          <p:cNvPr id="13" name="card text"/>
+          <p:cNvSpPr txBox="1"/>
+          <p:nvPr/>
+        </p:nvSpPr>
+        <p:spPr>
+          <a:xfrm>
+            <a:off x="1701800" y="4342892"/>
+            <a:ext cx="9525000" cy="780288"/>
+          </a:xfrm>
+          <a:prstGeom prst="rect">
+            <a:avLst/>
+          </a:prstGeom>
+          <a:noFill/>
+        </p:spPr>
+        <p:txBody>
+          <a:bodyPr wrap="square" lIns="0" rIns="0" tIns="0" bIns="0" anchor="ctr">
+            <a:noAutofit/>
+          </a:bodyPr>
+          <a:lstStyle/>
+          <a:p>
+            <a:pPr algn="l">
+              <a:lnSpc>
+                <a:spcPct val="100000"/>
+              </a:lnSpc>
+            </a:pPr>
+            <a:r>
+              <a:rPr sz="2400" b="0">
+                <a:solidFill>
+                  <a:srgbClr val="14161C"/>
+                </a:solidFill>
+                <a:latin typeface="Calibri"/>
+              </a:rPr>
+              <a:t>Chạy lệnh dưới đây (một ví dụ trong bảng của README) để mở hai worker Codex xem xét luồng xác thực.</a:t>
+            </a:r>
+          </a:p>
+        </p:txBody>
+      </p:sp>
+      <p:sp>
+        <p:nvSpPr>
+          <p:cNvPr id="14" name="page"/>
           <p:cNvSpPr txBox="1"/>
           <p:nvPr/>
         </p:nvSpPr>
@@ -9355,14 +9133,14 @@
                 </a:solidFill>
                 <a:latin typeface="Calibri"/>
               </a:rPr>
-              <a:t>19/33</a:t>
-            </a:r>
-          </a:p>
-        </p:txBody>
-      </p:sp>
-      <p:sp>
-        <p:nvSpPr>
-          <p:cNvPr id="10" name="rail"/>
+              <a:t>19/34</a:t>
+            </a:r>
+          </a:p>
+        </p:txBody>
+      </p:sp>
+      <p:sp>
+        <p:nvSpPr>
+          <p:cNvPr id="15" name="rail"/>
           <p:cNvSpPr/>
           <p:nvPr/>
         </p:nvSpPr>
@@ -9391,14 +9169,14 @@
       </p:sp>
       <p:sp>
         <p:nvSpPr>
-          <p:cNvPr id="11" name="progress"/>
+          <p:cNvPr id="16" name="progress"/>
           <p:cNvSpPr/>
           <p:nvPr/>
         </p:nvSpPr>
         <p:spPr>
           <a:xfrm>
             <a:off x="685800" y="6426200"/>
-            <a:ext cx="6229927" cy="88900"/>
+            <a:ext cx="6046694" cy="88900"/>
           </a:xfrm>
           <a:prstGeom prst="rect">
             <a:avLst/>
@@ -9420,7 +9198,7 @@
       </p:sp>
       <p:sp>
         <p:nvSpPr>
-          <p:cNvPr id="12" name="footer"/>
+          <p:cNvPr id="17" name="footer"/>
           <p:cNvSpPr txBox="1"/>
           <p:nvPr/>
         </p:nvSpPr>
@@ -9644,7 +9422,7 @@
                 </a:solidFill>
                 <a:latin typeface="Calibri"/>
               </a:rPr>
-              <a:t>2/33</a:t>
+              <a:t>2/34</a:t>
             </a:r>
           </a:p>
         </p:txBody>
@@ -9687,7 +9465,7 @@
         <p:spPr>
           <a:xfrm>
             <a:off x="685800" y="6426200"/>
-            <a:ext cx="655781" cy="88900"/>
+            <a:ext cx="636494" cy="88900"/>
           </a:xfrm>
           <a:prstGeom prst="rect">
             <a:avLst/>
@@ -9774,7 +9552,46 @@
       <p:grpSpPr/>
       <p:sp>
         <p:nvSpPr>
-          <p:cNvPr id="2" name="title"/>
+          <p:cNvPr id="2" name="kicker"/>
+          <p:cNvSpPr txBox="1"/>
+          <p:nvPr/>
+        </p:nvSpPr>
+        <p:spPr>
+          <a:xfrm>
+            <a:off x="685800" y="304800"/>
+            <a:ext cx="8128000" cy="279400"/>
+          </a:xfrm>
+          <a:prstGeom prst="rect">
+            <a:avLst/>
+          </a:prstGeom>
+          <a:noFill/>
+        </p:spPr>
+        <p:txBody>
+          <a:bodyPr wrap="square" lIns="0" rIns="0" tIns="0" bIns="0" anchor="t">
+            <a:noAutofit/>
+          </a:bodyPr>
+          <a:lstStyle/>
+          <a:p>
+            <a:pPr algn="l">
+              <a:lnSpc>
+                <a:spcPct val="100000"/>
+              </a:lnSpc>
+            </a:pPr>
+            <a:r>
+              <a:rPr sz="1600" b="1">
+                <a:solidFill>
+                  <a:srgbClr val="1F3FD1"/>
+                </a:solidFill>
+                <a:latin typeface="Calibri"/>
+              </a:rPr>
+              <a:t>Bước 9 (2/2)</a:t>
+            </a:r>
+          </a:p>
+        </p:txBody>
+      </p:sp>
+      <p:sp>
+        <p:nvSpPr>
+          <p:cNvPr id="3" name="title"/>
           <p:cNvSpPr txBox="1"/>
           <p:nvPr/>
         </p:nvSpPr>
@@ -9806,29 +9623,29 @@
                 </a:solidFill>
                 <a:latin typeface="Cambria"/>
               </a:rPr>
-              <a:t>Kiểm tra kết quả</a:t>
-            </a:r>
-          </a:p>
-        </p:txBody>
-      </p:sp>
-      <p:sp>
-        <p:nvSpPr>
-          <p:cNvPr id="3" name="card"/>
+              <a:t>Mở worker CLI bằng omc team</a:t>
+            </a:r>
+          </a:p>
+        </p:txBody>
+      </p:sp>
+      <p:sp>
+        <p:nvSpPr>
+          <p:cNvPr id="4" name="card"/>
           <p:cNvSpPr/>
           <p:nvPr/>
         </p:nvSpPr>
         <p:spPr>
           <a:xfrm>
             <a:off x="685800" y="1326895"/>
-            <a:ext cx="10820400" cy="1742439"/>
+            <a:ext cx="10820400" cy="1449832"/>
           </a:xfrm>
           <a:prstGeom prst="roundRect">
             <a:avLst>
-              <a:gd name="adj" fmla="val 11661"/>
+              <a:gd name="adj" fmla="val 14015"/>
             </a:avLst>
           </a:prstGeom>
           <a:solidFill>
-            <a:srgbClr val="D5EBDD"/>
+            <a:srgbClr val="E8E0CF"/>
           </a:solidFill>
           <a:ln>
             <a:noFill/>
@@ -9844,14 +9661,52 @@
       </p:sp>
       <p:sp>
         <p:nvSpPr>
-          <p:cNvPr id="4" name="card text"/>
-          <p:cNvSpPr txBox="1"/>
-          <p:nvPr/>
-        </p:nvSpPr>
-        <p:spPr>
-          <a:xfrm>
-            <a:off x="965200" y="1466595"/>
-            <a:ext cx="10261600" cy="1463039"/>
+          <p:cNvPr id="5" name="marker 4"/>
+          <p:cNvSpPr/>
+          <p:nvPr/>
+        </p:nvSpPr>
+        <p:spPr>
+          <a:xfrm>
+            <a:off x="965200" y="1797812"/>
+            <a:ext cx="508000" cy="508000"/>
+          </a:xfrm>
+          <a:prstGeom prst="ellipse">
+            <a:avLst/>
+          </a:prstGeom>
+          <a:solidFill>
+            <a:srgbClr val="0F766E"/>
+          </a:solidFill>
+          <a:ln>
+            <a:noFill/>
+          </a:ln>
+        </p:spPr>
+        <p:txBody>
+          <a:bodyPr rtlCol="0" anchor="ctr" lIns="0" rIns="0" tIns="0" bIns="0"/>
+          <a:lstStyle/>
+          <a:p>
+            <a:pPr algn="ctr"/>
+            <a:r>
+              <a:rPr sz="2000" b="1">
+                <a:solidFill>
+                  <a:srgbClr val="FFFFFF"/>
+                </a:solidFill>
+                <a:latin typeface="Calibri"/>
+              </a:rPr>
+              <a:t>4</a:t>
+            </a:r>
+          </a:p>
+        </p:txBody>
+      </p:sp>
+      <p:sp>
+        <p:nvSpPr>
+          <p:cNvPr id="6" name="card text"/>
+          <p:cNvSpPr txBox="1"/>
+          <p:nvPr/>
+        </p:nvSpPr>
+        <p:spPr>
+          <a:xfrm>
+            <a:off x="1701800" y="1466595"/>
+            <a:ext cx="9525000" cy="1170432"/>
           </a:xfrm>
           <a:prstGeom prst="rect">
             <a:avLst/>
@@ -9870,20 +9725,135 @@
               </a:lnSpc>
             </a:pPr>
             <a:r>
-              <a:rPr sz="3000" b="0">
+              <a:rPr sz="2200" b="0">
+                <a:solidFill>
+                  <a:srgbClr val="B02D16"/>
+                </a:solidFill>
+                <a:latin typeface="Consolas"/>
+              </a:rPr>
+              <a:t>omc team status</a:t>
+            </a:r>
+            <a:r>
+              <a:rPr sz="2400" b="0">
                 <a:solidFill>
                   <a:srgbClr val="14161C"/>
                 </a:solidFill>
                 <a:latin typeface="Calibri"/>
               </a:rPr>
-              <a:t>Trong Claude Code, /team bắt đầu chuỗi giai đoạn của Team. Ở terminal, omc team status với tên đội cho biết trạng thái; README không mô tả chi tiết đầu ra.</a:t>
-            </a:r>
-          </a:p>
-        </p:txBody>
-      </p:sp>
-      <p:sp>
-        <p:nvSpPr>
-          <p:cNvPr id="5" name="page"/>
+              <a:t> và </a:t>
+            </a:r>
+            <a:r>
+              <a:rPr sz="2200" b="0">
+                <a:solidFill>
+                  <a:srgbClr val="B02D16"/>
+                </a:solidFill>
+                <a:latin typeface="Consolas"/>
+              </a:rPr>
+              <a:t>omc team shutdown</a:t>
+            </a:r>
+            <a:r>
+              <a:rPr sz="2400" b="0">
+                <a:solidFill>
+                  <a:srgbClr val="14161C"/>
+                </a:solidFill>
+                <a:latin typeface="Calibri"/>
+              </a:rPr>
+              <a:t> cần tên đội đã mở; README không nói cách lấy tên. Xem </a:t>
+            </a:r>
+            <a:r>
+              <a:rPr sz="2200" b="0">
+                <a:solidFill>
+                  <a:srgbClr val="B02D16"/>
+                </a:solidFill>
+                <a:latin typeface="Consolas"/>
+              </a:rPr>
+              <a:t>docs/REFERENCE.md</a:t>
+            </a:r>
+            <a:r>
+              <a:rPr sz="2400" b="0">
+                <a:solidFill>
+                  <a:srgbClr val="14161C"/>
+                </a:solidFill>
+                <a:latin typeface="Calibri"/>
+              </a:rPr>
+              <a:t>: việc review auth flow có tên đội review-auth-flow.</a:t>
+            </a:r>
+          </a:p>
+        </p:txBody>
+      </p:sp>
+      <p:sp>
+        <p:nvSpPr>
+          <p:cNvPr id="7" name="code block"/>
+          <p:cNvSpPr/>
+          <p:nvPr/>
+        </p:nvSpPr>
+        <p:spPr>
+          <a:xfrm>
+            <a:off x="685800" y="2903728"/>
+            <a:ext cx="10820400" cy="706119"/>
+          </a:xfrm>
+          <a:prstGeom prst="roundRect">
+            <a:avLst>
+              <a:gd name="adj" fmla="val 25179"/>
+            </a:avLst>
+          </a:prstGeom>
+          <a:solidFill>
+            <a:srgbClr val="14161C"/>
+          </a:solidFill>
+          <a:ln>
+            <a:noFill/>
+          </a:ln>
+        </p:spPr>
+        <p:txBody>
+          <a:bodyPr rtlCol="0" anchor="ctr"/>
+          <a:lstStyle/>
+          <a:p>
+            <a:pPr algn="ctr"/>
+          </a:p>
+        </p:txBody>
+      </p:sp>
+      <p:sp>
+        <p:nvSpPr>
+          <p:cNvPr id="8" name="code"/>
+          <p:cNvSpPr txBox="1"/>
+          <p:nvPr/>
+        </p:nvSpPr>
+        <p:spPr>
+          <a:xfrm>
+            <a:off x="965200" y="3081528"/>
+            <a:ext cx="10261600" cy="350519"/>
+          </a:xfrm>
+          <a:prstGeom prst="rect">
+            <a:avLst/>
+          </a:prstGeom>
+          <a:noFill/>
+        </p:spPr>
+        <p:txBody>
+          <a:bodyPr wrap="square" lIns="0" rIns="0" tIns="0" bIns="0" anchor="ctr">
+            <a:noAutofit/>
+          </a:bodyPr>
+          <a:lstStyle/>
+          <a:p>
+            <a:pPr algn="l">
+              <a:lnSpc>
+                <a:spcPct val="100000"/>
+              </a:lnSpc>
+            </a:pPr>
+            <a:r>
+              <a:rPr sz="2000" b="0">
+                <a:solidFill>
+                  <a:srgbClr val="F3EEE3"/>
+                </a:solidFill>
+                <a:latin typeface="Consolas"/>
+              </a:rPr>
+              <a:t>omc team 2:codex "review auth flow"</a:t>
+            </a:r>
+          </a:p>
+        </p:txBody>
+      </p:sp>
+      <p:sp>
+        <p:nvSpPr>
+          <p:cNvPr id="9" name="page"/>
           <p:cNvSpPr txBox="1"/>
           <p:nvPr/>
         </p:nvSpPr>
@@ -9915,14 +9885,14 @@
                 </a:solidFill>
                 <a:latin typeface="Calibri"/>
               </a:rPr>
-              <a:t>20/33</a:t>
-            </a:r>
-          </a:p>
-        </p:txBody>
-      </p:sp>
-      <p:sp>
-        <p:nvSpPr>
-          <p:cNvPr id="6" name="rail"/>
+              <a:t>20/34</a:t>
+            </a:r>
+          </a:p>
+        </p:txBody>
+      </p:sp>
+      <p:sp>
+        <p:nvSpPr>
+          <p:cNvPr id="10" name="rail"/>
           <p:cNvSpPr/>
           <p:nvPr/>
         </p:nvSpPr>
@@ -9951,14 +9921,14 @@
       </p:sp>
       <p:sp>
         <p:nvSpPr>
-          <p:cNvPr id="7" name="progress"/>
+          <p:cNvPr id="11" name="progress"/>
           <p:cNvSpPr/>
           <p:nvPr/>
         </p:nvSpPr>
         <p:spPr>
           <a:xfrm>
             <a:off x="685800" y="6426200"/>
-            <a:ext cx="6557818" cy="88900"/>
+            <a:ext cx="6364941" cy="88900"/>
           </a:xfrm>
           <a:prstGeom prst="rect">
             <a:avLst/>
@@ -9980,7 +9950,7 @@
       </p:sp>
       <p:sp>
         <p:nvSpPr>
-          <p:cNvPr id="8" name="footer"/>
+          <p:cNvPr id="12" name="footer"/>
           <p:cNvSpPr txBox="1"/>
           <p:nvPr/>
         </p:nvSpPr>
@@ -10077,7 +10047,7 @@
                 </a:solidFill>
                 <a:latin typeface="Cambria"/>
               </a:rPr>
-              <a:t>Lỗi thường gặp (1/2)</a:t>
+              <a:t>Kiểm tra kết quả</a:t>
             </a:r>
           </a:p>
         </p:txBody>
@@ -10091,15 +10061,15 @@
         <p:spPr>
           <a:xfrm>
             <a:off x="685800" y="1326895"/>
-            <a:ext cx="10820400" cy="1448308"/>
+            <a:ext cx="10820400" cy="1742439"/>
           </a:xfrm>
           <a:prstGeom prst="roundRect">
             <a:avLst>
-              <a:gd name="adj" fmla="val 14030"/>
+              <a:gd name="adj" fmla="val 11661"/>
             </a:avLst>
           </a:prstGeom>
           <a:solidFill>
-            <a:srgbClr val="F3DFC1"/>
+            <a:srgbClr val="D5EBDD"/>
           </a:solidFill>
           <a:ln>
             <a:noFill/>
@@ -10115,22 +10085,98 @@
       </p:sp>
       <p:sp>
         <p:nvSpPr>
-          <p:cNvPr id="4" name="bar"/>
-          <p:cNvSpPr/>
-          <p:nvPr/>
-        </p:nvSpPr>
-        <p:spPr>
-          <a:xfrm>
-            <a:off x="889000" y="1466595"/>
-            <a:ext cx="76200" cy="1168908"/>
-          </a:xfrm>
-          <a:prstGeom prst="roundRect">
-            <a:avLst>
-              <a:gd name="adj" fmla="val 50000"/>
-            </a:avLst>
-          </a:prstGeom>
-          <a:solidFill>
-            <a:srgbClr val="E8472B"/>
+          <p:cNvPr id="4" name="card text"/>
+          <p:cNvSpPr txBox="1"/>
+          <p:nvPr/>
+        </p:nvSpPr>
+        <p:spPr>
+          <a:xfrm>
+            <a:off x="965200" y="1466595"/>
+            <a:ext cx="10261600" cy="1463039"/>
+          </a:xfrm>
+          <a:prstGeom prst="rect">
+            <a:avLst/>
+          </a:prstGeom>
+          <a:noFill/>
+        </p:spPr>
+        <p:txBody>
+          <a:bodyPr wrap="square" lIns="0" rIns="0" tIns="0" bIns="0" anchor="ctr">
+            <a:noAutofit/>
+          </a:bodyPr>
+          <a:lstStyle/>
+          <a:p>
+            <a:pPr algn="l">
+              <a:lnSpc>
+                <a:spcPct val="100000"/>
+              </a:lnSpc>
+            </a:pPr>
+            <a:r>
+              <a:rPr sz="3000" b="0">
+                <a:solidFill>
+                  <a:srgbClr val="14161C"/>
+                </a:solidFill>
+                <a:latin typeface="Calibri"/>
+              </a:rPr>
+              <a:t>Trong Claude Code, /team bắt đầu chuỗi giai đoạn của Team. Ở terminal, omc team status với tên đội cho biết trạng thái; README không mô tả chi tiết đầu ra.</a:t>
+            </a:r>
+          </a:p>
+        </p:txBody>
+      </p:sp>
+      <p:sp>
+        <p:nvSpPr>
+          <p:cNvPr id="5" name="page"/>
+          <p:cNvSpPr txBox="1"/>
+          <p:nvPr/>
+        </p:nvSpPr>
+        <p:spPr>
+          <a:xfrm>
+            <a:off x="9474200" y="304800"/>
+            <a:ext cx="2032000" cy="279400"/>
+          </a:xfrm>
+          <a:prstGeom prst="rect">
+            <a:avLst/>
+          </a:prstGeom>
+          <a:noFill/>
+        </p:spPr>
+        <p:txBody>
+          <a:bodyPr wrap="square" lIns="0" rIns="0" tIns="0" bIns="0" anchor="t">
+            <a:noAutofit/>
+          </a:bodyPr>
+          <a:lstStyle/>
+          <a:p>
+            <a:pPr algn="r">
+              <a:lnSpc>
+                <a:spcPct val="100000"/>
+              </a:lnSpc>
+            </a:pPr>
+            <a:r>
+              <a:rPr sz="1600" b="1">
+                <a:solidFill>
+                  <a:srgbClr val="14161C"/>
+                </a:solidFill>
+                <a:latin typeface="Calibri"/>
+              </a:rPr>
+              <a:t>21/34</a:t>
+            </a:r>
+          </a:p>
+        </p:txBody>
+      </p:sp>
+      <p:sp>
+        <p:nvSpPr>
+          <p:cNvPr id="6" name="rail"/>
+          <p:cNvSpPr/>
+          <p:nvPr/>
+        </p:nvSpPr>
+        <p:spPr>
+          <a:xfrm>
+            <a:off x="685800" y="6451600"/>
+            <a:ext cx="10820400" cy="38100"/>
+          </a:xfrm>
+          <a:prstGeom prst="rect">
+            <a:avLst/>
+          </a:prstGeom>
+          <a:solidFill>
+            <a:srgbClr val="6B6A66"/>
           </a:solidFill>
           <a:ln>
             <a:noFill/>
@@ -10146,98 +10192,20 @@
       </p:sp>
       <p:sp>
         <p:nvSpPr>
-          <p:cNvPr id="5" name="card text"/>
-          <p:cNvSpPr txBox="1"/>
-          <p:nvPr/>
-        </p:nvSpPr>
-        <p:spPr>
-          <a:xfrm>
-            <a:off x="1143000" y="1466595"/>
-            <a:ext cx="10083800" cy="1168908"/>
-          </a:xfrm>
-          <a:prstGeom prst="rect">
-            <a:avLst/>
-          </a:prstGeom>
-          <a:noFill/>
-        </p:spPr>
-        <p:txBody>
-          <a:bodyPr wrap="square" lIns="0" rIns="0" tIns="0" bIns="0" anchor="ctr">
-            <a:noAutofit/>
-          </a:bodyPr>
-          <a:lstStyle/>
-          <a:p>
-            <a:pPr algn="l">
-              <a:lnSpc>
-                <a:spcPct val="100000"/>
-              </a:lnSpc>
-            </a:pPr>
-            <a:r>
-              <a:rPr sz="2400" b="1">
-                <a:solidFill>
-                  <a:srgbClr val="14161C"/>
-                </a:solidFill>
-                <a:latin typeface="Calibri"/>
-              </a:rPr>
-              <a:t>npm cảnh báo deprecated prebuild-install@7.1.3 khi cài CLI</a:t>
-            </a:r>
-          </a:p>
-          <a:p>
-            <a:pPr algn="l">
-              <a:lnSpc>
-                <a:spcPct val="100000"/>
-              </a:lnSpc>
-              <a:spcBef>
-                <a:spcPts val="500"/>
-              </a:spcBef>
-            </a:pPr>
-            <a:r>
-              <a:rPr sz="2200" b="0">
-                <a:solidFill>
-                  <a:srgbClr val="14161C"/>
-                </a:solidFill>
-                <a:latin typeface="Calibri"/>
-              </a:rPr>
-              <a:t>README nói cảnh báo đến từ phụ thuộc </a:t>
-            </a:r>
-            <a:r>
-              <a:rPr sz="2000" b="0">
-                <a:solidFill>
-                  <a:srgbClr val="B02D16"/>
-                </a:solidFill>
-                <a:latin typeface="Consolas"/>
-              </a:rPr>
-              <a:t>better-sqlite3</a:t>
-            </a:r>
-            <a:r>
-              <a:rPr sz="2200" b="0">
-                <a:solidFill>
-                  <a:srgbClr val="14161C"/>
-                </a:solidFill>
-                <a:latin typeface="Calibri"/>
-              </a:rPr>
-              <a:t> và không có nghĩa là cài thất bại.</a:t>
-            </a:r>
-          </a:p>
-        </p:txBody>
-      </p:sp>
-      <p:sp>
-        <p:nvSpPr>
-          <p:cNvPr id="6" name="card"/>
-          <p:cNvSpPr/>
-          <p:nvPr/>
-        </p:nvSpPr>
-        <p:spPr>
-          <a:xfrm>
-            <a:off x="685800" y="2902204"/>
-            <a:ext cx="10820400" cy="1090676"/>
-          </a:xfrm>
-          <a:prstGeom prst="roundRect">
-            <a:avLst>
-              <a:gd name="adj" fmla="val 18630"/>
-            </a:avLst>
-          </a:prstGeom>
-          <a:solidFill>
-            <a:srgbClr val="F3DFC1"/>
+          <p:cNvPr id="7" name="progress"/>
+          <p:cNvSpPr/>
+          <p:nvPr/>
+        </p:nvSpPr>
+        <p:spPr>
+          <a:xfrm>
+            <a:off x="685800" y="6426200"/>
+            <a:ext cx="6683188" cy="88900"/>
+          </a:xfrm>
+          <a:prstGeom prst="rect">
+            <a:avLst/>
+          </a:prstGeom>
+          <a:solidFill>
+            <a:srgbClr val="E8472B"/>
           </a:solidFill>
           <a:ln>
             <a:noFill/>
@@ -10253,331 +10221,7 @@
       </p:sp>
       <p:sp>
         <p:nvSpPr>
-          <p:cNvPr id="7" name="bar"/>
-          <p:cNvSpPr/>
-          <p:nvPr/>
-        </p:nvSpPr>
-        <p:spPr>
-          <a:xfrm>
-            <a:off x="889000" y="3041904"/>
-            <a:ext cx="76200" cy="811276"/>
-          </a:xfrm>
-          <a:prstGeom prst="roundRect">
-            <a:avLst>
-              <a:gd name="adj" fmla="val 50000"/>
-            </a:avLst>
-          </a:prstGeom>
-          <a:solidFill>
-            <a:srgbClr val="E8472B"/>
-          </a:solidFill>
-          <a:ln>
-            <a:noFill/>
-          </a:ln>
-        </p:spPr>
-        <p:txBody>
-          <a:bodyPr rtlCol="0" anchor="ctr"/>
-          <a:lstStyle/>
-          <a:p>
-            <a:pPr algn="ctr"/>
-          </a:p>
-        </p:txBody>
-      </p:sp>
-      <p:sp>
-        <p:nvSpPr>
-          <p:cNvPr id="8" name="card text"/>
-          <p:cNvSpPr txBox="1"/>
-          <p:nvPr/>
-        </p:nvSpPr>
-        <p:spPr>
-          <a:xfrm>
-            <a:off x="1143000" y="3041904"/>
-            <a:ext cx="10083800" cy="811276"/>
-          </a:xfrm>
-          <a:prstGeom prst="rect">
-            <a:avLst/>
-          </a:prstGeom>
-          <a:noFill/>
-        </p:spPr>
-        <p:txBody>
-          <a:bodyPr wrap="square" lIns="0" rIns="0" tIns="0" bIns="0" anchor="ctr">
-            <a:noAutofit/>
-          </a:bodyPr>
-          <a:lstStyle/>
-          <a:p>
-            <a:pPr algn="l">
-              <a:lnSpc>
-                <a:spcPct val="100000"/>
-              </a:lnSpc>
-            </a:pPr>
-            <a:r>
-              <a:rPr sz="2400" b="1">
-                <a:solidFill>
-                  <a:srgbClr val="14161C"/>
-                </a:solidFill>
-                <a:latin typeface="Calibri"/>
-              </a:rPr>
-              <a:t>Dán hai lệnh /plugin cùng lúc thì lỗi</a:t>
-            </a:r>
-          </a:p>
-          <a:p>
-            <a:pPr algn="l">
-              <a:lnSpc>
-                <a:spcPct val="100000"/>
-              </a:lnSpc>
-              <a:spcBef>
-                <a:spcPts val="500"/>
-              </a:spcBef>
-            </a:pPr>
-            <a:r>
-              <a:rPr sz="2200" b="0">
-                <a:solidFill>
-                  <a:srgbClr val="14161C"/>
-                </a:solidFill>
-                <a:latin typeface="Calibri"/>
-              </a:rPr>
-              <a:t>Nhập từng lệnh một và đợi lệnh trước chạy xong, như README dặn.</a:t>
-            </a:r>
-          </a:p>
-        </p:txBody>
-      </p:sp>
-      <p:sp>
-        <p:nvSpPr>
-          <p:cNvPr id="9" name="card"/>
-          <p:cNvSpPr/>
-          <p:nvPr/>
-        </p:nvSpPr>
-        <p:spPr>
-          <a:xfrm>
-            <a:off x="685800" y="4119879"/>
-            <a:ext cx="10820400" cy="1448308"/>
-          </a:xfrm>
-          <a:prstGeom prst="roundRect">
-            <a:avLst>
-              <a:gd name="adj" fmla="val 14030"/>
-            </a:avLst>
-          </a:prstGeom>
-          <a:solidFill>
-            <a:srgbClr val="F3DFC1"/>
-          </a:solidFill>
-          <a:ln>
-            <a:noFill/>
-          </a:ln>
-        </p:spPr>
-        <p:txBody>
-          <a:bodyPr rtlCol="0" anchor="ctr"/>
-          <a:lstStyle/>
-          <a:p>
-            <a:pPr algn="ctr"/>
-          </a:p>
-        </p:txBody>
-      </p:sp>
-      <p:sp>
-        <p:nvSpPr>
-          <p:cNvPr id="10" name="bar"/>
-          <p:cNvSpPr/>
-          <p:nvPr/>
-        </p:nvSpPr>
-        <p:spPr>
-          <a:xfrm>
-            <a:off x="889000" y="4259580"/>
-            <a:ext cx="76200" cy="1168908"/>
-          </a:xfrm>
-          <a:prstGeom prst="roundRect">
-            <a:avLst>
-              <a:gd name="adj" fmla="val 50000"/>
-            </a:avLst>
-          </a:prstGeom>
-          <a:solidFill>
-            <a:srgbClr val="E8472B"/>
-          </a:solidFill>
-          <a:ln>
-            <a:noFill/>
-          </a:ln>
-        </p:spPr>
-        <p:txBody>
-          <a:bodyPr rtlCol="0" anchor="ctr"/>
-          <a:lstStyle/>
-          <a:p>
-            <a:pPr algn="ctr"/>
-          </a:p>
-        </p:txBody>
-      </p:sp>
-      <p:sp>
-        <p:nvSpPr>
-          <p:cNvPr id="11" name="card text"/>
-          <p:cNvSpPr txBox="1"/>
-          <p:nvPr/>
-        </p:nvSpPr>
-        <p:spPr>
-          <a:xfrm>
-            <a:off x="1143000" y="4259580"/>
-            <a:ext cx="10083800" cy="1168908"/>
-          </a:xfrm>
-          <a:prstGeom prst="rect">
-            <a:avLst/>
-          </a:prstGeom>
-          <a:noFill/>
-        </p:spPr>
-        <p:txBody>
-          <a:bodyPr wrap="square" lIns="0" rIns="0" tIns="0" bIns="0" anchor="ctr">
-            <a:noAutofit/>
-          </a:bodyPr>
-          <a:lstStyle/>
-          <a:p>
-            <a:pPr algn="l">
-              <a:lnSpc>
-                <a:spcPct val="100000"/>
-              </a:lnSpc>
-            </a:pPr>
-            <a:r>
-              <a:rPr sz="2400" b="1">
-                <a:solidFill>
-                  <a:srgbClr val="14161C"/>
-                </a:solidFill>
-                <a:latin typeface="Calibri"/>
-              </a:rPr>
-              <a:t>Chạy /team khi chưa bật đội native</a:t>
-            </a:r>
-          </a:p>
-          <a:p>
-            <a:pPr algn="l">
-              <a:lnSpc>
-                <a:spcPct val="100000"/>
-              </a:lnSpc>
-              <a:spcBef>
-                <a:spcPts val="500"/>
-              </a:spcBef>
-            </a:pPr>
-            <a:r>
-              <a:rPr sz="2200" b="0">
-                <a:solidFill>
-                  <a:srgbClr val="14161C"/>
-                </a:solidFill>
-                <a:latin typeface="Calibri"/>
-              </a:rPr>
-              <a:t>OMC cảnh báo và lùi về chạy không theo đội khi có thể. Đặt </a:t>
-            </a:r>
-            <a:r>
-              <a:rPr sz="2000" b="0">
-                <a:solidFill>
-                  <a:srgbClr val="B02D16"/>
-                </a:solidFill>
-                <a:latin typeface="Consolas"/>
-              </a:rPr>
-              <a:t>CLAUDE_CODE_EXPERIMENTAL_AGENT_TEAMS</a:t>
-            </a:r>
-            <a:r>
-              <a:rPr sz="2200" b="0">
-                <a:solidFill>
-                  <a:srgbClr val="14161C"/>
-                </a:solidFill>
-                <a:latin typeface="Calibri"/>
-              </a:rPr>
-              <a:t> ở bước 4.</a:t>
-            </a:r>
-          </a:p>
-        </p:txBody>
-      </p:sp>
-      <p:sp>
-        <p:nvSpPr>
-          <p:cNvPr id="12" name="page"/>
-          <p:cNvSpPr txBox="1"/>
-          <p:nvPr/>
-        </p:nvSpPr>
-        <p:spPr>
-          <a:xfrm>
-            <a:off x="9474200" y="304800"/>
-            <a:ext cx="2032000" cy="279400"/>
-          </a:xfrm>
-          <a:prstGeom prst="rect">
-            <a:avLst/>
-          </a:prstGeom>
-          <a:noFill/>
-        </p:spPr>
-        <p:txBody>
-          <a:bodyPr wrap="square" lIns="0" rIns="0" tIns="0" bIns="0" anchor="t">
-            <a:noAutofit/>
-          </a:bodyPr>
-          <a:lstStyle/>
-          <a:p>
-            <a:pPr algn="r">
-              <a:lnSpc>
-                <a:spcPct val="100000"/>
-              </a:lnSpc>
-            </a:pPr>
-            <a:r>
-              <a:rPr sz="1600" b="1">
-                <a:solidFill>
-                  <a:srgbClr val="14161C"/>
-                </a:solidFill>
-                <a:latin typeface="Calibri"/>
-              </a:rPr>
-              <a:t>21/33</a:t>
-            </a:r>
-          </a:p>
-        </p:txBody>
-      </p:sp>
-      <p:sp>
-        <p:nvSpPr>
-          <p:cNvPr id="13" name="rail"/>
-          <p:cNvSpPr/>
-          <p:nvPr/>
-        </p:nvSpPr>
-        <p:spPr>
-          <a:xfrm>
-            <a:off x="685800" y="6451600"/>
-            <a:ext cx="10820400" cy="38100"/>
-          </a:xfrm>
-          <a:prstGeom prst="rect">
-            <a:avLst/>
-          </a:prstGeom>
-          <a:solidFill>
-            <a:srgbClr val="6B6A66"/>
-          </a:solidFill>
-          <a:ln>
-            <a:noFill/>
-          </a:ln>
-        </p:spPr>
-        <p:txBody>
-          <a:bodyPr rtlCol="0" anchor="ctr"/>
-          <a:lstStyle/>
-          <a:p>
-            <a:pPr algn="ctr"/>
-          </a:p>
-        </p:txBody>
-      </p:sp>
-      <p:sp>
-        <p:nvSpPr>
-          <p:cNvPr id="14" name="progress"/>
-          <p:cNvSpPr/>
-          <p:nvPr/>
-        </p:nvSpPr>
-        <p:spPr>
-          <a:xfrm>
-            <a:off x="685800" y="6426200"/>
-            <a:ext cx="6885709" cy="88900"/>
-          </a:xfrm>
-          <a:prstGeom prst="rect">
-            <a:avLst/>
-          </a:prstGeom>
-          <a:solidFill>
-            <a:srgbClr val="E8472B"/>
-          </a:solidFill>
-          <a:ln>
-            <a:noFill/>
-          </a:ln>
-        </p:spPr>
-        <p:txBody>
-          <a:bodyPr rtlCol="0" anchor="ctr"/>
-          <a:lstStyle/>
-          <a:p>
-            <a:pPr algn="ctr"/>
-          </a:p>
-        </p:txBody>
-      </p:sp>
-      <p:sp>
-        <p:nvSpPr>
-          <p:cNvPr id="15" name="footer"/>
+          <p:cNvPr id="8" name="footer"/>
           <p:cNvSpPr txBox="1"/>
           <p:nvPr/>
         </p:nvSpPr>
@@ -10674,7 +10318,7 @@
                 </a:solidFill>
                 <a:latin typeface="Cambria"/>
               </a:rPr>
-              <a:t>Lỗi thường gặp (2/2)</a:t>
+              <a:t>Lỗi thường gặp (1/2)</a:t>
             </a:r>
           </a:p>
         </p:txBody>
@@ -10775,7 +10419,7 @@
                 </a:solidFill>
                 <a:latin typeface="Calibri"/>
               </a:rPr>
-              <a:t>Gặp lỗi sau khi cập nhật plugin</a:t>
+              <a:t>npm cảnh báo deprecated prebuild-install@7.1.3 khi cài CLI</a:t>
             </a:r>
           </a:p>
           <a:p>
@@ -10794,7 +10438,7 @@
                 </a:solidFill>
                 <a:latin typeface="Calibri"/>
               </a:rPr>
-              <a:t>Cập nhật bằng </a:t>
+              <a:t>README nói cảnh báo đến từ phụ thuộc </a:t>
             </a:r>
             <a:r>
               <a:rPr sz="2000" b="0">
@@ -10803,7 +10447,7 @@
                 </a:solidFill>
                 <a:latin typeface="Consolas"/>
               </a:rPr>
-              <a:t>/plugin marketplace update omc</a:t>
+              <a:t>better-sqlite3</a:t>
             </a:r>
             <a:r>
               <a:rPr sz="2200" b="0">
@@ -10812,17 +10456,119 @@
                 </a:solidFill>
                 <a:latin typeface="Calibri"/>
               </a:rPr>
-              <a:t> rồi </a:t>
-            </a:r>
-            <a:r>
-              <a:rPr sz="2000" b="0">
-                <a:solidFill>
-                  <a:srgbClr val="B02D16"/>
-                </a:solidFill>
-                <a:latin typeface="Consolas"/>
-              </a:rPr>
-              <a:t>/omc-setup</a:t>
-            </a:r>
+              <a:t> và không có nghĩa là cài thất bại.</a:t>
+            </a:r>
+          </a:p>
+        </p:txBody>
+      </p:sp>
+      <p:sp>
+        <p:nvSpPr>
+          <p:cNvPr id="6" name="card"/>
+          <p:cNvSpPr/>
+          <p:nvPr/>
+        </p:nvSpPr>
+        <p:spPr>
+          <a:xfrm>
+            <a:off x="685800" y="2902204"/>
+            <a:ext cx="10820400" cy="1090676"/>
+          </a:xfrm>
+          <a:prstGeom prst="roundRect">
+            <a:avLst>
+              <a:gd name="adj" fmla="val 18630"/>
+            </a:avLst>
+          </a:prstGeom>
+          <a:solidFill>
+            <a:srgbClr val="F3DFC1"/>
+          </a:solidFill>
+          <a:ln>
+            <a:noFill/>
+          </a:ln>
+        </p:spPr>
+        <p:txBody>
+          <a:bodyPr rtlCol="0" anchor="ctr"/>
+          <a:lstStyle/>
+          <a:p>
+            <a:pPr algn="ctr"/>
+          </a:p>
+        </p:txBody>
+      </p:sp>
+      <p:sp>
+        <p:nvSpPr>
+          <p:cNvPr id="7" name="bar"/>
+          <p:cNvSpPr/>
+          <p:nvPr/>
+        </p:nvSpPr>
+        <p:spPr>
+          <a:xfrm>
+            <a:off x="889000" y="3041904"/>
+            <a:ext cx="76200" cy="811276"/>
+          </a:xfrm>
+          <a:prstGeom prst="roundRect">
+            <a:avLst>
+              <a:gd name="adj" fmla="val 50000"/>
+            </a:avLst>
+          </a:prstGeom>
+          <a:solidFill>
+            <a:srgbClr val="E8472B"/>
+          </a:solidFill>
+          <a:ln>
+            <a:noFill/>
+          </a:ln>
+        </p:spPr>
+        <p:txBody>
+          <a:bodyPr rtlCol="0" anchor="ctr"/>
+          <a:lstStyle/>
+          <a:p>
+            <a:pPr algn="ctr"/>
+          </a:p>
+        </p:txBody>
+      </p:sp>
+      <p:sp>
+        <p:nvSpPr>
+          <p:cNvPr id="8" name="card text"/>
+          <p:cNvSpPr txBox="1"/>
+          <p:nvPr/>
+        </p:nvSpPr>
+        <p:spPr>
+          <a:xfrm>
+            <a:off x="1143000" y="3041904"/>
+            <a:ext cx="10083800" cy="811276"/>
+          </a:xfrm>
+          <a:prstGeom prst="rect">
+            <a:avLst/>
+          </a:prstGeom>
+          <a:noFill/>
+        </p:spPr>
+        <p:txBody>
+          <a:bodyPr wrap="square" lIns="0" rIns="0" tIns="0" bIns="0" anchor="ctr">
+            <a:noAutofit/>
+          </a:bodyPr>
+          <a:lstStyle/>
+          <a:p>
+            <a:pPr algn="l">
+              <a:lnSpc>
+                <a:spcPct val="100000"/>
+              </a:lnSpc>
+            </a:pPr>
+            <a:r>
+              <a:rPr sz="2400" b="1">
+                <a:solidFill>
+                  <a:srgbClr val="14161C"/>
+                </a:solidFill>
+                <a:latin typeface="Calibri"/>
+              </a:rPr>
+              <a:t>Dán hai lệnh /plugin cùng lúc thì lỗi</a:t>
+            </a:r>
+          </a:p>
+          <a:p>
+            <a:pPr algn="l">
+              <a:lnSpc>
+                <a:spcPct val="100000"/>
+              </a:lnSpc>
+              <a:spcBef>
+                <a:spcPts val="500"/>
+              </a:spcBef>
+            </a:pPr>
             <a:r>
               <a:rPr sz="2200" b="0">
                 <a:solidFill>
@@ -10830,38 +10576,20 @@
                 </a:solidFill>
                 <a:latin typeface="Calibri"/>
               </a:rPr>
-              <a:t>; nếu vẫn lỗi, README bảo xóa cache plugin cũ bằng </a:t>
-            </a:r>
-            <a:r>
-              <a:rPr sz="2000" b="0">
-                <a:solidFill>
-                  <a:srgbClr val="B02D16"/>
-                </a:solidFill>
-                <a:latin typeface="Consolas"/>
-              </a:rPr>
-              <a:t>/omc-doctor</a:t>
-            </a:r>
-            <a:r>
-              <a:rPr sz="2200" b="0">
-                <a:solidFill>
-                  <a:srgbClr val="14161C"/>
-                </a:solidFill>
-                <a:latin typeface="Calibri"/>
-              </a:rPr>
-              <a:t>.</a:t>
-            </a:r>
-          </a:p>
-        </p:txBody>
-      </p:sp>
-      <p:sp>
-        <p:nvSpPr>
-          <p:cNvPr id="6" name="card"/>
-          <p:cNvSpPr/>
-          <p:nvPr/>
-        </p:nvSpPr>
-        <p:spPr>
-          <a:xfrm>
-            <a:off x="685800" y="2902204"/>
+              <a:t>Nhập từng lệnh một và đợi lệnh trước chạy xong, như README dặn.</a:t>
+            </a:r>
+          </a:p>
+        </p:txBody>
+      </p:sp>
+      <p:sp>
+        <p:nvSpPr>
+          <p:cNvPr id="9" name="card"/>
+          <p:cNvSpPr/>
+          <p:nvPr/>
+        </p:nvSpPr>
+        <p:spPr>
+          <a:xfrm>
+            <a:off x="685800" y="4119879"/>
             <a:ext cx="10820400" cy="1448308"/>
           </a:xfrm>
           <a:prstGeom prst="roundRect">
@@ -10886,13 +10614,13 @@
       </p:sp>
       <p:sp>
         <p:nvSpPr>
-          <p:cNvPr id="7" name="bar"/>
-          <p:cNvSpPr/>
-          <p:nvPr/>
-        </p:nvSpPr>
-        <p:spPr>
-          <a:xfrm>
-            <a:off x="889000" y="3041904"/>
+          <p:cNvPr id="10" name="bar"/>
+          <p:cNvSpPr/>
+          <p:nvPr/>
+        </p:nvSpPr>
+        <p:spPr>
+          <a:xfrm>
+            <a:off x="889000" y="4259580"/>
             <a:ext cx="76200" cy="1168908"/>
           </a:xfrm>
           <a:prstGeom prst="roundRect">
@@ -10917,13 +10645,13 @@
       </p:sp>
       <p:sp>
         <p:nvSpPr>
-          <p:cNvPr id="8" name="card text"/>
-          <p:cNvSpPr txBox="1"/>
-          <p:nvPr/>
-        </p:nvSpPr>
-        <p:spPr>
-          <a:xfrm>
-            <a:off x="1143000" y="3041904"/>
+          <p:cNvPr id="11" name="card text"/>
+          <p:cNvSpPr txBox="1"/>
+          <p:nvPr/>
+        </p:nvSpPr>
+        <p:spPr>
+          <a:xfrm>
+            <a:off x="1143000" y="4259580"/>
             <a:ext cx="10083800" cy="1168908"/>
           </a:xfrm>
           <a:prstGeom prst="rect">
@@ -10949,7 +10677,7 @@
                 </a:solidFill>
                 <a:latin typeface="Calibri"/>
               </a:rPr>
-              <a:t>Chạy /team hay /autopilot trong CI không có người ngồi</a:t>
+              <a:t>Chạy /team khi chưa bật đội native</a:t>
             </a:r>
           </a:p>
           <a:p>
@@ -10968,7 +10696,7 @@
                 </a:solidFill>
                 <a:latin typeface="Calibri"/>
               </a:rPr>
-              <a:t>README: các lệnh slash cần phiên Claude Code đang chạy; trong CI dùng lệnh terminal xác định như </a:t>
+              <a:t>OMC cảnh báo và lùi về chạy không theo đội khi có thể. Đặt </a:t>
             </a:r>
             <a:r>
               <a:rPr sz="2000" b="0">
@@ -10977,7 +10705,7 @@
                 </a:solidFill>
                 <a:latin typeface="Consolas"/>
               </a:rPr>
-              <a:t>omc setup</a:t>
+              <a:t>CLAUDE_CODE_EXPERIMENTAL_AGENT_TEAMS</a:t>
             </a:r>
             <a:r>
               <a:rPr sz="2200" b="0">
@@ -10986,14 +10714,14 @@
                 </a:solidFill>
                 <a:latin typeface="Calibri"/>
               </a:rPr>
-              <a:t>.</a:t>
-            </a:r>
-          </a:p>
-        </p:txBody>
-      </p:sp>
-      <p:sp>
-        <p:nvSpPr>
-          <p:cNvPr id="9" name="page"/>
+              <a:t> ở bước 4.</a:t>
+            </a:r>
+          </a:p>
+        </p:txBody>
+      </p:sp>
+      <p:sp>
+        <p:nvSpPr>
+          <p:cNvPr id="12" name="page"/>
           <p:cNvSpPr txBox="1"/>
           <p:nvPr/>
         </p:nvSpPr>
@@ -11025,14 +10753,14 @@
                 </a:solidFill>
                 <a:latin typeface="Calibri"/>
               </a:rPr>
-              <a:t>22/33</a:t>
-            </a:r>
-          </a:p>
-        </p:txBody>
-      </p:sp>
-      <p:sp>
-        <p:nvSpPr>
-          <p:cNvPr id="10" name="rail"/>
+              <a:t>22/34</a:t>
+            </a:r>
+          </a:p>
+        </p:txBody>
+      </p:sp>
+      <p:sp>
+        <p:nvSpPr>
+          <p:cNvPr id="13" name="rail"/>
           <p:cNvSpPr/>
           <p:nvPr/>
         </p:nvSpPr>
@@ -11061,14 +10789,14 @@
       </p:sp>
       <p:sp>
         <p:nvSpPr>
-          <p:cNvPr id="11" name="progress"/>
+          <p:cNvPr id="14" name="progress"/>
           <p:cNvSpPr/>
           <p:nvPr/>
         </p:nvSpPr>
         <p:spPr>
           <a:xfrm>
             <a:off x="685800" y="6426200"/>
-            <a:ext cx="7213600" cy="88900"/>
+            <a:ext cx="7001435" cy="88900"/>
           </a:xfrm>
           <a:prstGeom prst="rect">
             <a:avLst/>
@@ -11090,7 +10818,7 @@
       </p:sp>
       <p:sp>
         <p:nvSpPr>
-          <p:cNvPr id="12" name="footer"/>
+          <p:cNvPr id="15" name="footer"/>
           <p:cNvSpPr txBox="1"/>
           <p:nvPr/>
         </p:nvSpPr>
@@ -11187,7 +10915,7 @@
                 </a:solidFill>
                 <a:latin typeface="Cambria"/>
               </a:rPr>
-              <a:t>Làm tiếp</a:t>
+              <a:t>Lỗi thường gặp (2/2)</a:t>
             </a:r>
           </a:p>
         </p:txBody>
@@ -11201,15 +10929,15 @@
         <p:spPr>
           <a:xfrm>
             <a:off x="685800" y="1326895"/>
-            <a:ext cx="10820400" cy="994663"/>
+            <a:ext cx="10820400" cy="1448308"/>
           </a:xfrm>
           <a:prstGeom prst="roundRect">
             <a:avLst>
-              <a:gd name="adj" fmla="val 20429"/>
+              <a:gd name="adj" fmla="val 14030"/>
             </a:avLst>
           </a:prstGeom>
           <a:solidFill>
-            <a:srgbClr val="E8E0CF"/>
+            <a:srgbClr val="F3DFC1"/>
           </a:solidFill>
           <a:ln>
             <a:noFill/>
@@ -11225,39 +10953,32 @@
       </p:sp>
       <p:sp>
         <p:nvSpPr>
-          <p:cNvPr id="4" name="marker 1"/>
-          <p:cNvSpPr/>
-          <p:nvPr/>
-        </p:nvSpPr>
-        <p:spPr>
-          <a:xfrm>
-            <a:off x="965200" y="1570227"/>
-            <a:ext cx="508000" cy="508000"/>
-          </a:xfrm>
-          <a:prstGeom prst="ellipse">
-            <a:avLst/>
-          </a:prstGeom>
-          <a:solidFill>
-            <a:srgbClr val="1F3FD1"/>
+          <p:cNvPr id="4" name="bar"/>
+          <p:cNvSpPr/>
+          <p:nvPr/>
+        </p:nvSpPr>
+        <p:spPr>
+          <a:xfrm>
+            <a:off x="889000" y="1466595"/>
+            <a:ext cx="76200" cy="1168908"/>
+          </a:xfrm>
+          <a:prstGeom prst="roundRect">
+            <a:avLst>
+              <a:gd name="adj" fmla="val 50000"/>
+            </a:avLst>
+          </a:prstGeom>
+          <a:solidFill>
+            <a:srgbClr val="E8472B"/>
           </a:solidFill>
           <a:ln>
             <a:noFill/>
           </a:ln>
         </p:spPr>
         <p:txBody>
-          <a:bodyPr rtlCol="0" anchor="ctr" lIns="0" rIns="0" tIns="0" bIns="0"/>
-          <a:lstStyle/>
-          <a:p>
-            <a:pPr algn="ctr"/>
-            <a:r>
-              <a:rPr sz="2000" b="1">
-                <a:solidFill>
-                  <a:srgbClr val="FFFFFF"/>
-                </a:solidFill>
-                <a:latin typeface="Calibri"/>
-              </a:rPr>
-              <a:t>1</a:t>
-            </a:r>
+          <a:bodyPr rtlCol="0" anchor="ctr"/>
+          <a:lstStyle/>
+          <a:p>
+            <a:pPr algn="ctr"/>
           </a:p>
         </p:txBody>
       </p:sp>
@@ -11269,8 +10990,8 @@
         </p:nvSpPr>
         <p:spPr>
           <a:xfrm>
-            <a:off x="1701800" y="1466595"/>
-            <a:ext cx="9525000" cy="715263"/>
+            <a:off x="1143000" y="1466595"/>
+            <a:ext cx="10083800" cy="1168908"/>
           </a:xfrm>
           <a:prstGeom prst="rect">
             <a:avLst/>
@@ -11289,13 +11010,32 @@
               </a:lnSpc>
             </a:pPr>
             <a:r>
+              <a:rPr sz="2400" b="1">
+                <a:solidFill>
+                  <a:srgbClr val="14161C"/>
+                </a:solidFill>
+                <a:latin typeface="Calibri"/>
+              </a:rPr>
+              <a:t>Gặp lỗi sau khi cập nhật plugin</a:t>
+            </a:r>
+          </a:p>
+          <a:p>
+            <a:pPr algn="l">
+              <a:lnSpc>
+                <a:spcPct val="100000"/>
+              </a:lnSpc>
+              <a:spcBef>
+                <a:spcPts val="500"/>
+              </a:spcBef>
+            </a:pPr>
+            <a:r>
               <a:rPr sz="2200" b="0">
                 <a:solidFill>
                   <a:srgbClr val="14161C"/>
                 </a:solidFill>
                 <a:latin typeface="Calibri"/>
               </a:rPr>
-              <a:t>Làm rõ yêu cầu mơ hồ trước khi chia việc: </a:t>
+              <a:t>Cập nhật bằng </a:t>
             </a:r>
             <a:r>
               <a:rPr sz="2000" b="0">
@@ -11304,7 +11044,7 @@
                 </a:solidFill>
                 <a:latin typeface="Consolas"/>
               </a:rPr>
-              <a:t>/deep-interview "I want to build a task management app"</a:t>
+              <a:t>/plugin marketplace update omc</a:t>
             </a:r>
             <a:r>
               <a:rPr sz="2200" b="0">
@@ -11313,6 +11053,42 @@
                 </a:solidFill>
                 <a:latin typeface="Calibri"/>
               </a:rPr>
+              <a:t> rồi </a:t>
+            </a:r>
+            <a:r>
+              <a:rPr sz="2000" b="0">
+                <a:solidFill>
+                  <a:srgbClr val="B02D16"/>
+                </a:solidFill>
+                <a:latin typeface="Consolas"/>
+              </a:rPr>
+              <a:t>/omc-setup</a:t>
+            </a:r>
+            <a:r>
+              <a:rPr sz="2200" b="0">
+                <a:solidFill>
+                  <a:srgbClr val="14161C"/>
+                </a:solidFill>
+                <a:latin typeface="Calibri"/>
+              </a:rPr>
+              <a:t>; nếu vẫn lỗi, README bảo xóa cache plugin cũ bằng </a:t>
+            </a:r>
+            <a:r>
+              <a:rPr sz="2000" b="0">
+                <a:solidFill>
+                  <a:srgbClr val="B02D16"/>
+                </a:solidFill>
+                <a:latin typeface="Consolas"/>
+              </a:rPr>
+              <a:t>/omc-doctor</a:t>
+            </a:r>
+            <a:r>
+              <a:rPr sz="2200" b="0">
+                <a:solidFill>
+                  <a:srgbClr val="14161C"/>
+                </a:solidFill>
+                <a:latin typeface="Calibri"/>
+              </a:rPr>
               <a:t>.</a:t>
             </a:r>
           </a:p>
@@ -11326,16 +11102,16 @@
         </p:nvSpPr>
         <p:spPr>
           <a:xfrm>
-            <a:off x="685800" y="2448560"/>
-            <a:ext cx="10820400" cy="994663"/>
+            <a:off x="685800" y="2902204"/>
+            <a:ext cx="10820400" cy="1448308"/>
           </a:xfrm>
           <a:prstGeom prst="roundRect">
             <a:avLst>
-              <a:gd name="adj" fmla="val 20429"/>
+              <a:gd name="adj" fmla="val 14030"/>
             </a:avLst>
           </a:prstGeom>
           <a:solidFill>
-            <a:srgbClr val="E8E0CF"/>
+            <a:srgbClr val="F3DFC1"/>
           </a:solidFill>
           <a:ln>
             <a:noFill/>
@@ -11351,39 +11127,32 @@
       </p:sp>
       <p:sp>
         <p:nvSpPr>
-          <p:cNvPr id="7" name="marker 2"/>
-          <p:cNvSpPr/>
-          <p:nvPr/>
-        </p:nvSpPr>
-        <p:spPr>
-          <a:xfrm>
-            <a:off x="965200" y="2691891"/>
-            <a:ext cx="508000" cy="508000"/>
-          </a:xfrm>
-          <a:prstGeom prst="ellipse">
-            <a:avLst/>
-          </a:prstGeom>
-          <a:solidFill>
-            <a:srgbClr val="0F766E"/>
+          <p:cNvPr id="7" name="bar"/>
+          <p:cNvSpPr/>
+          <p:nvPr/>
+        </p:nvSpPr>
+        <p:spPr>
+          <a:xfrm>
+            <a:off x="889000" y="3041904"/>
+            <a:ext cx="76200" cy="1168908"/>
+          </a:xfrm>
+          <a:prstGeom prst="roundRect">
+            <a:avLst>
+              <a:gd name="adj" fmla="val 50000"/>
+            </a:avLst>
+          </a:prstGeom>
+          <a:solidFill>
+            <a:srgbClr val="E8472B"/>
           </a:solidFill>
           <a:ln>
             <a:noFill/>
           </a:ln>
         </p:spPr>
         <p:txBody>
-          <a:bodyPr rtlCol="0" anchor="ctr" lIns="0" rIns="0" tIns="0" bIns="0"/>
-          <a:lstStyle/>
-          <a:p>
-            <a:pPr algn="ctr"/>
-            <a:r>
-              <a:rPr sz="2000" b="1">
-                <a:solidFill>
-                  <a:srgbClr val="FFFFFF"/>
-                </a:solidFill>
-                <a:latin typeface="Calibri"/>
-              </a:rPr>
-              <a:t>2</a:t>
-            </a:r>
+          <a:bodyPr rtlCol="0" anchor="ctr"/>
+          <a:lstStyle/>
+          <a:p>
+            <a:pPr algn="ctr"/>
           </a:p>
         </p:txBody>
       </p:sp>
@@ -11395,8 +11164,8 @@
         </p:nvSpPr>
         <p:spPr>
           <a:xfrm>
-            <a:off x="1701800" y="2588260"/>
-            <a:ext cx="9525000" cy="715263"/>
+            <a:off x="1143000" y="3041904"/>
+            <a:ext cx="10083800" cy="1168908"/>
           </a:xfrm>
           <a:prstGeom prst="rect">
             <a:avLst/>
@@ -11415,13 +11184,32 @@
               </a:lnSpc>
             </a:pPr>
             <a:r>
+              <a:rPr sz="2400" b="1">
+                <a:solidFill>
+                  <a:srgbClr val="14161C"/>
+                </a:solidFill>
+                <a:latin typeface="Calibri"/>
+              </a:rPr>
+              <a:t>Chạy /team hay /autopilot trong CI không có người ngồi</a:t>
+            </a:r>
+          </a:p>
+          <a:p>
+            <a:pPr algn="l">
+              <a:lnSpc>
+                <a:spcPct val="100000"/>
+              </a:lnSpc>
+              <a:spcBef>
+                <a:spcPts val="500"/>
+              </a:spcBef>
+            </a:pPr>
+            <a:r>
               <a:rPr sz="2200" b="0">
                 <a:solidFill>
                   <a:srgbClr val="14161C"/>
                 </a:solidFill>
                 <a:latin typeface="Calibri"/>
               </a:rPr>
-              <a:t>Hỏi một nhà cung cấp khác xem xét giúp: </a:t>
+              <a:t>README: các lệnh slash cần phiên Claude Code đang chạy; trong CI dùng lệnh terminal xác định như </a:t>
             </a:r>
             <a:r>
               <a:rPr sz="2000" b="0">
@@ -11430,7 +11218,7 @@
                 </a:solidFill>
                 <a:latin typeface="Consolas"/>
               </a:rPr>
-              <a:t>/ask codex "Review this PR — architecture"</a:t>
+              <a:t>omc setup</a:t>
             </a:r>
             <a:r>
               <a:rPr sz="2200" b="0">
@@ -11446,22 +11234,59 @@
       </p:sp>
       <p:sp>
         <p:nvSpPr>
-          <p:cNvPr id="9" name="card"/>
-          <p:cNvSpPr/>
-          <p:nvPr/>
-        </p:nvSpPr>
-        <p:spPr>
-          <a:xfrm>
-            <a:off x="685800" y="3570224"/>
-            <a:ext cx="10820400" cy="994663"/>
-          </a:xfrm>
-          <a:prstGeom prst="roundRect">
-            <a:avLst>
-              <a:gd name="adj" fmla="val 20429"/>
-            </a:avLst>
-          </a:prstGeom>
-          <a:solidFill>
-            <a:srgbClr val="E8E0CF"/>
+          <p:cNvPr id="9" name="page"/>
+          <p:cNvSpPr txBox="1"/>
+          <p:nvPr/>
+        </p:nvSpPr>
+        <p:spPr>
+          <a:xfrm>
+            <a:off x="9474200" y="304800"/>
+            <a:ext cx="2032000" cy="279400"/>
+          </a:xfrm>
+          <a:prstGeom prst="rect">
+            <a:avLst/>
+          </a:prstGeom>
+          <a:noFill/>
+        </p:spPr>
+        <p:txBody>
+          <a:bodyPr wrap="square" lIns="0" rIns="0" tIns="0" bIns="0" anchor="t">
+            <a:noAutofit/>
+          </a:bodyPr>
+          <a:lstStyle/>
+          <a:p>
+            <a:pPr algn="r">
+              <a:lnSpc>
+                <a:spcPct val="100000"/>
+              </a:lnSpc>
+            </a:pPr>
+            <a:r>
+              <a:rPr sz="1600" b="1">
+                <a:solidFill>
+                  <a:srgbClr val="14161C"/>
+                </a:solidFill>
+                <a:latin typeface="Calibri"/>
+              </a:rPr>
+              <a:t>23/34</a:t>
+            </a:r>
+          </a:p>
+        </p:txBody>
+      </p:sp>
+      <p:sp>
+        <p:nvSpPr>
+          <p:cNvPr id="10" name="rail"/>
+          <p:cNvSpPr/>
+          <p:nvPr/>
+        </p:nvSpPr>
+        <p:spPr>
+          <a:xfrm>
+            <a:off x="685800" y="6451600"/>
+            <a:ext cx="10820400" cy="38100"/>
+          </a:xfrm>
+          <a:prstGeom prst="rect">
+            <a:avLst/>
+          </a:prstGeom>
+          <a:solidFill>
+            <a:srgbClr val="6B6A66"/>
           </a:solidFill>
           <a:ln>
             <a:noFill/>
@@ -11477,178 +11302,26 @@
       </p:sp>
       <p:sp>
         <p:nvSpPr>
-          <p:cNvPr id="10" name="marker 3"/>
-          <p:cNvSpPr/>
-          <p:nvPr/>
-        </p:nvSpPr>
-        <p:spPr>
-          <a:xfrm>
-            <a:off x="965200" y="3813555"/>
-            <a:ext cx="508000" cy="508000"/>
-          </a:xfrm>
-          <a:prstGeom prst="ellipse">
-            <a:avLst/>
-          </a:prstGeom>
-          <a:solidFill>
-            <a:srgbClr val="1F3FD1"/>
+          <p:cNvPr id="11" name="progress"/>
+          <p:cNvSpPr/>
+          <p:nvPr/>
+        </p:nvSpPr>
+        <p:spPr>
+          <a:xfrm>
+            <a:off x="685800" y="6426200"/>
+            <a:ext cx="7319682" cy="88900"/>
+          </a:xfrm>
+          <a:prstGeom prst="rect">
+            <a:avLst/>
+          </a:prstGeom>
+          <a:solidFill>
+            <a:srgbClr val="E8472B"/>
           </a:solidFill>
           <a:ln>
             <a:noFill/>
           </a:ln>
         </p:spPr>
         <p:txBody>
-          <a:bodyPr rtlCol="0" anchor="ctr" lIns="0" rIns="0" tIns="0" bIns="0"/>
-          <a:lstStyle/>
-          <a:p>
-            <a:pPr algn="ctr"/>
-            <a:r>
-              <a:rPr sz="2000" b="1">
-                <a:solidFill>
-                  <a:srgbClr val="FFFFFF"/>
-                </a:solidFill>
-                <a:latin typeface="Calibri"/>
-              </a:rPr>
-              <a:t>3</a:t>
-            </a:r>
-          </a:p>
-        </p:txBody>
-      </p:sp>
-      <p:sp>
-        <p:nvSpPr>
-          <p:cNvPr id="11" name="card text"/>
-          <p:cNvSpPr txBox="1"/>
-          <p:nvPr/>
-        </p:nvSpPr>
-        <p:spPr>
-          <a:xfrm>
-            <a:off x="1701800" y="3709924"/>
-            <a:ext cx="9525000" cy="715263"/>
-          </a:xfrm>
-          <a:prstGeom prst="rect">
-            <a:avLst/>
-          </a:prstGeom>
-          <a:noFill/>
-        </p:spPr>
-        <p:txBody>
-          <a:bodyPr wrap="square" lIns="0" rIns="0" tIns="0" bIns="0" anchor="ctr">
-            <a:noAutofit/>
-          </a:bodyPr>
-          <a:lstStyle/>
-          <a:p>
-            <a:pPr algn="l">
-              <a:lnSpc>
-                <a:spcPct val="100000"/>
-              </a:lnSpc>
-            </a:pPr>
-            <a:r>
-              <a:rPr sz="2200" b="0">
-                <a:solidFill>
-                  <a:srgbClr val="14161C"/>
-                </a:solidFill>
-                <a:latin typeface="Calibri"/>
-              </a:rPr>
-              <a:t>Chạy OMC trong worktree? Đặt </a:t>
-            </a:r>
-            <a:r>
-              <a:rPr sz="2000" b="0">
-                <a:solidFill>
-                  <a:srgbClr val="B02D16"/>
-                </a:solidFill>
-                <a:latin typeface="Consolas"/>
-              </a:rPr>
-              <a:t>OMC_STATE_DIR</a:t>
-            </a:r>
-            <a:r>
-              <a:rPr sz="2200" b="0">
-                <a:solidFill>
-                  <a:srgbClr val="14161C"/>
-                </a:solidFill>
-                <a:latin typeface="Calibri"/>
-              </a:rPr>
-              <a:t> để trạng thái </a:t>
-            </a:r>
-            <a:r>
-              <a:rPr sz="2000" b="0">
-                <a:solidFill>
-                  <a:srgbClr val="B02D16"/>
-                </a:solidFill>
-                <a:latin typeface="Consolas"/>
-              </a:rPr>
-              <a:t>.omc/</a:t>
-            </a:r>
-            <a:r>
-              <a:rPr sz="2200" b="0">
-                <a:solidFill>
-                  <a:srgbClr val="14161C"/>
-                </a:solidFill>
-                <a:latin typeface="Calibri"/>
-              </a:rPr>
-              <a:t> không mất khi xóa worktree.</a:t>
-            </a:r>
-          </a:p>
-        </p:txBody>
-      </p:sp>
-      <p:sp>
-        <p:nvSpPr>
-          <p:cNvPr id="12" name="page"/>
-          <p:cNvSpPr txBox="1"/>
-          <p:nvPr/>
-        </p:nvSpPr>
-        <p:spPr>
-          <a:xfrm>
-            <a:off x="9474200" y="304800"/>
-            <a:ext cx="2032000" cy="279400"/>
-          </a:xfrm>
-          <a:prstGeom prst="rect">
-            <a:avLst/>
-          </a:prstGeom>
-          <a:noFill/>
-        </p:spPr>
-        <p:txBody>
-          <a:bodyPr wrap="square" lIns="0" rIns="0" tIns="0" bIns="0" anchor="t">
-            <a:noAutofit/>
-          </a:bodyPr>
-          <a:lstStyle/>
-          <a:p>
-            <a:pPr algn="r">
-              <a:lnSpc>
-                <a:spcPct val="100000"/>
-              </a:lnSpc>
-            </a:pPr>
-            <a:r>
-              <a:rPr sz="1600" b="1">
-                <a:solidFill>
-                  <a:srgbClr val="14161C"/>
-                </a:solidFill>
-                <a:latin typeface="Calibri"/>
-              </a:rPr>
-              <a:t>23/33</a:t>
-            </a:r>
-          </a:p>
-        </p:txBody>
-      </p:sp>
-      <p:sp>
-        <p:nvSpPr>
-          <p:cNvPr id="13" name="rail"/>
-          <p:cNvSpPr/>
-          <p:nvPr/>
-        </p:nvSpPr>
-        <p:spPr>
-          <a:xfrm>
-            <a:off x="685800" y="6451600"/>
-            <a:ext cx="10820400" cy="38100"/>
-          </a:xfrm>
-          <a:prstGeom prst="rect">
-            <a:avLst/>
-          </a:prstGeom>
-          <a:solidFill>
-            <a:srgbClr val="6B6A66"/>
-          </a:solidFill>
-          <a:ln>
-            <a:noFill/>
-          </a:ln>
-        </p:spPr>
-        <p:txBody>
           <a:bodyPr rtlCol="0" anchor="ctr"/>
           <a:lstStyle/>
           <a:p>
@@ -11658,36 +11331,7 @@
       </p:sp>
       <p:sp>
         <p:nvSpPr>
-          <p:cNvPr id="14" name="progress"/>
-          <p:cNvSpPr/>
-          <p:nvPr/>
-        </p:nvSpPr>
-        <p:spPr>
-          <a:xfrm>
-            <a:off x="685800" y="6426200"/>
-            <a:ext cx="7541490" cy="88900"/>
-          </a:xfrm>
-          <a:prstGeom prst="rect">
-            <a:avLst/>
-          </a:prstGeom>
-          <a:solidFill>
-            <a:srgbClr val="E8472B"/>
-          </a:solidFill>
-          <a:ln>
-            <a:noFill/>
-          </a:ln>
-        </p:spPr>
-        <p:txBody>
-          <a:bodyPr rtlCol="0" anchor="ctr"/>
-          <a:lstStyle/>
-          <a:p>
-            <a:pPr algn="ctr"/>
-          </a:p>
-        </p:txBody>
-      </p:sp>
-      <p:sp>
-        <p:nvSpPr>
-          <p:cNvPr id="15" name="footer"/>
+          <p:cNvPr id="12" name="footer"/>
           <p:cNvSpPr txBox="1"/>
           <p:nvPr/>
         </p:nvSpPr>
@@ -11784,222 +11428,32 @@
                 </a:solidFill>
                 <a:latin typeface="Cambria"/>
               </a:rPr>
-              <a:t>Bên trong nó hoạt động ra sao</a:t>
-            </a:r>
-          </a:p>
-        </p:txBody>
-      </p:sp>
-      <p:sp>
-        <p:nvSpPr>
-          <p:cNvPr id="3" name="flow arrow"/>
-          <p:cNvSpPr/>
-          <p:nvPr/>
-        </p:nvSpPr>
-        <p:spPr>
-          <a:xfrm>
-            <a:off x="3683000" y="3036316"/>
-            <a:ext cx="914400" cy="0"/>
-          </a:xfrm>
-          <a:custGeom>
-            <a:avLst/>
-            <a:gdLst/>
-            <a:ahLst/>
-            <a:cxnLst/>
-            <a:rect l="l" t="t" r="r" b="b"/>
-            <a:pathLst>
-              <a:path w="914400" h="0">
-                <a:moveTo>
-                  <a:pt x="0" y="0"/>
-                </a:moveTo>
-                <a:lnTo>
-                  <a:pt x="914400" y="0"/>
-                </a:lnTo>
-              </a:path>
-            </a:pathLst>
-          </a:custGeom>
-          <a:noFill/>
-          <a:ln w="31750">
-            <a:solidFill>
-              <a:srgbClr val="475569"/>
-            </a:solidFill>
-            <a:tailEnd type="triangle" w="med" len="med"/>
-          </a:ln>
-        </p:spPr>
-        <p:txBody>
-          <a:bodyPr rtlCol="0" anchor="ctr"/>
-          <a:lstStyle/>
-          <a:p>
-            <a:pPr algn="ctr"/>
-          </a:p>
-        </p:txBody>
-      </p:sp>
-      <p:sp>
-        <p:nvSpPr>
-          <p:cNvPr id="4" name="flow arrow"/>
-          <p:cNvSpPr/>
-          <p:nvPr/>
-        </p:nvSpPr>
-        <p:spPr>
-          <a:xfrm>
-            <a:off x="3683000" y="4615180"/>
-            <a:ext cx="914400" cy="0"/>
-          </a:xfrm>
-          <a:custGeom>
-            <a:avLst/>
-            <a:gdLst/>
-            <a:ahLst/>
-            <a:cxnLst/>
-            <a:rect l="l" t="t" r="r" b="b"/>
-            <a:pathLst>
-              <a:path w="914400" h="0">
-                <a:moveTo>
-                  <a:pt x="0" y="0"/>
-                </a:moveTo>
-                <a:lnTo>
-                  <a:pt x="914400" y="0"/>
-                </a:lnTo>
-              </a:path>
-            </a:pathLst>
-          </a:custGeom>
-          <a:noFill/>
-          <a:ln w="31750">
-            <a:solidFill>
-              <a:srgbClr val="475569"/>
-            </a:solidFill>
-            <a:tailEnd type="triangle" w="med" len="med"/>
-          </a:ln>
-        </p:spPr>
-        <p:txBody>
-          <a:bodyPr rtlCol="0" anchor="ctr"/>
-          <a:lstStyle/>
-          <a:p>
-            <a:pPr algn="ctr"/>
-          </a:p>
-        </p:txBody>
-      </p:sp>
-      <p:sp>
-        <p:nvSpPr>
-          <p:cNvPr id="5" name="flow arrow"/>
-          <p:cNvSpPr/>
-          <p:nvPr/>
-        </p:nvSpPr>
-        <p:spPr>
-          <a:xfrm>
-            <a:off x="7594600" y="3036316"/>
-            <a:ext cx="914400" cy="789432"/>
-          </a:xfrm>
-          <a:custGeom>
-            <a:avLst/>
-            <a:gdLst/>
-            <a:ahLst/>
-            <a:cxnLst/>
-            <a:rect l="l" t="t" r="r" b="b"/>
-            <a:pathLst>
-              <a:path w="914400" h="789432">
-                <a:moveTo>
-                  <a:pt x="0" y="0"/>
-                </a:moveTo>
-                <a:lnTo>
-                  <a:pt x="457200" y="0"/>
-                </a:lnTo>
-                <a:lnTo>
-                  <a:pt x="457200" y="789432"/>
-                </a:lnTo>
-                <a:lnTo>
-                  <a:pt x="914400" y="789432"/>
-                </a:lnTo>
-              </a:path>
-            </a:pathLst>
-          </a:custGeom>
-          <a:noFill/>
-          <a:ln w="31750">
-            <a:solidFill>
-              <a:srgbClr val="475569"/>
-            </a:solidFill>
-            <a:tailEnd type="triangle" w="med" len="med"/>
-          </a:ln>
-        </p:spPr>
-        <p:txBody>
-          <a:bodyPr rtlCol="0" anchor="ctr"/>
-          <a:lstStyle/>
-          <a:p>
-            <a:pPr algn="ctr"/>
-          </a:p>
-        </p:txBody>
-      </p:sp>
-      <p:sp>
-        <p:nvSpPr>
-          <p:cNvPr id="6" name="flow arrow"/>
-          <p:cNvSpPr/>
-          <p:nvPr/>
-        </p:nvSpPr>
-        <p:spPr>
-          <a:xfrm>
-            <a:off x="7594600" y="3825748"/>
-            <a:ext cx="914400" cy="789432"/>
-          </a:xfrm>
-          <a:custGeom>
-            <a:avLst/>
-            <a:gdLst/>
-            <a:ahLst/>
-            <a:cxnLst/>
-            <a:rect l="l" t="t" r="r" b="b"/>
-            <a:pathLst>
-              <a:path w="914400" h="789432">
-                <a:moveTo>
-                  <a:pt x="0" y="789432"/>
-                </a:moveTo>
-                <a:lnTo>
-                  <a:pt x="457200" y="789432"/>
-                </a:lnTo>
-                <a:lnTo>
-                  <a:pt x="457200" y="0"/>
-                </a:lnTo>
-                <a:lnTo>
-                  <a:pt x="914400" y="0"/>
-                </a:lnTo>
-              </a:path>
-            </a:pathLst>
-          </a:custGeom>
-          <a:noFill/>
-          <a:ln w="31750">
-            <a:solidFill>
-              <a:srgbClr val="475569"/>
-            </a:solidFill>
-            <a:tailEnd type="triangle" w="med" len="med"/>
-          </a:ln>
-        </p:spPr>
-        <p:txBody>
-          <a:bodyPr rtlCol="0" anchor="ctr"/>
-          <a:lstStyle/>
-          <a:p>
-            <a:pPr algn="ctr"/>
-          </a:p>
-        </p:txBody>
-      </p:sp>
-      <p:sp>
-        <p:nvSpPr>
-          <p:cNvPr id="7" name="component"/>
-          <p:cNvSpPr/>
-          <p:nvPr/>
-        </p:nvSpPr>
-        <p:spPr>
-          <a:xfrm>
-            <a:off x="685800" y="2424684"/>
-            <a:ext cx="2997200" cy="1223264"/>
+              <a:t>Làm tiếp</a:t>
+            </a:r>
+          </a:p>
+        </p:txBody>
+      </p:sp>
+      <p:sp>
+        <p:nvSpPr>
+          <p:cNvPr id="3" name="card"/>
+          <p:cNvSpPr/>
+          <p:nvPr/>
+        </p:nvSpPr>
+        <p:spPr>
+          <a:xfrm>
+            <a:off x="685800" y="1326895"/>
+            <a:ext cx="10820400" cy="994663"/>
           </a:xfrm>
           <a:prstGeom prst="roundRect">
             <a:avLst>
-              <a:gd name="adj" fmla="val 16611"/>
+              <a:gd name="adj" fmla="val 20429"/>
             </a:avLst>
           </a:prstGeom>
           <a:solidFill>
-            <a:srgbClr val="E0F2FE"/>
-          </a:solidFill>
-          <a:ln w="25400">
-            <a:solidFill>
-              <a:srgbClr val="0284C7"/>
-            </a:solidFill>
+            <a:srgbClr val="E8E0CF"/>
+          </a:solidFill>
+          <a:ln>
+            <a:noFill/>
           </a:ln>
         </p:spPr>
         <p:txBody>
@@ -12012,14 +11466,52 @@
       </p:sp>
       <p:sp>
         <p:nvSpPr>
-          <p:cNvPr id="8" name="component name"/>
-          <p:cNvSpPr txBox="1"/>
-          <p:nvPr/>
-        </p:nvSpPr>
-        <p:spPr>
-          <a:xfrm>
-            <a:off x="863600" y="2526284"/>
-            <a:ext cx="2641600" cy="1020063"/>
+          <p:cNvPr id="4" name="marker 1"/>
+          <p:cNvSpPr/>
+          <p:nvPr/>
+        </p:nvSpPr>
+        <p:spPr>
+          <a:xfrm>
+            <a:off x="965200" y="1570227"/>
+            <a:ext cx="508000" cy="508000"/>
+          </a:xfrm>
+          <a:prstGeom prst="ellipse">
+            <a:avLst/>
+          </a:prstGeom>
+          <a:solidFill>
+            <a:srgbClr val="1F3FD1"/>
+          </a:solidFill>
+          <a:ln>
+            <a:noFill/>
+          </a:ln>
+        </p:spPr>
+        <p:txBody>
+          <a:bodyPr rtlCol="0" anchor="ctr" lIns="0" rIns="0" tIns="0" bIns="0"/>
+          <a:lstStyle/>
+          <a:p>
+            <a:pPr algn="ctr"/>
+            <a:r>
+              <a:rPr sz="2000" b="1">
+                <a:solidFill>
+                  <a:srgbClr val="FFFFFF"/>
+                </a:solidFill>
+                <a:latin typeface="Calibri"/>
+              </a:rPr>
+              <a:t>1</a:t>
+            </a:r>
+          </a:p>
+        </p:txBody>
+      </p:sp>
+      <p:sp>
+        <p:nvSpPr>
+          <p:cNvPr id="5" name="card text"/>
+          <p:cNvSpPr txBox="1"/>
+          <p:nvPr/>
+        </p:nvSpPr>
+        <p:spPr>
+          <a:xfrm>
+            <a:off x="1701800" y="1466595"/>
+            <a:ext cx="9525000" cy="715263"/>
           </a:xfrm>
           <a:prstGeom prst="rect">
             <a:avLst/>
@@ -12032,46 +11524,62 @@
           </a:bodyPr>
           <a:lstStyle/>
           <a:p>
-            <a:pPr algn="ctr">
-              <a:lnSpc>
-                <a:spcPct val="100000"/>
-              </a:lnSpc>
-            </a:pPr>
-            <a:r>
-              <a:rPr sz="2200" b="1">
-                <a:solidFill>
-                  <a:srgbClr val="0F172A"/>
-                </a:solidFill>
-                <a:latin typeface="Calibri"/>
-              </a:rPr>
-              <a:t>Plugin trong Claude Code</a:t>
-            </a:r>
-          </a:p>
-        </p:txBody>
-      </p:sp>
-      <p:sp>
-        <p:nvSpPr>
-          <p:cNvPr id="9" name="component"/>
-          <p:cNvSpPr/>
-          <p:nvPr/>
-        </p:nvSpPr>
-        <p:spPr>
-          <a:xfrm>
-            <a:off x="685800" y="4003548"/>
-            <a:ext cx="2997200" cy="1223264"/>
+            <a:pPr algn="l">
+              <a:lnSpc>
+                <a:spcPct val="100000"/>
+              </a:lnSpc>
+            </a:pPr>
+            <a:r>
+              <a:rPr sz="2200" b="0">
+                <a:solidFill>
+                  <a:srgbClr val="14161C"/>
+                </a:solidFill>
+                <a:latin typeface="Calibri"/>
+              </a:rPr>
+              <a:t>Làm rõ yêu cầu mơ hồ trước khi chia việc: </a:t>
+            </a:r>
+            <a:r>
+              <a:rPr sz="2000" b="0">
+                <a:solidFill>
+                  <a:srgbClr val="B02D16"/>
+                </a:solidFill>
+                <a:latin typeface="Consolas"/>
+              </a:rPr>
+              <a:t>/deep-interview "I want to build a task management app"</a:t>
+            </a:r>
+            <a:r>
+              <a:rPr sz="2200" b="0">
+                <a:solidFill>
+                  <a:srgbClr val="14161C"/>
+                </a:solidFill>
+                <a:latin typeface="Calibri"/>
+              </a:rPr>
+              <a:t>.</a:t>
+            </a:r>
+          </a:p>
+        </p:txBody>
+      </p:sp>
+      <p:sp>
+        <p:nvSpPr>
+          <p:cNvPr id="6" name="card"/>
+          <p:cNvSpPr/>
+          <p:nvPr/>
+        </p:nvSpPr>
+        <p:spPr>
+          <a:xfrm>
+            <a:off x="685800" y="2448560"/>
+            <a:ext cx="10820400" cy="994663"/>
           </a:xfrm>
           <a:prstGeom prst="roundRect">
             <a:avLst>
-              <a:gd name="adj" fmla="val 16611"/>
+              <a:gd name="adj" fmla="val 20429"/>
             </a:avLst>
           </a:prstGeom>
           <a:solidFill>
-            <a:srgbClr val="E0F2FE"/>
-          </a:solidFill>
-          <a:ln w="25400">
-            <a:solidFill>
-              <a:srgbClr val="0284C7"/>
-            </a:solidFill>
+            <a:srgbClr val="E8E0CF"/>
+          </a:solidFill>
+          <a:ln>
+            <a:noFill/>
           </a:ln>
         </p:spPr>
         <p:txBody>
@@ -12084,14 +11592,52 @@
       </p:sp>
       <p:sp>
         <p:nvSpPr>
-          <p:cNvPr id="10" name="component name"/>
-          <p:cNvSpPr txBox="1"/>
-          <p:nvPr/>
-        </p:nvSpPr>
-        <p:spPr>
-          <a:xfrm>
-            <a:off x="863600" y="4105148"/>
-            <a:ext cx="2641600" cy="1020063"/>
+          <p:cNvPr id="7" name="marker 2"/>
+          <p:cNvSpPr/>
+          <p:nvPr/>
+        </p:nvSpPr>
+        <p:spPr>
+          <a:xfrm>
+            <a:off x="965200" y="2691891"/>
+            <a:ext cx="508000" cy="508000"/>
+          </a:xfrm>
+          <a:prstGeom prst="ellipse">
+            <a:avLst/>
+          </a:prstGeom>
+          <a:solidFill>
+            <a:srgbClr val="0F766E"/>
+          </a:solidFill>
+          <a:ln>
+            <a:noFill/>
+          </a:ln>
+        </p:spPr>
+        <p:txBody>
+          <a:bodyPr rtlCol="0" anchor="ctr" lIns="0" rIns="0" tIns="0" bIns="0"/>
+          <a:lstStyle/>
+          <a:p>
+            <a:pPr algn="ctr"/>
+            <a:r>
+              <a:rPr sz="2000" b="1">
+                <a:solidFill>
+                  <a:srgbClr val="FFFFFF"/>
+                </a:solidFill>
+                <a:latin typeface="Calibri"/>
+              </a:rPr>
+              <a:t>2</a:t>
+            </a:r>
+          </a:p>
+        </p:txBody>
+      </p:sp>
+      <p:sp>
+        <p:nvSpPr>
+          <p:cNvPr id="8" name="card text"/>
+          <p:cNvSpPr txBox="1"/>
+          <p:nvPr/>
+        </p:nvSpPr>
+        <p:spPr>
+          <a:xfrm>
+            <a:off x="1701800" y="2588260"/>
+            <a:ext cx="9525000" cy="715263"/>
           </a:xfrm>
           <a:prstGeom prst="rect">
             <a:avLst/>
@@ -12104,46 +11650,62 @@
           </a:bodyPr>
           <a:lstStyle/>
           <a:p>
-            <a:pPr algn="ctr">
-              <a:lnSpc>
-                <a:spcPct val="100000"/>
-              </a:lnSpc>
-            </a:pPr>
-            <a:r>
-              <a:rPr sz="2200" b="1">
-                <a:solidFill>
-                  <a:srgbClr val="0F172A"/>
-                </a:solidFill>
-                <a:latin typeface="Calibri"/>
-              </a:rPr>
-              <a:t>Lệnh omc (gói npm)</a:t>
-            </a:r>
-          </a:p>
-        </p:txBody>
-      </p:sp>
-      <p:sp>
-        <p:nvSpPr>
-          <p:cNvPr id="11" name="component"/>
-          <p:cNvSpPr/>
-          <p:nvPr/>
-        </p:nvSpPr>
-        <p:spPr>
-          <a:xfrm>
-            <a:off x="4597400" y="2424684"/>
-            <a:ext cx="2997200" cy="1223264"/>
+            <a:pPr algn="l">
+              <a:lnSpc>
+                <a:spcPct val="100000"/>
+              </a:lnSpc>
+            </a:pPr>
+            <a:r>
+              <a:rPr sz="2200" b="0">
+                <a:solidFill>
+                  <a:srgbClr val="14161C"/>
+                </a:solidFill>
+                <a:latin typeface="Calibri"/>
+              </a:rPr>
+              <a:t>Hỏi một nhà cung cấp khác xem xét giúp: </a:t>
+            </a:r>
+            <a:r>
+              <a:rPr sz="2000" b="0">
+                <a:solidFill>
+                  <a:srgbClr val="B02D16"/>
+                </a:solidFill>
+                <a:latin typeface="Consolas"/>
+              </a:rPr>
+              <a:t>/ask codex "Review this PR — architecture"</a:t>
+            </a:r>
+            <a:r>
+              <a:rPr sz="2200" b="0">
+                <a:solidFill>
+                  <a:srgbClr val="14161C"/>
+                </a:solidFill>
+                <a:latin typeface="Calibri"/>
+              </a:rPr>
+              <a:t>.</a:t>
+            </a:r>
+          </a:p>
+        </p:txBody>
+      </p:sp>
+      <p:sp>
+        <p:nvSpPr>
+          <p:cNvPr id="9" name="card"/>
+          <p:cNvSpPr/>
+          <p:nvPr/>
+        </p:nvSpPr>
+        <p:spPr>
+          <a:xfrm>
+            <a:off x="685800" y="3570224"/>
+            <a:ext cx="10820400" cy="994663"/>
           </a:xfrm>
           <a:prstGeom prst="roundRect">
             <a:avLst>
-              <a:gd name="adj" fmla="val 16611"/>
+              <a:gd name="adj" fmla="val 20429"/>
             </a:avLst>
           </a:prstGeom>
           <a:solidFill>
-            <a:srgbClr val="CCFBF1"/>
-          </a:solidFill>
-          <a:ln w="25400">
-            <a:solidFill>
-              <a:srgbClr val="0F766E"/>
-            </a:solidFill>
+            <a:srgbClr val="E8E0CF"/>
+          </a:solidFill>
+          <a:ln>
+            <a:noFill/>
           </a:ln>
         </p:spPr>
         <p:txBody>
@@ -12156,14 +11718,52 @@
       </p:sp>
       <p:sp>
         <p:nvSpPr>
-          <p:cNvPr id="12" name="component name"/>
-          <p:cNvSpPr txBox="1"/>
-          <p:nvPr/>
-        </p:nvSpPr>
-        <p:spPr>
-          <a:xfrm>
-            <a:off x="4775200" y="2526284"/>
-            <a:ext cx="2641600" cy="1020063"/>
+          <p:cNvPr id="10" name="marker 3"/>
+          <p:cNvSpPr/>
+          <p:nvPr/>
+        </p:nvSpPr>
+        <p:spPr>
+          <a:xfrm>
+            <a:off x="965200" y="3813555"/>
+            <a:ext cx="508000" cy="508000"/>
+          </a:xfrm>
+          <a:prstGeom prst="ellipse">
+            <a:avLst/>
+          </a:prstGeom>
+          <a:solidFill>
+            <a:srgbClr val="1F3FD1"/>
+          </a:solidFill>
+          <a:ln>
+            <a:noFill/>
+          </a:ln>
+        </p:spPr>
+        <p:txBody>
+          <a:bodyPr rtlCol="0" anchor="ctr" lIns="0" rIns="0" tIns="0" bIns="0"/>
+          <a:lstStyle/>
+          <a:p>
+            <a:pPr algn="ctr"/>
+            <a:r>
+              <a:rPr sz="2000" b="1">
+                <a:solidFill>
+                  <a:srgbClr val="FFFFFF"/>
+                </a:solidFill>
+                <a:latin typeface="Calibri"/>
+              </a:rPr>
+              <a:t>3</a:t>
+            </a:r>
+          </a:p>
+        </p:txBody>
+      </p:sp>
+      <p:sp>
+        <p:nvSpPr>
+          <p:cNvPr id="11" name="card text"/>
+          <p:cNvSpPr txBox="1"/>
+          <p:nvPr/>
+        </p:nvSpPr>
+        <p:spPr>
+          <a:xfrm>
+            <a:off x="1701800" y="3709924"/>
+            <a:ext cx="9525000" cy="715263"/>
           </a:xfrm>
           <a:prstGeom prst="rect">
             <a:avLst/>
@@ -12176,170 +11776,62 @@
           </a:bodyPr>
           <a:lstStyle/>
           <a:p>
-            <a:pPr algn="ctr">
-              <a:lnSpc>
-                <a:spcPct val="100000"/>
-              </a:lnSpc>
-            </a:pPr>
-            <a:r>
-              <a:rPr sz="2200" b="1">
-                <a:solidFill>
-                  <a:srgbClr val="0F172A"/>
-                </a:solidFill>
-                <a:latin typeface="Calibri"/>
-              </a:rPr>
-              <a:t>Đội native (/team)</a:t>
-            </a:r>
-          </a:p>
-        </p:txBody>
-      </p:sp>
-      <p:sp>
-        <p:nvSpPr>
-          <p:cNvPr id="13" name="component"/>
-          <p:cNvSpPr/>
-          <p:nvPr/>
-        </p:nvSpPr>
-        <p:spPr>
-          <a:xfrm>
-            <a:off x="4597400" y="4003548"/>
-            <a:ext cx="2997200" cy="1223264"/>
-          </a:xfrm>
-          <a:prstGeom prst="roundRect">
-            <a:avLst>
-              <a:gd name="adj" fmla="val 16611"/>
-            </a:avLst>
-          </a:prstGeom>
-          <a:solidFill>
-            <a:srgbClr val="CCFBF1"/>
-          </a:solidFill>
-          <a:ln w="25400">
-            <a:solidFill>
-              <a:srgbClr val="0F766E"/>
-            </a:solidFill>
-          </a:ln>
-        </p:spPr>
-        <p:txBody>
-          <a:bodyPr rtlCol="0" anchor="ctr"/>
-          <a:lstStyle/>
-          <a:p>
-            <a:pPr algn="ctr"/>
-          </a:p>
-        </p:txBody>
-      </p:sp>
-      <p:sp>
-        <p:nvSpPr>
-          <p:cNvPr id="14" name="component name"/>
-          <p:cNvSpPr txBox="1"/>
-          <p:nvPr/>
-        </p:nvSpPr>
-        <p:spPr>
-          <a:xfrm>
-            <a:off x="4775200" y="4105148"/>
-            <a:ext cx="2641600" cy="1020063"/>
-          </a:xfrm>
-          <a:prstGeom prst="rect">
-            <a:avLst/>
-          </a:prstGeom>
-          <a:noFill/>
-        </p:spPr>
-        <p:txBody>
-          <a:bodyPr wrap="square" lIns="0" rIns="0" tIns="0" bIns="0" anchor="ctr">
-            <a:noAutofit/>
-          </a:bodyPr>
-          <a:lstStyle/>
-          <a:p>
-            <a:pPr algn="ctr">
-              <a:lnSpc>
-                <a:spcPct val="100000"/>
-              </a:lnSpc>
-            </a:pPr>
-            <a:r>
-              <a:rPr sz="2200" b="1">
-                <a:solidFill>
-                  <a:srgbClr val="0F172A"/>
-                </a:solidFill>
-                <a:latin typeface="Calibri"/>
-              </a:rPr>
-              <a:t>Worker tmux</a:t>
-            </a:r>
-          </a:p>
-        </p:txBody>
-      </p:sp>
-      <p:sp>
-        <p:nvSpPr>
-          <p:cNvPr id="15" name="component"/>
-          <p:cNvSpPr/>
-          <p:nvPr/>
-        </p:nvSpPr>
-        <p:spPr>
-          <a:xfrm>
-            <a:off x="8509000" y="3214116"/>
-            <a:ext cx="2997200" cy="1223264"/>
-          </a:xfrm>
-          <a:prstGeom prst="roundRect">
-            <a:avLst>
-              <a:gd name="adj" fmla="val 16611"/>
-            </a:avLst>
-          </a:prstGeom>
-          <a:solidFill>
-            <a:srgbClr val="FEF3C7"/>
-          </a:solidFill>
-          <a:ln w="25400">
-            <a:solidFill>
-              <a:srgbClr val="B45309"/>
-            </a:solidFill>
-          </a:ln>
-        </p:spPr>
-        <p:txBody>
-          <a:bodyPr rtlCol="0" anchor="ctr"/>
-          <a:lstStyle/>
-          <a:p>
-            <a:pPr algn="ctr"/>
-          </a:p>
-        </p:txBody>
-      </p:sp>
-      <p:sp>
-        <p:nvSpPr>
-          <p:cNvPr id="16" name="component name"/>
-          <p:cNvSpPr txBox="1"/>
-          <p:nvPr/>
-        </p:nvSpPr>
-        <p:spPr>
-          <a:xfrm>
-            <a:off x="8686800" y="3315716"/>
-            <a:ext cx="2641600" cy="1020063"/>
-          </a:xfrm>
-          <a:prstGeom prst="rect">
-            <a:avLst/>
-          </a:prstGeom>
-          <a:noFill/>
-        </p:spPr>
-        <p:txBody>
-          <a:bodyPr wrap="square" lIns="0" rIns="0" tIns="0" bIns="0" anchor="ctr">
-            <a:noAutofit/>
-          </a:bodyPr>
-          <a:lstStyle/>
-          <a:p>
-            <a:pPr algn="ctr">
-              <a:lnSpc>
-                <a:spcPct val="100000"/>
-              </a:lnSpc>
-            </a:pPr>
-            <a:r>
-              <a:rPr sz="2200" b="1">
-                <a:solidFill>
-                  <a:srgbClr val="0F172A"/>
-                </a:solidFill>
-                <a:latin typeface="Calibri"/>
-              </a:rPr>
-              <a:t>Thư mục .omc/</a:t>
-            </a:r>
-          </a:p>
-        </p:txBody>
-      </p:sp>
-      <p:sp>
-        <p:nvSpPr>
-          <p:cNvPr id="17" name="page"/>
+            <a:pPr algn="l">
+              <a:lnSpc>
+                <a:spcPct val="100000"/>
+              </a:lnSpc>
+            </a:pPr>
+            <a:r>
+              <a:rPr sz="2200" b="0">
+                <a:solidFill>
+                  <a:srgbClr val="14161C"/>
+                </a:solidFill>
+                <a:latin typeface="Calibri"/>
+              </a:rPr>
+              <a:t>Chạy OMC trong worktree? Đặt </a:t>
+            </a:r>
+            <a:r>
+              <a:rPr sz="2000" b="0">
+                <a:solidFill>
+                  <a:srgbClr val="B02D16"/>
+                </a:solidFill>
+                <a:latin typeface="Consolas"/>
+              </a:rPr>
+              <a:t>OMC_STATE_DIR</a:t>
+            </a:r>
+            <a:r>
+              <a:rPr sz="2200" b="0">
+                <a:solidFill>
+                  <a:srgbClr val="14161C"/>
+                </a:solidFill>
+                <a:latin typeface="Calibri"/>
+              </a:rPr>
+              <a:t> để trạng thái </a:t>
+            </a:r>
+            <a:r>
+              <a:rPr sz="2000" b="0">
+                <a:solidFill>
+                  <a:srgbClr val="B02D16"/>
+                </a:solidFill>
+                <a:latin typeface="Consolas"/>
+              </a:rPr>
+              <a:t>.omc/</a:t>
+            </a:r>
+            <a:r>
+              <a:rPr sz="2200" b="0">
+                <a:solidFill>
+                  <a:srgbClr val="14161C"/>
+                </a:solidFill>
+                <a:latin typeface="Calibri"/>
+              </a:rPr>
+              <a:t> không mất khi xóa worktree.</a:t>
+            </a:r>
+          </a:p>
+        </p:txBody>
+      </p:sp>
+      <p:sp>
+        <p:nvSpPr>
+          <p:cNvPr id="12" name="page"/>
           <p:cNvSpPr txBox="1"/>
           <p:nvPr/>
         </p:nvSpPr>
@@ -12371,14 +11863,14 @@
                 </a:solidFill>
                 <a:latin typeface="Calibri"/>
               </a:rPr>
-              <a:t>24/33</a:t>
-            </a:r>
-          </a:p>
-        </p:txBody>
-      </p:sp>
-      <p:sp>
-        <p:nvSpPr>
-          <p:cNvPr id="18" name="rail"/>
+              <a:t>24/34</a:t>
+            </a:r>
+          </a:p>
+        </p:txBody>
+      </p:sp>
+      <p:sp>
+        <p:nvSpPr>
+          <p:cNvPr id="13" name="rail"/>
           <p:cNvSpPr/>
           <p:nvPr/>
         </p:nvSpPr>
@@ -12407,14 +11899,14 @@
       </p:sp>
       <p:sp>
         <p:nvSpPr>
-          <p:cNvPr id="19" name="progress"/>
+          <p:cNvPr id="14" name="progress"/>
           <p:cNvSpPr/>
           <p:nvPr/>
         </p:nvSpPr>
         <p:spPr>
           <a:xfrm>
             <a:off x="685800" y="6426200"/>
-            <a:ext cx="7869381" cy="88900"/>
+            <a:ext cx="7637929" cy="88900"/>
           </a:xfrm>
           <a:prstGeom prst="rect">
             <a:avLst/>
@@ -12436,7 +11928,7 @@
       </p:sp>
       <p:sp>
         <p:nvSpPr>
-          <p:cNvPr id="20" name="footer"/>
+          <p:cNvPr id="15" name="footer"/>
           <p:cNvSpPr txBox="1"/>
           <p:nvPr/>
         </p:nvSpPr>
@@ -12533,29 +12025,614 @@
                 </a:solidFill>
                 <a:latin typeface="Cambria"/>
               </a:rPr>
-              <a:t>Các mảnh ghép (1/2)</a:t>
-            </a:r>
-          </a:p>
-        </p:txBody>
-      </p:sp>
-      <p:sp>
-        <p:nvSpPr>
-          <p:cNvPr id="3" name="card"/>
-          <p:cNvSpPr/>
-          <p:nvPr/>
-        </p:nvSpPr>
-        <p:spPr>
-          <a:xfrm>
-            <a:off x="685800" y="1326895"/>
-            <a:ext cx="10820400" cy="1448308"/>
+              <a:t>Bên trong nó hoạt động ra sao</a:t>
+            </a:r>
+          </a:p>
+        </p:txBody>
+      </p:sp>
+      <p:sp>
+        <p:nvSpPr>
+          <p:cNvPr id="3" name="flow arrow"/>
+          <p:cNvSpPr/>
+          <p:nvPr/>
+        </p:nvSpPr>
+        <p:spPr>
+          <a:xfrm>
+            <a:off x="3683000" y="3101847"/>
+            <a:ext cx="914400" cy="0"/>
+          </a:xfrm>
+          <a:custGeom>
+            <a:avLst/>
+            <a:gdLst/>
+            <a:ahLst/>
+            <a:cxnLst/>
+            <a:rect l="l" t="t" r="r" b="b"/>
+            <a:pathLst>
+              <a:path w="914400" h="0">
+                <a:moveTo>
+                  <a:pt x="0" y="0"/>
+                </a:moveTo>
+                <a:lnTo>
+                  <a:pt x="914400" y="0"/>
+                </a:lnTo>
+              </a:path>
+            </a:pathLst>
+          </a:custGeom>
+          <a:noFill/>
+          <a:ln w="31750">
+            <a:solidFill>
+              <a:srgbClr val="475569"/>
+            </a:solidFill>
+            <a:tailEnd type="triangle" w="med" len="med"/>
+          </a:ln>
+        </p:spPr>
+        <p:txBody>
+          <a:bodyPr rtlCol="0" anchor="ctr"/>
+          <a:lstStyle/>
+          <a:p>
+            <a:pPr algn="ctr"/>
+          </a:p>
+        </p:txBody>
+      </p:sp>
+      <p:sp>
+        <p:nvSpPr>
+          <p:cNvPr id="4" name="flow arrow"/>
+          <p:cNvSpPr/>
+          <p:nvPr/>
+        </p:nvSpPr>
+        <p:spPr>
+          <a:xfrm>
+            <a:off x="3683000" y="4549648"/>
+            <a:ext cx="914400" cy="0"/>
+          </a:xfrm>
+          <a:custGeom>
+            <a:avLst/>
+            <a:gdLst/>
+            <a:ahLst/>
+            <a:cxnLst/>
+            <a:rect l="l" t="t" r="r" b="b"/>
+            <a:pathLst>
+              <a:path w="914400" h="0">
+                <a:moveTo>
+                  <a:pt x="0" y="0"/>
+                </a:moveTo>
+                <a:lnTo>
+                  <a:pt x="914400" y="0"/>
+                </a:lnTo>
+              </a:path>
+            </a:pathLst>
+          </a:custGeom>
+          <a:noFill/>
+          <a:ln w="31750">
+            <a:solidFill>
+              <a:srgbClr val="475569"/>
+            </a:solidFill>
+            <a:tailEnd type="triangle" w="med" len="med"/>
+          </a:ln>
+        </p:spPr>
+        <p:txBody>
+          <a:bodyPr rtlCol="0" anchor="ctr"/>
+          <a:lstStyle/>
+          <a:p>
+            <a:pPr algn="ctr"/>
+          </a:p>
+        </p:txBody>
+      </p:sp>
+      <p:sp>
+        <p:nvSpPr>
+          <p:cNvPr id="5" name="flow arrow"/>
+          <p:cNvSpPr/>
+          <p:nvPr/>
+        </p:nvSpPr>
+        <p:spPr>
+          <a:xfrm>
+            <a:off x="7594600" y="3101847"/>
+            <a:ext cx="914400" cy="723901"/>
+          </a:xfrm>
+          <a:custGeom>
+            <a:avLst/>
+            <a:gdLst/>
+            <a:ahLst/>
+            <a:cxnLst/>
+            <a:rect l="l" t="t" r="r" b="b"/>
+            <a:pathLst>
+              <a:path w="914400" h="723901">
+                <a:moveTo>
+                  <a:pt x="0" y="0"/>
+                </a:moveTo>
+                <a:lnTo>
+                  <a:pt x="457200" y="0"/>
+                </a:lnTo>
+                <a:lnTo>
+                  <a:pt x="457200" y="723901"/>
+                </a:lnTo>
+                <a:lnTo>
+                  <a:pt x="914400" y="723901"/>
+                </a:lnTo>
+              </a:path>
+            </a:pathLst>
+          </a:custGeom>
+          <a:noFill/>
+          <a:ln w="31750">
+            <a:solidFill>
+              <a:srgbClr val="475569"/>
+            </a:solidFill>
+            <a:tailEnd type="triangle" w="med" len="med"/>
+          </a:ln>
+        </p:spPr>
+        <p:txBody>
+          <a:bodyPr rtlCol="0" anchor="ctr"/>
+          <a:lstStyle/>
+          <a:p>
+            <a:pPr algn="ctr"/>
+          </a:p>
+        </p:txBody>
+      </p:sp>
+      <p:sp>
+        <p:nvSpPr>
+          <p:cNvPr id="6" name="flow arrow"/>
+          <p:cNvSpPr/>
+          <p:nvPr/>
+        </p:nvSpPr>
+        <p:spPr>
+          <a:xfrm>
+            <a:off x="7594600" y="3825748"/>
+            <a:ext cx="914400" cy="723900"/>
+          </a:xfrm>
+          <a:custGeom>
+            <a:avLst/>
+            <a:gdLst/>
+            <a:ahLst/>
+            <a:cxnLst/>
+            <a:rect l="l" t="t" r="r" b="b"/>
+            <a:pathLst>
+              <a:path w="914400" h="723900">
+                <a:moveTo>
+                  <a:pt x="0" y="723900"/>
+                </a:moveTo>
+                <a:lnTo>
+                  <a:pt x="457200" y="723900"/>
+                </a:lnTo>
+                <a:lnTo>
+                  <a:pt x="457200" y="0"/>
+                </a:lnTo>
+                <a:lnTo>
+                  <a:pt x="914400" y="0"/>
+                </a:lnTo>
+              </a:path>
+            </a:pathLst>
+          </a:custGeom>
+          <a:noFill/>
+          <a:ln w="31750">
+            <a:solidFill>
+              <a:srgbClr val="475569"/>
+            </a:solidFill>
+            <a:tailEnd type="triangle" w="med" len="med"/>
+          </a:ln>
+        </p:spPr>
+        <p:txBody>
+          <a:bodyPr rtlCol="0" anchor="ctr"/>
+          <a:lstStyle/>
+          <a:p>
+            <a:pPr algn="ctr"/>
+          </a:p>
+        </p:txBody>
+      </p:sp>
+      <p:sp>
+        <p:nvSpPr>
+          <p:cNvPr id="7" name="component"/>
+          <p:cNvSpPr/>
+          <p:nvPr/>
+        </p:nvSpPr>
+        <p:spPr>
+          <a:xfrm>
+            <a:off x="685800" y="2555747"/>
+            <a:ext cx="2997200" cy="1092200"/>
           </a:xfrm>
           <a:prstGeom prst="roundRect">
             <a:avLst>
-              <a:gd name="adj" fmla="val 14030"/>
+              <a:gd name="adj" fmla="val 18604"/>
             </a:avLst>
           </a:prstGeom>
           <a:solidFill>
-            <a:srgbClr val="E8E0CF"/>
+            <a:srgbClr val="E0F2FE"/>
+          </a:solidFill>
+          <a:ln w="25400">
+            <a:solidFill>
+              <a:srgbClr val="0284C7"/>
+            </a:solidFill>
+          </a:ln>
+        </p:spPr>
+        <p:txBody>
+          <a:bodyPr rtlCol="0" anchor="ctr"/>
+          <a:lstStyle/>
+          <a:p>
+            <a:pPr algn="ctr"/>
+          </a:p>
+        </p:txBody>
+      </p:sp>
+      <p:sp>
+        <p:nvSpPr>
+          <p:cNvPr id="8" name="component name"/>
+          <p:cNvSpPr txBox="1"/>
+          <p:nvPr/>
+        </p:nvSpPr>
+        <p:spPr>
+          <a:xfrm>
+            <a:off x="863600" y="2657347"/>
+            <a:ext cx="2641600" cy="889000"/>
+          </a:xfrm>
+          <a:prstGeom prst="rect">
+            <a:avLst/>
+          </a:prstGeom>
+          <a:noFill/>
+        </p:spPr>
+        <p:txBody>
+          <a:bodyPr wrap="square" lIns="0" rIns="0" tIns="0" bIns="0" anchor="ctr">
+            <a:noAutofit/>
+          </a:bodyPr>
+          <a:lstStyle/>
+          <a:p>
+            <a:pPr algn="ctr">
+              <a:lnSpc>
+                <a:spcPct val="100000"/>
+              </a:lnSpc>
+            </a:pPr>
+            <a:r>
+              <a:rPr sz="2200" b="1">
+                <a:solidFill>
+                  <a:srgbClr val="0F172A"/>
+                </a:solidFill>
+                <a:latin typeface="Calibri"/>
+              </a:rPr>
+              <a:t>Plugin trong Claude Code</a:t>
+            </a:r>
+          </a:p>
+        </p:txBody>
+      </p:sp>
+      <p:sp>
+        <p:nvSpPr>
+          <p:cNvPr id="9" name="component"/>
+          <p:cNvSpPr/>
+          <p:nvPr/>
+        </p:nvSpPr>
+        <p:spPr>
+          <a:xfrm>
+            <a:off x="685800" y="4003548"/>
+            <a:ext cx="2997200" cy="1092200"/>
+          </a:xfrm>
+          <a:prstGeom prst="roundRect">
+            <a:avLst>
+              <a:gd name="adj" fmla="val 18604"/>
+            </a:avLst>
+          </a:prstGeom>
+          <a:solidFill>
+            <a:srgbClr val="E0F2FE"/>
+          </a:solidFill>
+          <a:ln w="25400">
+            <a:solidFill>
+              <a:srgbClr val="0284C7"/>
+            </a:solidFill>
+          </a:ln>
+        </p:spPr>
+        <p:txBody>
+          <a:bodyPr rtlCol="0" anchor="ctr"/>
+          <a:lstStyle/>
+          <a:p>
+            <a:pPr algn="ctr"/>
+          </a:p>
+        </p:txBody>
+      </p:sp>
+      <p:sp>
+        <p:nvSpPr>
+          <p:cNvPr id="10" name="component name"/>
+          <p:cNvSpPr txBox="1"/>
+          <p:nvPr/>
+        </p:nvSpPr>
+        <p:spPr>
+          <a:xfrm>
+            <a:off x="863600" y="4105148"/>
+            <a:ext cx="2641600" cy="889000"/>
+          </a:xfrm>
+          <a:prstGeom prst="rect">
+            <a:avLst/>
+          </a:prstGeom>
+          <a:noFill/>
+        </p:spPr>
+        <p:txBody>
+          <a:bodyPr wrap="square" lIns="0" rIns="0" tIns="0" bIns="0" anchor="ctr">
+            <a:noAutofit/>
+          </a:bodyPr>
+          <a:lstStyle/>
+          <a:p>
+            <a:pPr algn="ctr">
+              <a:lnSpc>
+                <a:spcPct val="100000"/>
+              </a:lnSpc>
+            </a:pPr>
+            <a:r>
+              <a:rPr sz="2200" b="1">
+                <a:solidFill>
+                  <a:srgbClr val="0F172A"/>
+                </a:solidFill>
+                <a:latin typeface="Calibri"/>
+              </a:rPr>
+              <a:t>Lệnh omc (gói npm)</a:t>
+            </a:r>
+          </a:p>
+        </p:txBody>
+      </p:sp>
+      <p:sp>
+        <p:nvSpPr>
+          <p:cNvPr id="11" name="component"/>
+          <p:cNvSpPr/>
+          <p:nvPr/>
+        </p:nvSpPr>
+        <p:spPr>
+          <a:xfrm>
+            <a:off x="4597400" y="2555747"/>
+            <a:ext cx="2997200" cy="1092200"/>
+          </a:xfrm>
+          <a:prstGeom prst="roundRect">
+            <a:avLst>
+              <a:gd name="adj" fmla="val 18604"/>
+            </a:avLst>
+          </a:prstGeom>
+          <a:solidFill>
+            <a:srgbClr val="CCFBF1"/>
+          </a:solidFill>
+          <a:ln w="25400">
+            <a:solidFill>
+              <a:srgbClr val="0F766E"/>
+            </a:solidFill>
+          </a:ln>
+        </p:spPr>
+        <p:txBody>
+          <a:bodyPr rtlCol="0" anchor="ctr"/>
+          <a:lstStyle/>
+          <a:p>
+            <a:pPr algn="ctr"/>
+          </a:p>
+        </p:txBody>
+      </p:sp>
+      <p:sp>
+        <p:nvSpPr>
+          <p:cNvPr id="12" name="component name"/>
+          <p:cNvSpPr txBox="1"/>
+          <p:nvPr/>
+        </p:nvSpPr>
+        <p:spPr>
+          <a:xfrm>
+            <a:off x="4775200" y="2657347"/>
+            <a:ext cx="2641600" cy="889000"/>
+          </a:xfrm>
+          <a:prstGeom prst="rect">
+            <a:avLst/>
+          </a:prstGeom>
+          <a:noFill/>
+        </p:spPr>
+        <p:txBody>
+          <a:bodyPr wrap="square" lIns="0" rIns="0" tIns="0" bIns="0" anchor="ctr">
+            <a:noAutofit/>
+          </a:bodyPr>
+          <a:lstStyle/>
+          <a:p>
+            <a:pPr algn="ctr">
+              <a:lnSpc>
+                <a:spcPct val="100000"/>
+              </a:lnSpc>
+            </a:pPr>
+            <a:r>
+              <a:rPr sz="2200" b="1">
+                <a:solidFill>
+                  <a:srgbClr val="0F172A"/>
+                </a:solidFill>
+                <a:latin typeface="Calibri"/>
+              </a:rPr>
+              <a:t>Đội native (/team)</a:t>
+            </a:r>
+          </a:p>
+        </p:txBody>
+      </p:sp>
+      <p:sp>
+        <p:nvSpPr>
+          <p:cNvPr id="13" name="component"/>
+          <p:cNvSpPr/>
+          <p:nvPr/>
+        </p:nvSpPr>
+        <p:spPr>
+          <a:xfrm>
+            <a:off x="4597400" y="4003548"/>
+            <a:ext cx="2997200" cy="1092200"/>
+          </a:xfrm>
+          <a:prstGeom prst="roundRect">
+            <a:avLst>
+              <a:gd name="adj" fmla="val 18604"/>
+            </a:avLst>
+          </a:prstGeom>
+          <a:solidFill>
+            <a:srgbClr val="CCFBF1"/>
+          </a:solidFill>
+          <a:ln w="25400">
+            <a:solidFill>
+              <a:srgbClr val="0F766E"/>
+            </a:solidFill>
+          </a:ln>
+        </p:spPr>
+        <p:txBody>
+          <a:bodyPr rtlCol="0" anchor="ctr"/>
+          <a:lstStyle/>
+          <a:p>
+            <a:pPr algn="ctr"/>
+          </a:p>
+        </p:txBody>
+      </p:sp>
+      <p:sp>
+        <p:nvSpPr>
+          <p:cNvPr id="14" name="component name"/>
+          <p:cNvSpPr txBox="1"/>
+          <p:nvPr/>
+        </p:nvSpPr>
+        <p:spPr>
+          <a:xfrm>
+            <a:off x="4775200" y="4105148"/>
+            <a:ext cx="2641600" cy="889000"/>
+          </a:xfrm>
+          <a:prstGeom prst="rect">
+            <a:avLst/>
+          </a:prstGeom>
+          <a:noFill/>
+        </p:spPr>
+        <p:txBody>
+          <a:bodyPr wrap="square" lIns="0" rIns="0" tIns="0" bIns="0" anchor="ctr">
+            <a:noAutofit/>
+          </a:bodyPr>
+          <a:lstStyle/>
+          <a:p>
+            <a:pPr algn="ctr">
+              <a:lnSpc>
+                <a:spcPct val="100000"/>
+              </a:lnSpc>
+            </a:pPr>
+            <a:r>
+              <a:rPr sz="2200" b="1">
+                <a:solidFill>
+                  <a:srgbClr val="0F172A"/>
+                </a:solidFill>
+                <a:latin typeface="Calibri"/>
+              </a:rPr>
+              <a:t>Worker tmux</a:t>
+            </a:r>
+          </a:p>
+        </p:txBody>
+      </p:sp>
+      <p:sp>
+        <p:nvSpPr>
+          <p:cNvPr id="15" name="component"/>
+          <p:cNvSpPr/>
+          <p:nvPr/>
+        </p:nvSpPr>
+        <p:spPr>
+          <a:xfrm>
+            <a:off x="8509000" y="3279648"/>
+            <a:ext cx="2997200" cy="1092200"/>
+          </a:xfrm>
+          <a:prstGeom prst="roundRect">
+            <a:avLst>
+              <a:gd name="adj" fmla="val 18604"/>
+            </a:avLst>
+          </a:prstGeom>
+          <a:solidFill>
+            <a:srgbClr val="FEF3C7"/>
+          </a:solidFill>
+          <a:ln w="25400">
+            <a:solidFill>
+              <a:srgbClr val="B45309"/>
+            </a:solidFill>
+          </a:ln>
+        </p:spPr>
+        <p:txBody>
+          <a:bodyPr rtlCol="0" anchor="ctr"/>
+          <a:lstStyle/>
+          <a:p>
+            <a:pPr algn="ctr"/>
+          </a:p>
+        </p:txBody>
+      </p:sp>
+      <p:sp>
+        <p:nvSpPr>
+          <p:cNvPr id="16" name="component name"/>
+          <p:cNvSpPr txBox="1"/>
+          <p:nvPr/>
+        </p:nvSpPr>
+        <p:spPr>
+          <a:xfrm>
+            <a:off x="8686800" y="3381248"/>
+            <a:ext cx="2641600" cy="889000"/>
+          </a:xfrm>
+          <a:prstGeom prst="rect">
+            <a:avLst/>
+          </a:prstGeom>
+          <a:noFill/>
+        </p:spPr>
+        <p:txBody>
+          <a:bodyPr wrap="square" lIns="0" rIns="0" tIns="0" bIns="0" anchor="ctr">
+            <a:noAutofit/>
+          </a:bodyPr>
+          <a:lstStyle/>
+          <a:p>
+            <a:pPr algn="ctr">
+              <a:lnSpc>
+                <a:spcPct val="100000"/>
+              </a:lnSpc>
+            </a:pPr>
+            <a:r>
+              <a:rPr sz="2200" b="1">
+                <a:solidFill>
+                  <a:srgbClr val="0F172A"/>
+                </a:solidFill>
+                <a:latin typeface="Calibri"/>
+              </a:rPr>
+              <a:t>Thư mục .omc/</a:t>
+            </a:r>
+          </a:p>
+        </p:txBody>
+      </p:sp>
+      <p:sp>
+        <p:nvSpPr>
+          <p:cNvPr id="17" name="page"/>
+          <p:cNvSpPr txBox="1"/>
+          <p:nvPr/>
+        </p:nvSpPr>
+        <p:spPr>
+          <a:xfrm>
+            <a:off x="9474200" y="304800"/>
+            <a:ext cx="2032000" cy="279400"/>
+          </a:xfrm>
+          <a:prstGeom prst="rect">
+            <a:avLst/>
+          </a:prstGeom>
+          <a:noFill/>
+        </p:spPr>
+        <p:txBody>
+          <a:bodyPr wrap="square" lIns="0" rIns="0" tIns="0" bIns="0" anchor="t">
+            <a:noAutofit/>
+          </a:bodyPr>
+          <a:lstStyle/>
+          <a:p>
+            <a:pPr algn="r">
+              <a:lnSpc>
+                <a:spcPct val="100000"/>
+              </a:lnSpc>
+            </a:pPr>
+            <a:r>
+              <a:rPr sz="1600" b="1">
+                <a:solidFill>
+                  <a:srgbClr val="14161C"/>
+                </a:solidFill>
+                <a:latin typeface="Calibri"/>
+              </a:rPr>
+              <a:t>25/34</a:t>
+            </a:r>
+          </a:p>
+        </p:txBody>
+      </p:sp>
+      <p:sp>
+        <p:nvSpPr>
+          <p:cNvPr id="18" name="rail"/>
+          <p:cNvSpPr/>
+          <p:nvPr/>
+        </p:nvSpPr>
+        <p:spPr>
+          <a:xfrm>
+            <a:off x="685800" y="6451600"/>
+            <a:ext cx="10820400" cy="38100"/>
+          </a:xfrm>
+          <a:prstGeom prst="rect">
+            <a:avLst/>
+          </a:prstGeom>
+          <a:solidFill>
+            <a:srgbClr val="6B6A66"/>
           </a:solidFill>
           <a:ln>
             <a:noFill/>
@@ -12571,124 +12648,26 @@
       </p:sp>
       <p:sp>
         <p:nvSpPr>
-          <p:cNvPr id="4" name="marker 1"/>
-          <p:cNvSpPr/>
-          <p:nvPr/>
-        </p:nvSpPr>
-        <p:spPr>
-          <a:xfrm>
-            <a:off x="965200" y="1797050"/>
-            <a:ext cx="508000" cy="508000"/>
-          </a:xfrm>
-          <a:prstGeom prst="ellipse">
-            <a:avLst/>
-          </a:prstGeom>
-          <a:solidFill>
-            <a:srgbClr val="1F3FD1"/>
+          <p:cNvPr id="19" name="progress"/>
+          <p:cNvSpPr/>
+          <p:nvPr/>
+        </p:nvSpPr>
+        <p:spPr>
+          <a:xfrm>
+            <a:off x="685800" y="6426200"/>
+            <a:ext cx="7956176" cy="88900"/>
+          </a:xfrm>
+          <a:prstGeom prst="rect">
+            <a:avLst/>
+          </a:prstGeom>
+          <a:solidFill>
+            <a:srgbClr val="E8472B"/>
           </a:solidFill>
           <a:ln>
             <a:noFill/>
           </a:ln>
         </p:spPr>
         <p:txBody>
-          <a:bodyPr rtlCol="0" anchor="ctr" lIns="0" rIns="0" tIns="0" bIns="0"/>
-          <a:lstStyle/>
-          <a:p>
-            <a:pPr algn="ctr"/>
-            <a:r>
-              <a:rPr sz="2000" b="1">
-                <a:solidFill>
-                  <a:srgbClr val="FFFFFF"/>
-                </a:solidFill>
-                <a:latin typeface="Calibri"/>
-              </a:rPr>
-              <a:t>1</a:t>
-            </a:r>
-          </a:p>
-        </p:txBody>
-      </p:sp>
-      <p:sp>
-        <p:nvSpPr>
-          <p:cNvPr id="5" name="card text"/>
-          <p:cNvSpPr txBox="1"/>
-          <p:nvPr/>
-        </p:nvSpPr>
-        <p:spPr>
-          <a:xfrm>
-            <a:off x="1701800" y="1466595"/>
-            <a:ext cx="9525000" cy="1168908"/>
-          </a:xfrm>
-          <a:prstGeom prst="rect">
-            <a:avLst/>
-          </a:prstGeom>
-          <a:noFill/>
-        </p:spPr>
-        <p:txBody>
-          <a:bodyPr wrap="square" lIns="0" rIns="0" tIns="0" bIns="0" anchor="ctr">
-            <a:noAutofit/>
-          </a:bodyPr>
-          <a:lstStyle/>
-          <a:p>
-            <a:pPr algn="l">
-              <a:lnSpc>
-                <a:spcPct val="100000"/>
-              </a:lnSpc>
-            </a:pPr>
-            <a:r>
-              <a:rPr sz="2400" b="1">
-                <a:solidFill>
-                  <a:srgbClr val="14161C"/>
-                </a:solidFill>
-                <a:latin typeface="Calibri"/>
-              </a:rPr>
-              <a:t>Plugin trong Claude Code</a:t>
-            </a:r>
-          </a:p>
-          <a:p>
-            <a:pPr algn="l">
-              <a:lnSpc>
-                <a:spcPct val="100000"/>
-              </a:lnSpc>
-              <a:spcBef>
-                <a:spcPts val="500"/>
-              </a:spcBef>
-            </a:pPr>
-            <a:r>
-              <a:rPr sz="2200" b="0">
-                <a:solidFill>
-                  <a:srgbClr val="14161C"/>
-                </a:solidFill>
-                <a:latin typeface="Calibri"/>
-              </a:rPr>
-              <a:t>Đưa các skill /team, /autopilot, /ralph vào phiên Claude Code qua marketplace của plugin.</a:t>
-            </a:r>
-          </a:p>
-        </p:txBody>
-      </p:sp>
-      <p:sp>
-        <p:nvSpPr>
-          <p:cNvPr id="6" name="card"/>
-          <p:cNvSpPr/>
-          <p:nvPr/>
-        </p:nvSpPr>
-        <p:spPr>
-          <a:xfrm>
-            <a:off x="685800" y="2902204"/>
-            <a:ext cx="10820400" cy="1448308"/>
-          </a:xfrm>
-          <a:prstGeom prst="roundRect">
-            <a:avLst>
-              <a:gd name="adj" fmla="val 14030"/>
-            </a:avLst>
-          </a:prstGeom>
-          <a:solidFill>
-            <a:srgbClr val="E8E0CF"/>
-          </a:solidFill>
-          <a:ln>
-            <a:noFill/>
-          </a:ln>
-        </p:spPr>
-        <p:txBody>
           <a:bodyPr rtlCol="0" anchor="ctr"/>
           <a:lstStyle/>
           <a:p>
@@ -12698,327 +12677,7 @@
       </p:sp>
       <p:sp>
         <p:nvSpPr>
-          <p:cNvPr id="7" name="marker 2"/>
-          <p:cNvSpPr/>
-          <p:nvPr/>
-        </p:nvSpPr>
-        <p:spPr>
-          <a:xfrm>
-            <a:off x="965200" y="3372357"/>
-            <a:ext cx="508000" cy="508000"/>
-          </a:xfrm>
-          <a:prstGeom prst="ellipse">
-            <a:avLst/>
-          </a:prstGeom>
-          <a:solidFill>
-            <a:srgbClr val="0F766E"/>
-          </a:solidFill>
-          <a:ln>
-            <a:noFill/>
-          </a:ln>
-        </p:spPr>
-        <p:txBody>
-          <a:bodyPr rtlCol="0" anchor="ctr" lIns="0" rIns="0" tIns="0" bIns="0"/>
-          <a:lstStyle/>
-          <a:p>
-            <a:pPr algn="ctr"/>
-            <a:r>
-              <a:rPr sz="2000" b="1">
-                <a:solidFill>
-                  <a:srgbClr val="FFFFFF"/>
-                </a:solidFill>
-                <a:latin typeface="Calibri"/>
-              </a:rPr>
-              <a:t>2</a:t>
-            </a:r>
-          </a:p>
-        </p:txBody>
-      </p:sp>
-      <p:sp>
-        <p:nvSpPr>
-          <p:cNvPr id="8" name="card text"/>
-          <p:cNvSpPr txBox="1"/>
-          <p:nvPr/>
-        </p:nvSpPr>
-        <p:spPr>
-          <a:xfrm>
-            <a:off x="1701800" y="3041904"/>
-            <a:ext cx="9525000" cy="1168908"/>
-          </a:xfrm>
-          <a:prstGeom prst="rect">
-            <a:avLst/>
-          </a:prstGeom>
-          <a:noFill/>
-        </p:spPr>
-        <p:txBody>
-          <a:bodyPr wrap="square" lIns="0" rIns="0" tIns="0" bIns="0" anchor="ctr">
-            <a:noAutofit/>
-          </a:bodyPr>
-          <a:lstStyle/>
-          <a:p>
-            <a:pPr algn="l">
-              <a:lnSpc>
-                <a:spcPct val="100000"/>
-              </a:lnSpc>
-            </a:pPr>
-            <a:r>
-              <a:rPr sz="2400" b="1">
-                <a:solidFill>
-                  <a:srgbClr val="14161C"/>
-                </a:solidFill>
-                <a:latin typeface="Calibri"/>
-              </a:rPr>
-              <a:t>Lệnh omc (gói npm)</a:t>
-            </a:r>
-          </a:p>
-          <a:p>
-            <a:pPr algn="l">
-              <a:lnSpc>
-                <a:spcPct val="100000"/>
-              </a:lnSpc>
-              <a:spcBef>
-                <a:spcPts val="500"/>
-              </a:spcBef>
-            </a:pPr>
-            <a:r>
-              <a:rPr sz="2200" b="0">
-                <a:solidFill>
-                  <a:srgbClr val="14161C"/>
-                </a:solidFill>
-                <a:latin typeface="Calibri"/>
-              </a:rPr>
-              <a:t>Lệnh terminal: omc setup, omc team, omc ask. Cài bằng gói npm oh-my-claude-sisyphus.</a:t>
-            </a:r>
-          </a:p>
-        </p:txBody>
-      </p:sp>
-      <p:sp>
-        <p:nvSpPr>
-          <p:cNvPr id="9" name="card"/>
-          <p:cNvSpPr/>
-          <p:nvPr/>
-        </p:nvSpPr>
-        <p:spPr>
-          <a:xfrm>
-            <a:off x="685800" y="4477511"/>
-            <a:ext cx="10820400" cy="1448308"/>
-          </a:xfrm>
-          <a:prstGeom prst="roundRect">
-            <a:avLst>
-              <a:gd name="adj" fmla="val 14030"/>
-            </a:avLst>
-          </a:prstGeom>
-          <a:solidFill>
-            <a:srgbClr val="E8E0CF"/>
-          </a:solidFill>
-          <a:ln>
-            <a:noFill/>
-          </a:ln>
-        </p:spPr>
-        <p:txBody>
-          <a:bodyPr rtlCol="0" anchor="ctr"/>
-          <a:lstStyle/>
-          <a:p>
-            <a:pPr algn="ctr"/>
-          </a:p>
-        </p:txBody>
-      </p:sp>
-      <p:sp>
-        <p:nvSpPr>
-          <p:cNvPr id="10" name="marker 3"/>
-          <p:cNvSpPr/>
-          <p:nvPr/>
-        </p:nvSpPr>
-        <p:spPr>
-          <a:xfrm>
-            <a:off x="965200" y="4947665"/>
-            <a:ext cx="508000" cy="508000"/>
-          </a:xfrm>
-          <a:prstGeom prst="ellipse">
-            <a:avLst/>
-          </a:prstGeom>
-          <a:solidFill>
-            <a:srgbClr val="1F3FD1"/>
-          </a:solidFill>
-          <a:ln>
-            <a:noFill/>
-          </a:ln>
-        </p:spPr>
-        <p:txBody>
-          <a:bodyPr rtlCol="0" anchor="ctr" lIns="0" rIns="0" tIns="0" bIns="0"/>
-          <a:lstStyle/>
-          <a:p>
-            <a:pPr algn="ctr"/>
-            <a:r>
-              <a:rPr sz="2000" b="1">
-                <a:solidFill>
-                  <a:srgbClr val="FFFFFF"/>
-                </a:solidFill>
-                <a:latin typeface="Calibri"/>
-              </a:rPr>
-              <a:t>3</a:t>
-            </a:r>
-          </a:p>
-        </p:txBody>
-      </p:sp>
-      <p:sp>
-        <p:nvSpPr>
-          <p:cNvPr id="11" name="card text"/>
-          <p:cNvSpPr txBox="1"/>
-          <p:nvPr/>
-        </p:nvSpPr>
-        <p:spPr>
-          <a:xfrm>
-            <a:off x="1701800" y="4617211"/>
-            <a:ext cx="9525000" cy="1168908"/>
-          </a:xfrm>
-          <a:prstGeom prst="rect">
-            <a:avLst/>
-          </a:prstGeom>
-          <a:noFill/>
-        </p:spPr>
-        <p:txBody>
-          <a:bodyPr wrap="square" lIns="0" rIns="0" tIns="0" bIns="0" anchor="ctr">
-            <a:noAutofit/>
-          </a:bodyPr>
-          <a:lstStyle/>
-          <a:p>
-            <a:pPr algn="l">
-              <a:lnSpc>
-                <a:spcPct val="100000"/>
-              </a:lnSpc>
-            </a:pPr>
-            <a:r>
-              <a:rPr sz="2400" b="1">
-                <a:solidFill>
-                  <a:srgbClr val="14161C"/>
-                </a:solidFill>
-                <a:latin typeface="Calibri"/>
-              </a:rPr>
-              <a:t>Đội native (/team)</a:t>
-            </a:r>
-          </a:p>
-          <a:p>
-            <a:pPr algn="l">
-              <a:lnSpc>
-                <a:spcPct val="100000"/>
-              </a:lnSpc>
-              <a:spcBef>
-                <a:spcPts val="500"/>
-              </a:spcBef>
-            </a:pPr>
-            <a:r>
-              <a:rPr sz="2200" b="0">
-                <a:solidFill>
-                  <a:srgbClr val="14161C"/>
-                </a:solidFill>
-                <a:latin typeface="Calibri"/>
-              </a:rPr>
-              <a:t>Các agent Claude phối hợp trên một danh sách việc chung; cần bật cờ đội native trong settings.json (bước 4).</a:t>
-            </a:r>
-          </a:p>
-        </p:txBody>
-      </p:sp>
-      <p:sp>
-        <p:nvSpPr>
-          <p:cNvPr id="12" name="page"/>
-          <p:cNvSpPr txBox="1"/>
-          <p:nvPr/>
-        </p:nvSpPr>
-        <p:spPr>
-          <a:xfrm>
-            <a:off x="9474200" y="304800"/>
-            <a:ext cx="2032000" cy="279400"/>
-          </a:xfrm>
-          <a:prstGeom prst="rect">
-            <a:avLst/>
-          </a:prstGeom>
-          <a:noFill/>
-        </p:spPr>
-        <p:txBody>
-          <a:bodyPr wrap="square" lIns="0" rIns="0" tIns="0" bIns="0" anchor="t">
-            <a:noAutofit/>
-          </a:bodyPr>
-          <a:lstStyle/>
-          <a:p>
-            <a:pPr algn="r">
-              <a:lnSpc>
-                <a:spcPct val="100000"/>
-              </a:lnSpc>
-            </a:pPr>
-            <a:r>
-              <a:rPr sz="1600" b="1">
-                <a:solidFill>
-                  <a:srgbClr val="14161C"/>
-                </a:solidFill>
-                <a:latin typeface="Calibri"/>
-              </a:rPr>
-              <a:t>25/33</a:t>
-            </a:r>
-          </a:p>
-        </p:txBody>
-      </p:sp>
-      <p:sp>
-        <p:nvSpPr>
-          <p:cNvPr id="13" name="rail"/>
-          <p:cNvSpPr/>
-          <p:nvPr/>
-        </p:nvSpPr>
-        <p:spPr>
-          <a:xfrm>
-            <a:off x="685800" y="6451600"/>
-            <a:ext cx="10820400" cy="38100"/>
-          </a:xfrm>
-          <a:prstGeom prst="rect">
-            <a:avLst/>
-          </a:prstGeom>
-          <a:solidFill>
-            <a:srgbClr val="6B6A66"/>
-          </a:solidFill>
-          <a:ln>
-            <a:noFill/>
-          </a:ln>
-        </p:spPr>
-        <p:txBody>
-          <a:bodyPr rtlCol="0" anchor="ctr"/>
-          <a:lstStyle/>
-          <a:p>
-            <a:pPr algn="ctr"/>
-          </a:p>
-        </p:txBody>
-      </p:sp>
-      <p:sp>
-        <p:nvSpPr>
-          <p:cNvPr id="14" name="progress"/>
-          <p:cNvSpPr/>
-          <p:nvPr/>
-        </p:nvSpPr>
-        <p:spPr>
-          <a:xfrm>
-            <a:off x="685800" y="6426200"/>
-            <a:ext cx="8197272" cy="88900"/>
-          </a:xfrm>
-          <a:prstGeom prst="rect">
-            <a:avLst/>
-          </a:prstGeom>
-          <a:solidFill>
-            <a:srgbClr val="E8472B"/>
-          </a:solidFill>
-          <a:ln>
-            <a:noFill/>
-          </a:ln>
-        </p:spPr>
-        <p:txBody>
-          <a:bodyPr rtlCol="0" anchor="ctr"/>
-          <a:lstStyle/>
-          <a:p>
-            <a:pPr algn="ctr"/>
-          </a:p>
-        </p:txBody>
-      </p:sp>
-      <p:sp>
-        <p:nvSpPr>
-          <p:cNvPr id="15" name="footer"/>
+          <p:cNvPr id="20" name="footer"/>
           <p:cNvSpPr txBox="1"/>
           <p:nvPr/>
         </p:nvSpPr>
@@ -13115,7 +12774,7 @@
                 </a:solidFill>
                 <a:latin typeface="Cambria"/>
               </a:rPr>
-              <a:t>Các mảnh ghép (2/2)</a:t>
+              <a:t>Các mảnh ghép (1/2)</a:t>
             </a:r>
           </a:p>
         </p:txBody>
@@ -13153,7 +12812,7 @@
       </p:sp>
       <p:sp>
         <p:nvSpPr>
-          <p:cNvPr id="4" name="marker 4"/>
+          <p:cNvPr id="4" name="marker 1"/>
           <p:cNvSpPr/>
           <p:nvPr/>
         </p:nvSpPr>
@@ -13166,7 +12825,7 @@
             <a:avLst/>
           </a:prstGeom>
           <a:solidFill>
-            <a:srgbClr val="0F766E"/>
+            <a:srgbClr val="1F3FD1"/>
           </a:solidFill>
           <a:ln>
             <a:noFill/>
@@ -13184,7 +12843,7 @@
                 </a:solidFill>
                 <a:latin typeface="Calibri"/>
               </a:rPr>
-              <a:t>4</a:t>
+              <a:t>1</a:t>
             </a:r>
           </a:p>
         </p:txBody>
@@ -13223,7 +12882,7 @@
                 </a:solidFill>
                 <a:latin typeface="Calibri"/>
               </a:rPr>
-              <a:t>Worker tmux</a:t>
+              <a:t>Plugin trong Claude Code</a:t>
             </a:r>
           </a:p>
           <a:p>
@@ -13242,7 +12901,7 @@
                 </a:solidFill>
                 <a:latin typeface="Calibri"/>
               </a:rPr>
-              <a:t>Pane tmux chạy CLI thật (claude, codex, gemini, antigravity, grok, cursor-agent); sinh khi cần, tắt khi xong.</a:t>
+              <a:t>Đưa các skill /team, /autopilot, /ralph vào phiên Claude Code qua marketplace của plugin.</a:t>
             </a:r>
           </a:p>
         </p:txBody>
@@ -13256,11 +12915,11 @@
         <p:spPr>
           <a:xfrm>
             <a:off x="685800" y="2902204"/>
-            <a:ext cx="10820400" cy="1090676"/>
+            <a:ext cx="10820400" cy="1448308"/>
           </a:xfrm>
           <a:prstGeom prst="roundRect">
             <a:avLst>
-              <a:gd name="adj" fmla="val 18630"/>
+              <a:gd name="adj" fmla="val 14030"/>
             </a:avLst>
           </a:prstGeom>
           <a:solidFill>
@@ -13280,20 +12939,20 @@
       </p:sp>
       <p:sp>
         <p:nvSpPr>
-          <p:cNvPr id="7" name="marker 5"/>
-          <p:cNvSpPr/>
-          <p:nvPr/>
-        </p:nvSpPr>
-        <p:spPr>
-          <a:xfrm>
-            <a:off x="965200" y="3193541"/>
+          <p:cNvPr id="7" name="marker 2"/>
+          <p:cNvSpPr/>
+          <p:nvPr/>
+        </p:nvSpPr>
+        <p:spPr>
+          <a:xfrm>
+            <a:off x="965200" y="3372357"/>
             <a:ext cx="508000" cy="508000"/>
           </a:xfrm>
           <a:prstGeom prst="ellipse">
             <a:avLst/>
           </a:prstGeom>
           <a:solidFill>
-            <a:srgbClr val="1F3FD1"/>
+            <a:srgbClr val="0F766E"/>
           </a:solidFill>
           <a:ln>
             <a:noFill/>
@@ -13311,7 +12970,7 @@
                 </a:solidFill>
                 <a:latin typeface="Calibri"/>
               </a:rPr>
-              <a:t>5</a:t>
+              <a:t>2</a:t>
             </a:r>
           </a:p>
         </p:txBody>
@@ -13325,7 +12984,7 @@
         <p:spPr>
           <a:xfrm>
             <a:off x="1701800" y="3041904"/>
-            <a:ext cx="9525000" cy="811276"/>
+            <a:ext cx="9525000" cy="1168908"/>
           </a:xfrm>
           <a:prstGeom prst="rect">
             <a:avLst/>
@@ -13350,7 +13009,7 @@
                 </a:solidFill>
                 <a:latin typeface="Calibri"/>
               </a:rPr>
-              <a:t>Thư mục .omc/</a:t>
+              <a:t>Lệnh omc (gói npm)</a:t>
             </a:r>
           </a:p>
           <a:p>
@@ -13369,14 +13028,141 @@
                 </a:solidFill>
                 <a:latin typeface="Calibri"/>
               </a:rPr>
-              <a:t>Nơi OMC giữ trạng thái chạy, dữ liệu phiên, kế hoạch và log của dự án.</a:t>
-            </a:r>
-          </a:p>
-        </p:txBody>
-      </p:sp>
-      <p:sp>
-        <p:nvSpPr>
-          <p:cNvPr id="9" name="page"/>
+              <a:t>Lệnh terminal: omc setup, omc team, omc ask. Cài bằng gói npm oh-my-claude-sisyphus.</a:t>
+            </a:r>
+          </a:p>
+        </p:txBody>
+      </p:sp>
+      <p:sp>
+        <p:nvSpPr>
+          <p:cNvPr id="9" name="card"/>
+          <p:cNvSpPr/>
+          <p:nvPr/>
+        </p:nvSpPr>
+        <p:spPr>
+          <a:xfrm>
+            <a:off x="685800" y="4477511"/>
+            <a:ext cx="10820400" cy="1448308"/>
+          </a:xfrm>
+          <a:prstGeom prst="roundRect">
+            <a:avLst>
+              <a:gd name="adj" fmla="val 14030"/>
+            </a:avLst>
+          </a:prstGeom>
+          <a:solidFill>
+            <a:srgbClr val="E8E0CF"/>
+          </a:solidFill>
+          <a:ln>
+            <a:noFill/>
+          </a:ln>
+        </p:spPr>
+        <p:txBody>
+          <a:bodyPr rtlCol="0" anchor="ctr"/>
+          <a:lstStyle/>
+          <a:p>
+            <a:pPr algn="ctr"/>
+          </a:p>
+        </p:txBody>
+      </p:sp>
+      <p:sp>
+        <p:nvSpPr>
+          <p:cNvPr id="10" name="marker 3"/>
+          <p:cNvSpPr/>
+          <p:nvPr/>
+        </p:nvSpPr>
+        <p:spPr>
+          <a:xfrm>
+            <a:off x="965200" y="4947665"/>
+            <a:ext cx="508000" cy="508000"/>
+          </a:xfrm>
+          <a:prstGeom prst="ellipse">
+            <a:avLst/>
+          </a:prstGeom>
+          <a:solidFill>
+            <a:srgbClr val="1F3FD1"/>
+          </a:solidFill>
+          <a:ln>
+            <a:noFill/>
+          </a:ln>
+        </p:spPr>
+        <p:txBody>
+          <a:bodyPr rtlCol="0" anchor="ctr" lIns="0" rIns="0" tIns="0" bIns="0"/>
+          <a:lstStyle/>
+          <a:p>
+            <a:pPr algn="ctr"/>
+            <a:r>
+              <a:rPr sz="2000" b="1">
+                <a:solidFill>
+                  <a:srgbClr val="FFFFFF"/>
+                </a:solidFill>
+                <a:latin typeface="Calibri"/>
+              </a:rPr>
+              <a:t>3</a:t>
+            </a:r>
+          </a:p>
+        </p:txBody>
+      </p:sp>
+      <p:sp>
+        <p:nvSpPr>
+          <p:cNvPr id="11" name="card text"/>
+          <p:cNvSpPr txBox="1"/>
+          <p:nvPr/>
+        </p:nvSpPr>
+        <p:spPr>
+          <a:xfrm>
+            <a:off x="1701800" y="4617211"/>
+            <a:ext cx="9525000" cy="1168908"/>
+          </a:xfrm>
+          <a:prstGeom prst="rect">
+            <a:avLst/>
+          </a:prstGeom>
+          <a:noFill/>
+        </p:spPr>
+        <p:txBody>
+          <a:bodyPr wrap="square" lIns="0" rIns="0" tIns="0" bIns="0" anchor="ctr">
+            <a:noAutofit/>
+          </a:bodyPr>
+          <a:lstStyle/>
+          <a:p>
+            <a:pPr algn="l">
+              <a:lnSpc>
+                <a:spcPct val="100000"/>
+              </a:lnSpc>
+            </a:pPr>
+            <a:r>
+              <a:rPr sz="2400" b="1">
+                <a:solidFill>
+                  <a:srgbClr val="14161C"/>
+                </a:solidFill>
+                <a:latin typeface="Calibri"/>
+              </a:rPr>
+              <a:t>Đội native (/team)</a:t>
+            </a:r>
+          </a:p>
+          <a:p>
+            <a:pPr algn="l">
+              <a:lnSpc>
+                <a:spcPct val="100000"/>
+              </a:lnSpc>
+              <a:spcBef>
+                <a:spcPts val="500"/>
+              </a:spcBef>
+            </a:pPr>
+            <a:r>
+              <a:rPr sz="2200" b="0">
+                <a:solidFill>
+                  <a:srgbClr val="14161C"/>
+                </a:solidFill>
+                <a:latin typeface="Calibri"/>
+              </a:rPr>
+              <a:t>Các agent Claude phối hợp trên một danh sách việc chung; cần bật cờ đội native trong settings.json (bước 4).</a:t>
+            </a:r>
+          </a:p>
+        </p:txBody>
+      </p:sp>
+      <p:sp>
+        <p:nvSpPr>
+          <p:cNvPr id="12" name="page"/>
           <p:cNvSpPr txBox="1"/>
           <p:nvPr/>
         </p:nvSpPr>
@@ -13408,14 +13194,14 @@
                 </a:solidFill>
                 <a:latin typeface="Calibri"/>
               </a:rPr>
-              <a:t>26/33</a:t>
-            </a:r>
-          </a:p>
-        </p:txBody>
-      </p:sp>
-      <p:sp>
-        <p:nvSpPr>
-          <p:cNvPr id="10" name="rail"/>
+              <a:t>26/34</a:t>
+            </a:r>
+          </a:p>
+        </p:txBody>
+      </p:sp>
+      <p:sp>
+        <p:nvSpPr>
+          <p:cNvPr id="13" name="rail"/>
           <p:cNvSpPr/>
           <p:nvPr/>
         </p:nvSpPr>
@@ -13444,14 +13230,14 @@
       </p:sp>
       <p:sp>
         <p:nvSpPr>
-          <p:cNvPr id="11" name="progress"/>
+          <p:cNvPr id="14" name="progress"/>
           <p:cNvSpPr/>
           <p:nvPr/>
         </p:nvSpPr>
         <p:spPr>
           <a:xfrm>
             <a:off x="685800" y="6426200"/>
-            <a:ext cx="8525163" cy="88900"/>
+            <a:ext cx="8274423" cy="88900"/>
           </a:xfrm>
           <a:prstGeom prst="rect">
             <a:avLst/>
@@ -13473,7 +13259,7 @@
       </p:sp>
       <p:sp>
         <p:nvSpPr>
-          <p:cNvPr id="12" name="footer"/>
+          <p:cNvPr id="15" name="footer"/>
           <p:cNvSpPr txBox="1"/>
           <p:nvPr/>
         </p:nvSpPr>
@@ -13524,7 +13310,7 @@
     <p:bg>
       <p:bgPr>
         <a:solidFill>
-          <a:srgbClr val="12141B"/>
+          <a:srgbClr val="F3EEE3"/>
         </a:solidFill>
         <a:effectLst/>
       </p:bgPr>
@@ -13566,11 +13352,11 @@
             <a:r>
               <a:rPr sz="3600" b="1">
                 <a:solidFill>
-                  <a:srgbClr val="F3EEE3"/>
+                  <a:srgbClr val="14161C"/>
                 </a:solidFill>
                 <a:latin typeface="Cambria"/>
               </a:rPr>
-              <a:t>Nó chạy như thế nào (1/2)</a:t>
+              <a:t>Các mảnh ghép (2/2)</a:t>
             </a:r>
           </a:p>
         </p:txBody>
@@ -13592,7 +13378,7 @@
             </a:avLst>
           </a:prstGeom>
           <a:solidFill>
-            <a:srgbClr val="1E2230"/>
+            <a:srgbClr val="E8E0CF"/>
           </a:solidFill>
           <a:ln>
             <a:noFill/>
@@ -13608,7 +13394,7 @@
       </p:sp>
       <p:sp>
         <p:nvSpPr>
-          <p:cNvPr id="4" name="marker 1"/>
+          <p:cNvPr id="4" name="marker 4"/>
           <p:cNvSpPr/>
           <p:nvPr/>
         </p:nvSpPr>
@@ -13621,7 +13407,7 @@
             <a:avLst/>
           </a:prstGeom>
           <a:solidFill>
-            <a:srgbClr val="7C93FF"/>
+            <a:srgbClr val="0F766E"/>
           </a:solidFill>
           <a:ln>
             <a:noFill/>
@@ -13635,11 +13421,11 @@
             <a:r>
               <a:rPr sz="2000" b="1">
                 <a:solidFill>
-                  <a:srgbClr val="12141B"/>
-                </a:solidFill>
-                <a:latin typeface="Calibri"/>
-              </a:rPr>
-              <a:t>1</a:t>
+                  <a:srgbClr val="FFFFFF"/>
+                </a:solidFill>
+                <a:latin typeface="Calibri"/>
+              </a:rPr>
+              <a:t>4</a:t>
             </a:r>
           </a:p>
         </p:txBody>
@@ -13674,11 +13460,11 @@
             <a:r>
               <a:rPr sz="2400" b="1">
                 <a:solidFill>
-                  <a:srgbClr val="F3EEE3"/>
-                </a:solidFill>
-                <a:latin typeface="Calibri"/>
-              </a:rPr>
-              <a:t>Hai lối vào, hai runtime</a:t>
+                  <a:srgbClr val="14161C"/>
+                </a:solidFill>
+                <a:latin typeface="Calibri"/>
+              </a:rPr>
+              <a:t>Worker tmux</a:t>
             </a:r>
           </a:p>
           <a:p>
@@ -13693,11 +13479,11 @@
             <a:r>
               <a:rPr sz="2200" b="0">
                 <a:solidFill>
-                  <a:srgbClr val="F3EEE3"/>
-                </a:solidFill>
-                <a:latin typeface="Calibri"/>
-              </a:rPr>
-              <a:t>Lệnh /team trong phiên Claude Code chạy đội native; omc team ở terminal mở worker CLI thật trong tmux. README nói rõ đây là hai runtime khác nhau.</a:t>
+                  <a:srgbClr val="14161C"/>
+                </a:solidFill>
+                <a:latin typeface="Calibri"/>
+              </a:rPr>
+              <a:t>Pane tmux chạy CLI thật (claude, codex, gemini, antigravity, grok, cursor-agent); sinh khi cần, tắt khi xong.</a:t>
             </a:r>
           </a:p>
         </p:txBody>
@@ -13711,15 +13497,15 @@
         <p:spPr>
           <a:xfrm>
             <a:off x="685800" y="2902204"/>
-            <a:ext cx="10820400" cy="1448308"/>
+            <a:ext cx="10820400" cy="1090676"/>
           </a:xfrm>
           <a:prstGeom prst="roundRect">
             <a:avLst>
-              <a:gd name="adj" fmla="val 14030"/>
+              <a:gd name="adj" fmla="val 18630"/>
             </a:avLst>
           </a:prstGeom>
           <a:solidFill>
-            <a:srgbClr val="1E2230"/>
+            <a:srgbClr val="E8E0CF"/>
           </a:solidFill>
           <a:ln>
             <a:noFill/>
@@ -13735,20 +13521,20 @@
       </p:sp>
       <p:sp>
         <p:nvSpPr>
-          <p:cNvPr id="7" name="marker 2"/>
-          <p:cNvSpPr/>
-          <p:nvPr/>
-        </p:nvSpPr>
-        <p:spPr>
-          <a:xfrm>
-            <a:off x="965200" y="3372357"/>
+          <p:cNvPr id="7" name="marker 5"/>
+          <p:cNvSpPr/>
+          <p:nvPr/>
+        </p:nvSpPr>
+        <p:spPr>
+          <a:xfrm>
+            <a:off x="965200" y="3193541"/>
             <a:ext cx="508000" cy="508000"/>
           </a:xfrm>
           <a:prstGeom prst="ellipse">
             <a:avLst/>
           </a:prstGeom>
           <a:solidFill>
-            <a:srgbClr val="3DD6A0"/>
+            <a:srgbClr val="1F3FD1"/>
           </a:solidFill>
           <a:ln>
             <a:noFill/>
@@ -13762,11 +13548,11 @@
             <a:r>
               <a:rPr sz="2000" b="1">
                 <a:solidFill>
-                  <a:srgbClr val="12141B"/>
-                </a:solidFill>
-                <a:latin typeface="Calibri"/>
-              </a:rPr>
-              <a:t>2</a:t>
+                  <a:srgbClr val="FFFFFF"/>
+                </a:solidFill>
+                <a:latin typeface="Calibri"/>
+              </a:rPr>
+              <a:t>5</a:t>
             </a:r>
           </a:p>
         </p:txBody>
@@ -13780,7 +13566,7 @@
         <p:spPr>
           <a:xfrm>
             <a:off x="1701800" y="3041904"/>
-            <a:ext cx="9525000" cy="1168908"/>
+            <a:ext cx="9525000" cy="811276"/>
           </a:xfrm>
           <a:prstGeom prst="rect">
             <a:avLst/>
@@ -13801,11 +13587,11 @@
             <a:r>
               <a:rPr sz="2400" b="1">
                 <a:solidFill>
-                  <a:srgbClr val="F3EEE3"/>
-                </a:solidFill>
-                <a:latin typeface="Calibri"/>
-              </a:rPr>
-              <a:t>Chuỗi giai đoạn có vòng sửa</a:t>
+                  <a:srgbClr val="14161C"/>
+                </a:solidFill>
+                <a:latin typeface="Calibri"/>
+              </a:rPr>
+              <a:t>Thư mục .omc/</a:t>
             </a:r>
           </a:p>
           <a:p>
@@ -13820,33 +13606,70 @@
             <a:r>
               <a:rPr sz="2200" b="0">
                 <a:solidFill>
-                  <a:srgbClr val="F3EEE3"/>
-                </a:solidFill>
-                <a:latin typeface="Calibri"/>
-              </a:rPr>
-              <a:t>Team chạy team-plan → team-prd → team-exec → team-verify → team-fix (loop): kiểm tra là một giai đoạn riêng, và lỗi được sửa lặp lại.</a:t>
-            </a:r>
-          </a:p>
-        </p:txBody>
-      </p:sp>
-      <p:sp>
-        <p:nvSpPr>
-          <p:cNvPr id="9" name="card"/>
-          <p:cNvSpPr/>
-          <p:nvPr/>
-        </p:nvSpPr>
-        <p:spPr>
-          <a:xfrm>
-            <a:off x="685800" y="4477511"/>
-            <a:ext cx="10820400" cy="1448308"/>
-          </a:xfrm>
-          <a:prstGeom prst="roundRect">
-            <a:avLst>
-              <a:gd name="adj" fmla="val 14030"/>
-            </a:avLst>
-          </a:prstGeom>
-          <a:solidFill>
-            <a:srgbClr val="1E2230"/>
+                  <a:srgbClr val="14161C"/>
+                </a:solidFill>
+                <a:latin typeface="Calibri"/>
+              </a:rPr>
+              <a:t>Nơi OMC giữ trạng thái chạy, dữ liệu phiên, kế hoạch và log của dự án.</a:t>
+            </a:r>
+          </a:p>
+        </p:txBody>
+      </p:sp>
+      <p:sp>
+        <p:nvSpPr>
+          <p:cNvPr id="9" name="page"/>
+          <p:cNvSpPr txBox="1"/>
+          <p:nvPr/>
+        </p:nvSpPr>
+        <p:spPr>
+          <a:xfrm>
+            <a:off x="9474200" y="304800"/>
+            <a:ext cx="2032000" cy="279400"/>
+          </a:xfrm>
+          <a:prstGeom prst="rect">
+            <a:avLst/>
+          </a:prstGeom>
+          <a:noFill/>
+        </p:spPr>
+        <p:txBody>
+          <a:bodyPr wrap="square" lIns="0" rIns="0" tIns="0" bIns="0" anchor="t">
+            <a:noAutofit/>
+          </a:bodyPr>
+          <a:lstStyle/>
+          <a:p>
+            <a:pPr algn="r">
+              <a:lnSpc>
+                <a:spcPct val="100000"/>
+              </a:lnSpc>
+            </a:pPr>
+            <a:r>
+              <a:rPr sz="1600" b="1">
+                <a:solidFill>
+                  <a:srgbClr val="14161C"/>
+                </a:solidFill>
+                <a:latin typeface="Calibri"/>
+              </a:rPr>
+              <a:t>27/34</a:t>
+            </a:r>
+          </a:p>
+        </p:txBody>
+      </p:sp>
+      <p:sp>
+        <p:nvSpPr>
+          <p:cNvPr id="10" name="rail"/>
+          <p:cNvSpPr/>
+          <p:nvPr/>
+        </p:nvSpPr>
+        <p:spPr>
+          <a:xfrm>
+            <a:off x="685800" y="6451600"/>
+            <a:ext cx="10820400" cy="38100"/>
+          </a:xfrm>
+          <a:prstGeom prst="rect">
+            <a:avLst/>
+          </a:prstGeom>
+          <a:solidFill>
+            <a:srgbClr val="6B6A66"/>
           </a:solidFill>
           <a:ln>
             <a:noFill/>
@@ -13862,161 +13685,26 @@
       </p:sp>
       <p:sp>
         <p:nvSpPr>
-          <p:cNvPr id="10" name="marker 3"/>
-          <p:cNvSpPr/>
-          <p:nvPr/>
-        </p:nvSpPr>
-        <p:spPr>
-          <a:xfrm>
-            <a:off x="965200" y="4947665"/>
-            <a:ext cx="508000" cy="508000"/>
-          </a:xfrm>
-          <a:prstGeom prst="ellipse">
-            <a:avLst/>
-          </a:prstGeom>
-          <a:solidFill>
-            <a:srgbClr val="FFB454"/>
+          <p:cNvPr id="11" name="progress"/>
+          <p:cNvSpPr/>
+          <p:nvPr/>
+        </p:nvSpPr>
+        <p:spPr>
+          <a:xfrm>
+            <a:off x="685800" y="6426200"/>
+            <a:ext cx="8592670" cy="88900"/>
+          </a:xfrm>
+          <a:prstGeom prst="rect">
+            <a:avLst/>
+          </a:prstGeom>
+          <a:solidFill>
+            <a:srgbClr val="E8472B"/>
           </a:solidFill>
           <a:ln>
             <a:noFill/>
           </a:ln>
         </p:spPr>
         <p:txBody>
-          <a:bodyPr rtlCol="0" anchor="ctr" lIns="0" rIns="0" tIns="0" bIns="0"/>
-          <a:lstStyle/>
-          <a:p>
-            <a:pPr algn="ctr"/>
-            <a:r>
-              <a:rPr sz="2000" b="1">
-                <a:solidFill>
-                  <a:srgbClr val="12141B"/>
-                </a:solidFill>
-                <a:latin typeface="Calibri"/>
-              </a:rPr>
-              <a:t>3</a:t>
-            </a:r>
-          </a:p>
-        </p:txBody>
-      </p:sp>
-      <p:sp>
-        <p:nvSpPr>
-          <p:cNvPr id="11" name="card text"/>
-          <p:cNvSpPr txBox="1"/>
-          <p:nvPr/>
-        </p:nvSpPr>
-        <p:spPr>
-          <a:xfrm>
-            <a:off x="1701800" y="4617211"/>
-            <a:ext cx="9525000" cy="1168908"/>
-          </a:xfrm>
-          <a:prstGeom prst="rect">
-            <a:avLst/>
-          </a:prstGeom>
-          <a:noFill/>
-        </p:spPr>
-        <p:txBody>
-          <a:bodyPr wrap="square" lIns="0" rIns="0" tIns="0" bIns="0" anchor="ctr">
-            <a:noAutofit/>
-          </a:bodyPr>
-          <a:lstStyle/>
-          <a:p>
-            <a:pPr algn="l">
-              <a:lnSpc>
-                <a:spcPct val="100000"/>
-              </a:lnSpc>
-            </a:pPr>
-            <a:r>
-              <a:rPr sz="2400" b="1">
-                <a:solidFill>
-                  <a:srgbClr val="F3EEE3"/>
-                </a:solidFill>
-                <a:latin typeface="Calibri"/>
-              </a:rPr>
-              <a:t>Worker sinh khi cần, tắt khi xong</a:t>
-            </a:r>
-          </a:p>
-          <a:p>
-            <a:pPr algn="l">
-              <a:lnSpc>
-                <a:spcPct val="100000"/>
-              </a:lnSpc>
-              <a:spcBef>
-                <a:spcPts val="500"/>
-              </a:spcBef>
-            </a:pPr>
-            <a:r>
-              <a:rPr sz="2200" b="0">
-                <a:solidFill>
-                  <a:srgbClr val="F3EEE3"/>
-                </a:solidFill>
-                <a:latin typeface="Calibri"/>
-              </a:rPr>
-              <a:t>Worker của omc team được sinh theo yêu cầu và chết khi xong việc, nên README nói không tốn tài nguyên lúc nhàn rỗi.</a:t>
-            </a:r>
-          </a:p>
-        </p:txBody>
-      </p:sp>
-      <p:sp>
-        <p:nvSpPr>
-          <p:cNvPr id="12" name="page"/>
-          <p:cNvSpPr txBox="1"/>
-          <p:nvPr/>
-        </p:nvSpPr>
-        <p:spPr>
-          <a:xfrm>
-            <a:off x="9474200" y="304800"/>
-            <a:ext cx="2032000" cy="279400"/>
-          </a:xfrm>
-          <a:prstGeom prst="rect">
-            <a:avLst/>
-          </a:prstGeom>
-          <a:noFill/>
-        </p:spPr>
-        <p:txBody>
-          <a:bodyPr wrap="square" lIns="0" rIns="0" tIns="0" bIns="0" anchor="t">
-            <a:noAutofit/>
-          </a:bodyPr>
-          <a:lstStyle/>
-          <a:p>
-            <a:pPr algn="r">
-              <a:lnSpc>
-                <a:spcPct val="100000"/>
-              </a:lnSpc>
-            </a:pPr>
-            <a:r>
-              <a:rPr sz="1600" b="1">
-                <a:solidFill>
-                  <a:srgbClr val="F3EEE3"/>
-                </a:solidFill>
-                <a:latin typeface="Calibri"/>
-              </a:rPr>
-              <a:t>27/33</a:t>
-            </a:r>
-          </a:p>
-        </p:txBody>
-      </p:sp>
-      <p:sp>
-        <p:nvSpPr>
-          <p:cNvPr id="13" name="rail"/>
-          <p:cNvSpPr/>
-          <p:nvPr/>
-        </p:nvSpPr>
-        <p:spPr>
-          <a:xfrm>
-            <a:off x="685800" y="6451600"/>
-            <a:ext cx="10820400" cy="38100"/>
-          </a:xfrm>
-          <a:prstGeom prst="rect">
-            <a:avLst/>
-          </a:prstGeom>
-          <a:solidFill>
-            <a:srgbClr val="9AA0B5"/>
-          </a:solidFill>
-          <a:ln>
-            <a:noFill/>
-          </a:ln>
-        </p:spPr>
-        <p:txBody>
           <a:bodyPr rtlCol="0" anchor="ctr"/>
           <a:lstStyle/>
           <a:p>
@@ -14026,36 +13714,7 @@
       </p:sp>
       <p:sp>
         <p:nvSpPr>
-          <p:cNvPr id="14" name="progress"/>
-          <p:cNvSpPr/>
-          <p:nvPr/>
-        </p:nvSpPr>
-        <p:spPr>
-          <a:xfrm>
-            <a:off x="685800" y="6426200"/>
-            <a:ext cx="8853054" cy="88900"/>
-          </a:xfrm>
-          <a:prstGeom prst="rect">
-            <a:avLst/>
-          </a:prstGeom>
-          <a:solidFill>
-            <a:srgbClr val="FF6A4D"/>
-          </a:solidFill>
-          <a:ln>
-            <a:noFill/>
-          </a:ln>
-        </p:spPr>
-        <p:txBody>
-          <a:bodyPr rtlCol="0" anchor="ctr"/>
-          <a:lstStyle/>
-          <a:p>
-            <a:pPr algn="ctr"/>
-          </a:p>
-        </p:txBody>
-      </p:sp>
-      <p:sp>
-        <p:nvSpPr>
-          <p:cNvPr id="15" name="footer"/>
+          <p:cNvPr id="12" name="footer"/>
           <p:cNvSpPr txBox="1"/>
           <p:nvPr/>
         </p:nvSpPr>
@@ -14083,7 +13742,7 @@
             <a:r>
               <a:rPr sz="1200" b="0">
                 <a:solidFill>
-                  <a:srgbClr val="9AA0B5"/>
+                  <a:srgbClr val="6B6A66"/>
                 </a:solidFill>
                 <a:latin typeface="Calibri"/>
               </a:rPr>
@@ -14152,7 +13811,7 @@
                 </a:solidFill>
                 <a:latin typeface="Cambria"/>
               </a:rPr>
-              <a:t>Nó chạy như thế nào (2/2)</a:t>
+              <a:t>Nó chạy như thế nào (1/2)</a:t>
             </a:r>
           </a:p>
         </p:txBody>
@@ -14166,11 +13825,11 @@
         <p:spPr>
           <a:xfrm>
             <a:off x="685800" y="1326895"/>
-            <a:ext cx="10820400" cy="1805939"/>
+            <a:ext cx="10820400" cy="1448308"/>
           </a:xfrm>
           <a:prstGeom prst="roundRect">
             <a:avLst>
-              <a:gd name="adj" fmla="val 11251"/>
+              <a:gd name="adj" fmla="val 14030"/>
             </a:avLst>
           </a:prstGeom>
           <a:solidFill>
@@ -14190,20 +13849,20 @@
       </p:sp>
       <p:sp>
         <p:nvSpPr>
-          <p:cNvPr id="4" name="marker 4"/>
-          <p:cNvSpPr/>
-          <p:nvPr/>
-        </p:nvSpPr>
-        <p:spPr>
-          <a:xfrm>
-            <a:off x="965200" y="1975865"/>
+          <p:cNvPr id="4" name="marker 1"/>
+          <p:cNvSpPr/>
+          <p:nvPr/>
+        </p:nvSpPr>
+        <p:spPr>
+          <a:xfrm>
+            <a:off x="965200" y="1797050"/>
             <a:ext cx="508000" cy="508000"/>
           </a:xfrm>
           <a:prstGeom prst="ellipse">
             <a:avLst/>
           </a:prstGeom>
           <a:solidFill>
-            <a:srgbClr val="C58BFF"/>
+            <a:srgbClr val="7C93FF"/>
           </a:solidFill>
           <a:ln>
             <a:noFill/>
@@ -14221,7 +13880,7 @@
                 </a:solidFill>
                 <a:latin typeface="Calibri"/>
               </a:rPr>
-              <a:t>4</a:t>
+              <a:t>1</a:t>
             </a:r>
           </a:p>
         </p:txBody>
@@ -14235,7 +13894,7 @@
         <p:spPr>
           <a:xfrm>
             <a:off x="1701800" y="1466595"/>
-            <a:ext cx="9525000" cy="1526539"/>
+            <a:ext cx="9525000" cy="1168908"/>
           </a:xfrm>
           <a:prstGeom prst="rect">
             <a:avLst/>
@@ -14260,7 +13919,7 @@
                 </a:solidFill>
                 <a:latin typeface="Calibri"/>
               </a:rPr>
-              <a:t>Mỗi phiên một người cầm vòng lặp</a:t>
+              <a:t>Hai lối vào, hai runtime</a:t>
             </a:r>
           </a:p>
           <a:p>
@@ -14279,7 +13938,7 @@
                 </a:solidFill>
                 <a:latin typeface="Calibri"/>
               </a:rPr>
-              <a:t>README dặn dùng một quyền điều khiển vòng lặp chính mỗi phiên: Team cho việc song song theo giai đoạn, Execute cho một agent làm tới nơi, Verify cho vòng kiểm tra lặp.</a:t>
+              <a:t>Lệnh /team trong phiên Claude Code chạy đội native; omc team ở terminal mở worker CLI thật trong tmux. README nói rõ đây là hai runtime khác nhau.</a:t>
             </a:r>
           </a:p>
         </p:txBody>
@@ -14292,12 +13951,12 @@
         </p:nvSpPr>
         <p:spPr>
           <a:xfrm>
-            <a:off x="685800" y="3259835"/>
-            <a:ext cx="10820400" cy="1805939"/>
+            <a:off x="685800" y="2902204"/>
+            <a:ext cx="10820400" cy="1448308"/>
           </a:xfrm>
           <a:prstGeom prst="roundRect">
             <a:avLst>
-              <a:gd name="adj" fmla="val 11251"/>
+              <a:gd name="adj" fmla="val 14030"/>
             </a:avLst>
           </a:prstGeom>
           <a:solidFill>
@@ -14317,20 +13976,20 @@
       </p:sp>
       <p:sp>
         <p:nvSpPr>
-          <p:cNvPr id="7" name="marker 5"/>
-          <p:cNvSpPr/>
-          <p:nvPr/>
-        </p:nvSpPr>
-        <p:spPr>
-          <a:xfrm>
-            <a:off x="965200" y="3908805"/>
+          <p:cNvPr id="7" name="marker 2"/>
+          <p:cNvSpPr/>
+          <p:nvPr/>
+        </p:nvSpPr>
+        <p:spPr>
+          <a:xfrm>
+            <a:off x="965200" y="3372357"/>
             <a:ext cx="508000" cy="508000"/>
           </a:xfrm>
           <a:prstGeom prst="ellipse">
             <a:avLst/>
           </a:prstGeom>
           <a:solidFill>
-            <a:srgbClr val="FF6A4D"/>
+            <a:srgbClr val="3DD6A0"/>
           </a:solidFill>
           <a:ln>
             <a:noFill/>
@@ -14348,7 +14007,7 @@
                 </a:solidFill>
                 <a:latin typeface="Calibri"/>
               </a:rPr>
-              <a:t>5</a:t>
+              <a:t>2</a:t>
             </a:r>
           </a:p>
         </p:txBody>
@@ -14361,8 +14020,8 @@
         </p:nvSpPr>
         <p:spPr>
           <a:xfrm>
-            <a:off x="1701800" y="3399535"/>
-            <a:ext cx="9525000" cy="1526539"/>
+            <a:off x="1701800" y="3041904"/>
+            <a:ext cx="9525000" cy="1168908"/>
           </a:xfrm>
           <a:prstGeom prst="rect">
             <a:avLst/>
@@ -14387,7 +14046,7 @@
                 </a:solidFill>
                 <a:latin typeface="Calibri"/>
               </a:rPr>
-              <a:t>Trạng thái nằm trong .omc/</a:t>
+              <a:t>Chuỗi giai đoạn có vòng sửa</a:t>
             </a:r>
           </a:p>
           <a:p>
@@ -14406,14 +14065,141 @@
                 </a:solidFill>
                 <a:latin typeface="Calibri"/>
               </a:rPr>
-              <a:t>OMC ghi trạng thái, phiên, kế hoạch vào thư mục .omc/. Trong worktree liên kết, thư mục này nằm trong worktree nên xóa worktree là mất; đặt OMC_STATE_DIR để giữ.</a:t>
-            </a:r>
-          </a:p>
-        </p:txBody>
-      </p:sp>
-      <p:sp>
-        <p:nvSpPr>
-          <p:cNvPr id="9" name="page"/>
+              <a:t>Team chạy team-plan → team-prd → team-exec → team-verify → team-fix (loop): kiểm tra là một giai đoạn riêng, và lỗi được sửa lặp lại.</a:t>
+            </a:r>
+          </a:p>
+        </p:txBody>
+      </p:sp>
+      <p:sp>
+        <p:nvSpPr>
+          <p:cNvPr id="9" name="card"/>
+          <p:cNvSpPr/>
+          <p:nvPr/>
+        </p:nvSpPr>
+        <p:spPr>
+          <a:xfrm>
+            <a:off x="685800" y="4477511"/>
+            <a:ext cx="10820400" cy="1448308"/>
+          </a:xfrm>
+          <a:prstGeom prst="roundRect">
+            <a:avLst>
+              <a:gd name="adj" fmla="val 14030"/>
+            </a:avLst>
+          </a:prstGeom>
+          <a:solidFill>
+            <a:srgbClr val="1E2230"/>
+          </a:solidFill>
+          <a:ln>
+            <a:noFill/>
+          </a:ln>
+        </p:spPr>
+        <p:txBody>
+          <a:bodyPr rtlCol="0" anchor="ctr"/>
+          <a:lstStyle/>
+          <a:p>
+            <a:pPr algn="ctr"/>
+          </a:p>
+        </p:txBody>
+      </p:sp>
+      <p:sp>
+        <p:nvSpPr>
+          <p:cNvPr id="10" name="marker 3"/>
+          <p:cNvSpPr/>
+          <p:nvPr/>
+        </p:nvSpPr>
+        <p:spPr>
+          <a:xfrm>
+            <a:off x="965200" y="4947665"/>
+            <a:ext cx="508000" cy="508000"/>
+          </a:xfrm>
+          <a:prstGeom prst="ellipse">
+            <a:avLst/>
+          </a:prstGeom>
+          <a:solidFill>
+            <a:srgbClr val="FFB454"/>
+          </a:solidFill>
+          <a:ln>
+            <a:noFill/>
+          </a:ln>
+        </p:spPr>
+        <p:txBody>
+          <a:bodyPr rtlCol="0" anchor="ctr" lIns="0" rIns="0" tIns="0" bIns="0"/>
+          <a:lstStyle/>
+          <a:p>
+            <a:pPr algn="ctr"/>
+            <a:r>
+              <a:rPr sz="2000" b="1">
+                <a:solidFill>
+                  <a:srgbClr val="12141B"/>
+                </a:solidFill>
+                <a:latin typeface="Calibri"/>
+              </a:rPr>
+              <a:t>3</a:t>
+            </a:r>
+          </a:p>
+        </p:txBody>
+      </p:sp>
+      <p:sp>
+        <p:nvSpPr>
+          <p:cNvPr id="11" name="card text"/>
+          <p:cNvSpPr txBox="1"/>
+          <p:nvPr/>
+        </p:nvSpPr>
+        <p:spPr>
+          <a:xfrm>
+            <a:off x="1701800" y="4617211"/>
+            <a:ext cx="9525000" cy="1168908"/>
+          </a:xfrm>
+          <a:prstGeom prst="rect">
+            <a:avLst/>
+          </a:prstGeom>
+          <a:noFill/>
+        </p:spPr>
+        <p:txBody>
+          <a:bodyPr wrap="square" lIns="0" rIns="0" tIns="0" bIns="0" anchor="ctr">
+            <a:noAutofit/>
+          </a:bodyPr>
+          <a:lstStyle/>
+          <a:p>
+            <a:pPr algn="l">
+              <a:lnSpc>
+                <a:spcPct val="100000"/>
+              </a:lnSpc>
+            </a:pPr>
+            <a:r>
+              <a:rPr sz="2400" b="1">
+                <a:solidFill>
+                  <a:srgbClr val="F3EEE3"/>
+                </a:solidFill>
+                <a:latin typeface="Calibri"/>
+              </a:rPr>
+              <a:t>Worker sinh khi cần, tắt khi xong</a:t>
+            </a:r>
+          </a:p>
+          <a:p>
+            <a:pPr algn="l">
+              <a:lnSpc>
+                <a:spcPct val="100000"/>
+              </a:lnSpc>
+              <a:spcBef>
+                <a:spcPts val="500"/>
+              </a:spcBef>
+            </a:pPr>
+            <a:r>
+              <a:rPr sz="2200" b="0">
+                <a:solidFill>
+                  <a:srgbClr val="F3EEE3"/>
+                </a:solidFill>
+                <a:latin typeface="Calibri"/>
+              </a:rPr>
+              <a:t>Worker của omc team được sinh theo yêu cầu và chết khi xong việc, nên README nói không tốn tài nguyên lúc nhàn rỗi.</a:t>
+            </a:r>
+          </a:p>
+        </p:txBody>
+      </p:sp>
+      <p:sp>
+        <p:nvSpPr>
+          <p:cNvPr id="12" name="page"/>
           <p:cNvSpPr txBox="1"/>
           <p:nvPr/>
         </p:nvSpPr>
@@ -14445,14 +14231,14 @@
                 </a:solidFill>
                 <a:latin typeface="Calibri"/>
               </a:rPr>
-              <a:t>28/33</a:t>
-            </a:r>
-          </a:p>
-        </p:txBody>
-      </p:sp>
-      <p:sp>
-        <p:nvSpPr>
-          <p:cNvPr id="10" name="rail"/>
+              <a:t>28/34</a:t>
+            </a:r>
+          </a:p>
+        </p:txBody>
+      </p:sp>
+      <p:sp>
+        <p:nvSpPr>
+          <p:cNvPr id="13" name="rail"/>
           <p:cNvSpPr/>
           <p:nvPr/>
         </p:nvSpPr>
@@ -14481,14 +14267,14 @@
       </p:sp>
       <p:sp>
         <p:nvSpPr>
-          <p:cNvPr id="11" name="progress"/>
+          <p:cNvPr id="14" name="progress"/>
           <p:cNvSpPr/>
           <p:nvPr/>
         </p:nvSpPr>
         <p:spPr>
           <a:xfrm>
             <a:off x="685800" y="6426200"/>
-            <a:ext cx="9180945" cy="88900"/>
+            <a:ext cx="8910917" cy="88900"/>
           </a:xfrm>
           <a:prstGeom prst="rect">
             <a:avLst/>
@@ -14510,7 +14296,7 @@
       </p:sp>
       <p:sp>
         <p:nvSpPr>
-          <p:cNvPr id="12" name="footer"/>
+          <p:cNvPr id="15" name="footer"/>
           <p:cNvSpPr txBox="1"/>
           <p:nvPr/>
         </p:nvSpPr>
@@ -14561,7 +14347,7 @@
     <p:bg>
       <p:bgPr>
         <a:solidFill>
-          <a:srgbClr val="1F3FD1"/>
+          <a:srgbClr val="12141B"/>
         </a:solidFill>
         <a:effectLst/>
       </p:bgPr>
@@ -14603,11 +14389,11 @@
             <a:r>
               <a:rPr sz="3600" b="1">
                 <a:solidFill>
-                  <a:srgbClr val="FFFFFF"/>
+                  <a:srgbClr val="F3EEE3"/>
                 </a:solidFill>
                 <a:latin typeface="Cambria"/>
               </a:rPr>
-              <a:t>Học được gì từ thiết kế này (1/2)</a:t>
+              <a:t>Nó chạy như thế nào (2/2)</a:t>
             </a:r>
           </a:p>
         </p:txBody>
@@ -14621,15 +14407,15 @@
         <p:spPr>
           <a:xfrm>
             <a:off x="685800" y="1326895"/>
-            <a:ext cx="10820400" cy="1124712"/>
+            <a:ext cx="10820400" cy="1805939"/>
           </a:xfrm>
           <a:prstGeom prst="roundRect">
             <a:avLst>
-              <a:gd name="adj" fmla="val 18066"/>
+              <a:gd name="adj" fmla="val 11251"/>
             </a:avLst>
           </a:prstGeom>
           <a:solidFill>
-            <a:srgbClr val="3453E3"/>
+            <a:srgbClr val="1E2230"/>
           </a:solidFill>
           <a:ln>
             <a:noFill/>
@@ -14645,20 +14431,20 @@
       </p:sp>
       <p:sp>
         <p:nvSpPr>
-          <p:cNvPr id="4" name="marker 1"/>
-          <p:cNvSpPr/>
-          <p:nvPr/>
-        </p:nvSpPr>
-        <p:spPr>
-          <a:xfrm>
-            <a:off x="965200" y="1635252"/>
+          <p:cNvPr id="4" name="marker 4"/>
+          <p:cNvSpPr/>
+          <p:nvPr/>
+        </p:nvSpPr>
+        <p:spPr>
+          <a:xfrm>
+            <a:off x="965200" y="1975865"/>
             <a:ext cx="508000" cy="508000"/>
           </a:xfrm>
           <a:prstGeom prst="ellipse">
             <a:avLst/>
           </a:prstGeom>
           <a:solidFill>
-            <a:srgbClr val="F3EEE3"/>
+            <a:srgbClr val="C58BFF"/>
           </a:solidFill>
           <a:ln>
             <a:noFill/>
@@ -14672,11 +14458,11 @@
             <a:r>
               <a:rPr sz="2000" b="1">
                 <a:solidFill>
-                  <a:srgbClr val="1F3FD1"/>
-                </a:solidFill>
-                <a:latin typeface="Calibri"/>
-              </a:rPr>
-              <a:t>1</a:t>
+                  <a:srgbClr val="12141B"/>
+                </a:solidFill>
+                <a:latin typeface="Calibri"/>
+              </a:rPr>
+              <a:t>4</a:t>
             </a:r>
           </a:p>
         </p:txBody>
@@ -14690,7 +14476,7 @@
         <p:spPr>
           <a:xfrm>
             <a:off x="1701800" y="1466595"/>
-            <a:ext cx="9525000" cy="845312"/>
+            <a:ext cx="9525000" cy="1526539"/>
           </a:xfrm>
           <a:prstGeom prst="rect">
             <a:avLst/>
@@ -14709,13 +14495,32 @@
               </a:lnSpc>
             </a:pPr>
             <a:r>
-              <a:rPr sz="2600" b="0">
-                <a:solidFill>
-                  <a:srgbClr val="FFFFFF"/>
-                </a:solidFill>
-                <a:latin typeface="Calibri"/>
-              </a:rPr>
-              <a:t>Tách hai runtime: đội chạy trong phiên và worker chạy ngoài phiên, mỗi bên hợp một loại việc.</a:t>
+              <a:rPr sz="2400" b="1">
+                <a:solidFill>
+                  <a:srgbClr val="F3EEE3"/>
+                </a:solidFill>
+                <a:latin typeface="Calibri"/>
+              </a:rPr>
+              <a:t>Mỗi phiên một người cầm vòng lặp</a:t>
+            </a:r>
+          </a:p>
+          <a:p>
+            <a:pPr algn="l">
+              <a:lnSpc>
+                <a:spcPct val="100000"/>
+              </a:lnSpc>
+              <a:spcBef>
+                <a:spcPts val="500"/>
+              </a:spcBef>
+            </a:pPr>
+            <a:r>
+              <a:rPr sz="2200" b="0">
+                <a:solidFill>
+                  <a:srgbClr val="F3EEE3"/>
+                </a:solidFill>
+                <a:latin typeface="Calibri"/>
+              </a:rPr>
+              <a:t>README dặn dùng một quyền điều khiển vòng lặp chính mỗi phiên: Team cho việc song song theo giai đoạn, Execute cho một agent làm tới nơi, Verify cho vòng kiểm tra lặp.</a:t>
             </a:r>
           </a:p>
         </p:txBody>
@@ -14728,16 +14533,16 @@
         </p:nvSpPr>
         <p:spPr>
           <a:xfrm>
-            <a:off x="685800" y="2578608"/>
-            <a:ext cx="10820400" cy="1124712"/>
+            <a:off x="685800" y="3259835"/>
+            <a:ext cx="10820400" cy="1805939"/>
           </a:xfrm>
           <a:prstGeom prst="roundRect">
             <a:avLst>
-              <a:gd name="adj" fmla="val 18066"/>
+              <a:gd name="adj" fmla="val 11251"/>
             </a:avLst>
           </a:prstGeom>
           <a:solidFill>
-            <a:srgbClr val="3453E3"/>
+            <a:srgbClr val="1E2230"/>
           </a:solidFill>
           <a:ln>
             <a:noFill/>
@@ -14753,20 +14558,20 @@
       </p:sp>
       <p:sp>
         <p:nvSpPr>
-          <p:cNvPr id="7" name="marker 2"/>
-          <p:cNvSpPr/>
-          <p:nvPr/>
-        </p:nvSpPr>
-        <p:spPr>
-          <a:xfrm>
-            <a:off x="965200" y="2886964"/>
+          <p:cNvPr id="7" name="marker 5"/>
+          <p:cNvSpPr/>
+          <p:nvPr/>
+        </p:nvSpPr>
+        <p:spPr>
+          <a:xfrm>
+            <a:off x="965200" y="3908805"/>
             <a:ext cx="508000" cy="508000"/>
           </a:xfrm>
           <a:prstGeom prst="ellipse">
             <a:avLst/>
           </a:prstGeom>
           <a:solidFill>
-            <a:srgbClr val="F3EEE3"/>
+            <a:srgbClr val="FF6A4D"/>
           </a:solidFill>
           <a:ln>
             <a:noFill/>
@@ -14780,11 +14585,11 @@
             <a:r>
               <a:rPr sz="2000" b="1">
                 <a:solidFill>
-                  <a:srgbClr val="1F3FD1"/>
-                </a:solidFill>
-                <a:latin typeface="Calibri"/>
-              </a:rPr>
-              <a:t>2</a:t>
+                  <a:srgbClr val="12141B"/>
+                </a:solidFill>
+                <a:latin typeface="Calibri"/>
+              </a:rPr>
+              <a:t>5</a:t>
             </a:r>
           </a:p>
         </p:txBody>
@@ -14797,8 +14602,8 @@
         </p:nvSpPr>
         <p:spPr>
           <a:xfrm>
-            <a:off x="1701800" y="2718308"/>
-            <a:ext cx="9525000" cy="845312"/>
+            <a:off x="1701800" y="3399535"/>
+            <a:ext cx="9525000" cy="1526539"/>
           </a:xfrm>
           <a:prstGeom prst="rect">
             <a:avLst/>
@@ -14817,35 +14622,91 @@
               </a:lnSpc>
             </a:pPr>
             <a:r>
-              <a:rPr sz="2600" b="0">
-                <a:solidFill>
-                  <a:srgbClr val="FFFFFF"/>
-                </a:solidFill>
-                <a:latin typeface="Calibri"/>
-              </a:rPr>
-              <a:t>Đặt kiểm tra thành giai đoạn riêng và cho nó vòng sửa lỗi, thay vì kiểm tra một lần ở cuối.</a:t>
-            </a:r>
-          </a:p>
-        </p:txBody>
-      </p:sp>
-      <p:sp>
-        <p:nvSpPr>
-          <p:cNvPr id="9" name="card"/>
-          <p:cNvSpPr/>
-          <p:nvPr/>
-        </p:nvSpPr>
-        <p:spPr>
-          <a:xfrm>
-            <a:off x="685800" y="3830320"/>
-            <a:ext cx="10820400" cy="1124712"/>
-          </a:xfrm>
-          <a:prstGeom prst="roundRect">
-            <a:avLst>
-              <a:gd name="adj" fmla="val 18066"/>
-            </a:avLst>
-          </a:prstGeom>
-          <a:solidFill>
-            <a:srgbClr val="3453E3"/>
+              <a:rPr sz="2400" b="1">
+                <a:solidFill>
+                  <a:srgbClr val="F3EEE3"/>
+                </a:solidFill>
+                <a:latin typeface="Calibri"/>
+              </a:rPr>
+              <a:t>Trạng thái nằm trong .omc/</a:t>
+            </a:r>
+          </a:p>
+          <a:p>
+            <a:pPr algn="l">
+              <a:lnSpc>
+                <a:spcPct val="100000"/>
+              </a:lnSpc>
+              <a:spcBef>
+                <a:spcPts val="500"/>
+              </a:spcBef>
+            </a:pPr>
+            <a:r>
+              <a:rPr sz="2200" b="0">
+                <a:solidFill>
+                  <a:srgbClr val="F3EEE3"/>
+                </a:solidFill>
+                <a:latin typeface="Calibri"/>
+              </a:rPr>
+              <a:t>OMC ghi trạng thái, phiên, kế hoạch vào thư mục .omc/. Trong worktree liên kết, thư mục này nằm trong worktree nên xóa worktree là mất; đặt OMC_STATE_DIR để giữ.</a:t>
+            </a:r>
+          </a:p>
+        </p:txBody>
+      </p:sp>
+      <p:sp>
+        <p:nvSpPr>
+          <p:cNvPr id="9" name="page"/>
+          <p:cNvSpPr txBox="1"/>
+          <p:nvPr/>
+        </p:nvSpPr>
+        <p:spPr>
+          <a:xfrm>
+            <a:off x="9474200" y="304800"/>
+            <a:ext cx="2032000" cy="279400"/>
+          </a:xfrm>
+          <a:prstGeom prst="rect">
+            <a:avLst/>
+          </a:prstGeom>
+          <a:noFill/>
+        </p:spPr>
+        <p:txBody>
+          <a:bodyPr wrap="square" lIns="0" rIns="0" tIns="0" bIns="0" anchor="t">
+            <a:noAutofit/>
+          </a:bodyPr>
+          <a:lstStyle/>
+          <a:p>
+            <a:pPr algn="r">
+              <a:lnSpc>
+                <a:spcPct val="100000"/>
+              </a:lnSpc>
+            </a:pPr>
+            <a:r>
+              <a:rPr sz="1600" b="1">
+                <a:solidFill>
+                  <a:srgbClr val="F3EEE3"/>
+                </a:solidFill>
+                <a:latin typeface="Calibri"/>
+              </a:rPr>
+              <a:t>29/34</a:t>
+            </a:r>
+          </a:p>
+        </p:txBody>
+      </p:sp>
+      <p:sp>
+        <p:nvSpPr>
+          <p:cNvPr id="10" name="rail"/>
+          <p:cNvSpPr/>
+          <p:nvPr/>
+        </p:nvSpPr>
+        <p:spPr>
+          <a:xfrm>
+            <a:off x="685800" y="6451600"/>
+            <a:ext cx="10820400" cy="38100"/>
+          </a:xfrm>
+          <a:prstGeom prst="rect">
+            <a:avLst/>
+          </a:prstGeom>
+          <a:solidFill>
+            <a:srgbClr val="9AA0B5"/>
           </a:solidFill>
           <a:ln>
             <a:noFill/>
@@ -14861,105 +14722,26 @@
       </p:sp>
       <p:sp>
         <p:nvSpPr>
-          <p:cNvPr id="10" name="marker 3"/>
-          <p:cNvSpPr/>
-          <p:nvPr/>
-        </p:nvSpPr>
-        <p:spPr>
-          <a:xfrm>
-            <a:off x="965200" y="4138676"/>
-            <a:ext cx="508000" cy="508000"/>
-          </a:xfrm>
-          <a:prstGeom prst="ellipse">
-            <a:avLst/>
-          </a:prstGeom>
-          <a:solidFill>
-            <a:srgbClr val="F3EEE3"/>
+          <p:cNvPr id="11" name="progress"/>
+          <p:cNvSpPr/>
+          <p:nvPr/>
+        </p:nvSpPr>
+        <p:spPr>
+          <a:xfrm>
+            <a:off x="685800" y="6426200"/>
+            <a:ext cx="9229164" cy="88900"/>
+          </a:xfrm>
+          <a:prstGeom prst="rect">
+            <a:avLst/>
+          </a:prstGeom>
+          <a:solidFill>
+            <a:srgbClr val="FF6A4D"/>
           </a:solidFill>
           <a:ln>
             <a:noFill/>
           </a:ln>
         </p:spPr>
         <p:txBody>
-          <a:bodyPr rtlCol="0" anchor="ctr" lIns="0" rIns="0" tIns="0" bIns="0"/>
-          <a:lstStyle/>
-          <a:p>
-            <a:pPr algn="ctr"/>
-            <a:r>
-              <a:rPr sz="2000" b="1">
-                <a:solidFill>
-                  <a:srgbClr val="1F3FD1"/>
-                </a:solidFill>
-                <a:latin typeface="Calibri"/>
-              </a:rPr>
-              <a:t>3</a:t>
-            </a:r>
-          </a:p>
-        </p:txBody>
-      </p:sp>
-      <p:sp>
-        <p:nvSpPr>
-          <p:cNvPr id="11" name="card text"/>
-          <p:cNvSpPr txBox="1"/>
-          <p:nvPr/>
-        </p:nvSpPr>
-        <p:spPr>
-          <a:xfrm>
-            <a:off x="1701800" y="3970020"/>
-            <a:ext cx="9525000" cy="845312"/>
-          </a:xfrm>
-          <a:prstGeom prst="rect">
-            <a:avLst/>
-          </a:prstGeom>
-          <a:noFill/>
-        </p:spPr>
-        <p:txBody>
-          <a:bodyPr wrap="square" lIns="0" rIns="0" tIns="0" bIns="0" anchor="ctr">
-            <a:noAutofit/>
-          </a:bodyPr>
-          <a:lstStyle/>
-          <a:p>
-            <a:pPr algn="l">
-              <a:lnSpc>
-                <a:spcPct val="100000"/>
-              </a:lnSpc>
-            </a:pPr>
-            <a:r>
-              <a:rPr sz="2600" b="0">
-                <a:solidFill>
-                  <a:srgbClr val="FFFFFF"/>
-                </a:solidFill>
-                <a:latin typeface="Calibri"/>
-              </a:rPr>
-              <a:t>Mỗi phiên chỉ một cơ chế cầm vòng lặp chính, theo lời dặn của README.</a:t>
-            </a:r>
-          </a:p>
-        </p:txBody>
-      </p:sp>
-      <p:sp>
-        <p:nvSpPr>
-          <p:cNvPr id="12" name="card"/>
-          <p:cNvSpPr/>
-          <p:nvPr/>
-        </p:nvSpPr>
-        <p:spPr>
-          <a:xfrm>
-            <a:off x="685800" y="5082032"/>
-            <a:ext cx="10820400" cy="1124712"/>
-          </a:xfrm>
-          <a:prstGeom prst="roundRect">
-            <a:avLst>
-              <a:gd name="adj" fmla="val 18066"/>
-            </a:avLst>
-          </a:prstGeom>
-          <a:solidFill>
-            <a:srgbClr val="3453E3"/>
-          </a:solidFill>
-          <a:ln>
-            <a:noFill/>
-          </a:ln>
-        </p:spPr>
-        <p:txBody>
           <a:bodyPr rtlCol="0" anchor="ctr"/>
           <a:lstStyle/>
           <a:p>
@@ -14969,181 +14751,7 @@
       </p:sp>
       <p:sp>
         <p:nvSpPr>
-          <p:cNvPr id="13" name="marker 4"/>
-          <p:cNvSpPr/>
-          <p:nvPr/>
-        </p:nvSpPr>
-        <p:spPr>
-          <a:xfrm>
-            <a:off x="965200" y="5390388"/>
-            <a:ext cx="508000" cy="508000"/>
-          </a:xfrm>
-          <a:prstGeom prst="ellipse">
-            <a:avLst/>
-          </a:prstGeom>
-          <a:solidFill>
-            <a:srgbClr val="F3EEE3"/>
-          </a:solidFill>
-          <a:ln>
-            <a:noFill/>
-          </a:ln>
-        </p:spPr>
-        <p:txBody>
-          <a:bodyPr rtlCol="0" anchor="ctr" lIns="0" rIns="0" tIns="0" bIns="0"/>
-          <a:lstStyle/>
-          <a:p>
-            <a:pPr algn="ctr"/>
-            <a:r>
-              <a:rPr sz="2000" b="1">
-                <a:solidFill>
-                  <a:srgbClr val="1F3FD1"/>
-                </a:solidFill>
-                <a:latin typeface="Calibri"/>
-              </a:rPr>
-              <a:t>4</a:t>
-            </a:r>
-          </a:p>
-        </p:txBody>
-      </p:sp>
-      <p:sp>
-        <p:nvSpPr>
-          <p:cNvPr id="14" name="card text"/>
-          <p:cNvSpPr txBox="1"/>
-          <p:nvPr/>
-        </p:nvSpPr>
-        <p:spPr>
-          <a:xfrm>
-            <a:off x="1701800" y="5221732"/>
-            <a:ext cx="9525000" cy="845312"/>
-          </a:xfrm>
-          <a:prstGeom prst="rect">
-            <a:avLst/>
-          </a:prstGeom>
-          <a:noFill/>
-        </p:spPr>
-        <p:txBody>
-          <a:bodyPr wrap="square" lIns="0" rIns="0" tIns="0" bIns="0" anchor="ctr">
-            <a:noAutofit/>
-          </a:bodyPr>
-          <a:lstStyle/>
-          <a:p>
-            <a:pPr algn="l">
-              <a:lnSpc>
-                <a:spcPct val="100000"/>
-              </a:lnSpc>
-            </a:pPr>
-            <a:r>
-              <a:rPr sz="2600" b="0">
-                <a:solidFill>
-                  <a:srgbClr val="FFFFFF"/>
-                </a:solidFill>
-                <a:latin typeface="Calibri"/>
-              </a:rPr>
-              <a:t>Worker sinh khi cần và tắt khi xong: trả tài nguyên ngay sau mỗi việc.</a:t>
-            </a:r>
-          </a:p>
-        </p:txBody>
-      </p:sp>
-      <p:sp>
-        <p:nvSpPr>
-          <p:cNvPr id="15" name="page"/>
-          <p:cNvSpPr txBox="1"/>
-          <p:nvPr/>
-        </p:nvSpPr>
-        <p:spPr>
-          <a:xfrm>
-            <a:off x="9474200" y="304800"/>
-            <a:ext cx="2032000" cy="279400"/>
-          </a:xfrm>
-          <a:prstGeom prst="rect">
-            <a:avLst/>
-          </a:prstGeom>
-          <a:noFill/>
-        </p:spPr>
-        <p:txBody>
-          <a:bodyPr wrap="square" lIns="0" rIns="0" tIns="0" bIns="0" anchor="t">
-            <a:noAutofit/>
-          </a:bodyPr>
-          <a:lstStyle/>
-          <a:p>
-            <a:pPr algn="r">
-              <a:lnSpc>
-                <a:spcPct val="100000"/>
-              </a:lnSpc>
-            </a:pPr>
-            <a:r>
-              <a:rPr sz="1600" b="1">
-                <a:solidFill>
-                  <a:srgbClr val="FFFFFF"/>
-                </a:solidFill>
-                <a:latin typeface="Calibri"/>
-              </a:rPr>
-              <a:t>29/33</a:t>
-            </a:r>
-          </a:p>
-        </p:txBody>
-      </p:sp>
-      <p:sp>
-        <p:nvSpPr>
-          <p:cNvPr id="16" name="rail"/>
-          <p:cNvSpPr/>
-          <p:nvPr/>
-        </p:nvSpPr>
-        <p:spPr>
-          <a:xfrm>
-            <a:off x="685800" y="6451600"/>
-            <a:ext cx="10820400" cy="38100"/>
-          </a:xfrm>
-          <a:prstGeom prst="rect">
-            <a:avLst/>
-          </a:prstGeom>
-          <a:solidFill>
-            <a:srgbClr val="C9D2FF"/>
-          </a:solidFill>
-          <a:ln>
-            <a:noFill/>
-          </a:ln>
-        </p:spPr>
-        <p:txBody>
-          <a:bodyPr rtlCol="0" anchor="ctr"/>
-          <a:lstStyle/>
-          <a:p>
-            <a:pPr algn="ctr"/>
-          </a:p>
-        </p:txBody>
-      </p:sp>
-      <p:sp>
-        <p:nvSpPr>
-          <p:cNvPr id="17" name="progress"/>
-          <p:cNvSpPr/>
-          <p:nvPr/>
-        </p:nvSpPr>
-        <p:spPr>
-          <a:xfrm>
-            <a:off x="685800" y="6426200"/>
-            <a:ext cx="9508836" cy="88900"/>
-          </a:xfrm>
-          <a:prstGeom prst="rect">
-            <a:avLst/>
-          </a:prstGeom>
-          <a:solidFill>
-            <a:srgbClr val="FFB454"/>
-          </a:solidFill>
-          <a:ln>
-            <a:noFill/>
-          </a:ln>
-        </p:spPr>
-        <p:txBody>
-          <a:bodyPr rtlCol="0" anchor="ctr"/>
-          <a:lstStyle/>
-          <a:p>
-            <a:pPr algn="ctr"/>
-          </a:p>
-        </p:txBody>
-      </p:sp>
-      <p:sp>
-        <p:nvSpPr>
-          <p:cNvPr id="18" name="footer"/>
+          <p:cNvPr id="12" name="footer"/>
           <p:cNvSpPr txBox="1"/>
           <p:nvPr/>
         </p:nvSpPr>
@@ -15171,7 +14779,7 @@
             <a:r>
               <a:rPr sz="1200" b="0">
                 <a:solidFill>
-                  <a:srgbClr val="C9D2FF"/>
+                  <a:srgbClr val="9AA0B5"/>
                 </a:solidFill>
                 <a:latin typeface="Calibri"/>
               </a:rPr>
@@ -15247,14 +14855,14 @@
       </p:sp>
       <p:sp>
         <p:nvSpPr>
-          <p:cNvPr id="3" name="text"/>
+          <p:cNvPr id="3" name="card text"/>
           <p:cNvSpPr txBox="1"/>
           <p:nvPr/>
         </p:nvSpPr>
         <p:spPr>
           <a:xfrm>
             <a:off x="685800" y="1326895"/>
-            <a:ext cx="10820400" cy="1741424"/>
+            <a:ext cx="10820400" cy="1690624"/>
           </a:xfrm>
           <a:prstGeom prst="rect">
             <a:avLst/>
@@ -15292,7 +14900,7 @@
         </p:nvSpPr>
         <p:spPr>
           <a:xfrm>
-            <a:off x="685800" y="3195320"/>
+            <a:off x="685800" y="3144520"/>
             <a:ext cx="10820400" cy="1545844"/>
           </a:xfrm>
           <a:prstGeom prst="roundRect">
@@ -15323,7 +14931,7 @@
         </p:nvSpPr>
         <p:spPr>
           <a:xfrm>
-            <a:off x="889000" y="3335020"/>
+            <a:off x="889000" y="3284220"/>
             <a:ext cx="76200" cy="1266444"/>
           </a:xfrm>
           <a:prstGeom prst="roundRect">
@@ -15354,7 +14962,7 @@
         </p:nvSpPr>
         <p:spPr>
           <a:xfrm>
-            <a:off x="1143000" y="3335020"/>
+            <a:off x="1143000" y="3284220"/>
             <a:ext cx="10083800" cy="1266444"/>
           </a:xfrm>
           <a:prstGeom prst="rect">
@@ -15438,7 +15046,7 @@
                 </a:solidFill>
                 <a:latin typeface="Calibri"/>
               </a:rPr>
-              <a:t>3/33</a:t>
+              <a:t>3/34</a:t>
             </a:r>
           </a:p>
         </p:txBody>
@@ -15481,7 +15089,7 @@
         <p:spPr>
           <a:xfrm>
             <a:off x="685800" y="6426200"/>
-            <a:ext cx="983672" cy="88900"/>
+            <a:ext cx="954741" cy="88900"/>
           </a:xfrm>
           <a:prstGeom prst="rect">
             <a:avLst/>
@@ -15600,7 +15208,7 @@
                 </a:solidFill>
                 <a:latin typeface="Cambria"/>
               </a:rPr>
-              <a:t>Học được gì từ thiết kế này (2/2)</a:t>
+              <a:t>Học được gì từ thiết kế này (1/2)</a:t>
             </a:r>
           </a:p>
         </p:txBody>
@@ -15638,7 +15246,7 @@
       </p:sp>
       <p:sp>
         <p:nvSpPr>
-          <p:cNvPr id="4" name="marker 5"/>
+          <p:cNvPr id="4" name="marker 1"/>
           <p:cNvSpPr/>
           <p:nvPr/>
         </p:nvSpPr>
@@ -15669,7 +15277,7 @@
                 </a:solidFill>
                 <a:latin typeface="Calibri"/>
               </a:rPr>
-              <a:t>5</a:t>
+              <a:t>1</a:t>
             </a:r>
           </a:p>
         </p:txBody>
@@ -15708,14 +15316,338 @@
                 </a:solidFill>
                 <a:latin typeface="Calibri"/>
               </a:rPr>
-              <a:t>Giữ trạng thái cục bộ cạnh dự án và nói rõ nó sống hay chết theo worktree.</a:t>
-            </a:r>
-          </a:p>
-        </p:txBody>
-      </p:sp>
-      <p:sp>
-        <p:nvSpPr>
-          <p:cNvPr id="6" name="page"/>
+              <a:t>Tách hai runtime: đội chạy trong phiên và worker chạy ngoài phiên, mỗi bên hợp một loại việc.</a:t>
+            </a:r>
+          </a:p>
+        </p:txBody>
+      </p:sp>
+      <p:sp>
+        <p:nvSpPr>
+          <p:cNvPr id="6" name="card"/>
+          <p:cNvSpPr/>
+          <p:nvPr/>
+        </p:nvSpPr>
+        <p:spPr>
+          <a:xfrm>
+            <a:off x="685800" y="2578608"/>
+            <a:ext cx="10820400" cy="1124712"/>
+          </a:xfrm>
+          <a:prstGeom prst="roundRect">
+            <a:avLst>
+              <a:gd name="adj" fmla="val 18066"/>
+            </a:avLst>
+          </a:prstGeom>
+          <a:solidFill>
+            <a:srgbClr val="3453E3"/>
+          </a:solidFill>
+          <a:ln>
+            <a:noFill/>
+          </a:ln>
+        </p:spPr>
+        <p:txBody>
+          <a:bodyPr rtlCol="0" anchor="ctr"/>
+          <a:lstStyle/>
+          <a:p>
+            <a:pPr algn="ctr"/>
+          </a:p>
+        </p:txBody>
+      </p:sp>
+      <p:sp>
+        <p:nvSpPr>
+          <p:cNvPr id="7" name="marker 2"/>
+          <p:cNvSpPr/>
+          <p:nvPr/>
+        </p:nvSpPr>
+        <p:spPr>
+          <a:xfrm>
+            <a:off x="965200" y="2886964"/>
+            <a:ext cx="508000" cy="508000"/>
+          </a:xfrm>
+          <a:prstGeom prst="ellipse">
+            <a:avLst/>
+          </a:prstGeom>
+          <a:solidFill>
+            <a:srgbClr val="F3EEE3"/>
+          </a:solidFill>
+          <a:ln>
+            <a:noFill/>
+          </a:ln>
+        </p:spPr>
+        <p:txBody>
+          <a:bodyPr rtlCol="0" anchor="ctr" lIns="0" rIns="0" tIns="0" bIns="0"/>
+          <a:lstStyle/>
+          <a:p>
+            <a:pPr algn="ctr"/>
+            <a:r>
+              <a:rPr sz="2000" b="1">
+                <a:solidFill>
+                  <a:srgbClr val="1F3FD1"/>
+                </a:solidFill>
+                <a:latin typeface="Calibri"/>
+              </a:rPr>
+              <a:t>2</a:t>
+            </a:r>
+          </a:p>
+        </p:txBody>
+      </p:sp>
+      <p:sp>
+        <p:nvSpPr>
+          <p:cNvPr id="8" name="card text"/>
+          <p:cNvSpPr txBox="1"/>
+          <p:nvPr/>
+        </p:nvSpPr>
+        <p:spPr>
+          <a:xfrm>
+            <a:off x="1701800" y="2718308"/>
+            <a:ext cx="9525000" cy="845312"/>
+          </a:xfrm>
+          <a:prstGeom prst="rect">
+            <a:avLst/>
+          </a:prstGeom>
+          <a:noFill/>
+        </p:spPr>
+        <p:txBody>
+          <a:bodyPr wrap="square" lIns="0" rIns="0" tIns="0" bIns="0" anchor="ctr">
+            <a:noAutofit/>
+          </a:bodyPr>
+          <a:lstStyle/>
+          <a:p>
+            <a:pPr algn="l">
+              <a:lnSpc>
+                <a:spcPct val="100000"/>
+              </a:lnSpc>
+            </a:pPr>
+            <a:r>
+              <a:rPr sz="2600" b="0">
+                <a:solidFill>
+                  <a:srgbClr val="FFFFFF"/>
+                </a:solidFill>
+                <a:latin typeface="Calibri"/>
+              </a:rPr>
+              <a:t>Đặt kiểm tra thành giai đoạn riêng và cho nó vòng sửa lỗi, thay vì kiểm tra một lần ở cuối.</a:t>
+            </a:r>
+          </a:p>
+        </p:txBody>
+      </p:sp>
+      <p:sp>
+        <p:nvSpPr>
+          <p:cNvPr id="9" name="card"/>
+          <p:cNvSpPr/>
+          <p:nvPr/>
+        </p:nvSpPr>
+        <p:spPr>
+          <a:xfrm>
+            <a:off x="685800" y="3830320"/>
+            <a:ext cx="10820400" cy="1124712"/>
+          </a:xfrm>
+          <a:prstGeom prst="roundRect">
+            <a:avLst>
+              <a:gd name="adj" fmla="val 18066"/>
+            </a:avLst>
+          </a:prstGeom>
+          <a:solidFill>
+            <a:srgbClr val="3453E3"/>
+          </a:solidFill>
+          <a:ln>
+            <a:noFill/>
+          </a:ln>
+        </p:spPr>
+        <p:txBody>
+          <a:bodyPr rtlCol="0" anchor="ctr"/>
+          <a:lstStyle/>
+          <a:p>
+            <a:pPr algn="ctr"/>
+          </a:p>
+        </p:txBody>
+      </p:sp>
+      <p:sp>
+        <p:nvSpPr>
+          <p:cNvPr id="10" name="marker 3"/>
+          <p:cNvSpPr/>
+          <p:nvPr/>
+        </p:nvSpPr>
+        <p:spPr>
+          <a:xfrm>
+            <a:off x="965200" y="4138676"/>
+            <a:ext cx="508000" cy="508000"/>
+          </a:xfrm>
+          <a:prstGeom prst="ellipse">
+            <a:avLst/>
+          </a:prstGeom>
+          <a:solidFill>
+            <a:srgbClr val="F3EEE3"/>
+          </a:solidFill>
+          <a:ln>
+            <a:noFill/>
+          </a:ln>
+        </p:spPr>
+        <p:txBody>
+          <a:bodyPr rtlCol="0" anchor="ctr" lIns="0" rIns="0" tIns="0" bIns="0"/>
+          <a:lstStyle/>
+          <a:p>
+            <a:pPr algn="ctr"/>
+            <a:r>
+              <a:rPr sz="2000" b="1">
+                <a:solidFill>
+                  <a:srgbClr val="1F3FD1"/>
+                </a:solidFill>
+                <a:latin typeface="Calibri"/>
+              </a:rPr>
+              <a:t>3</a:t>
+            </a:r>
+          </a:p>
+        </p:txBody>
+      </p:sp>
+      <p:sp>
+        <p:nvSpPr>
+          <p:cNvPr id="11" name="card text"/>
+          <p:cNvSpPr txBox="1"/>
+          <p:nvPr/>
+        </p:nvSpPr>
+        <p:spPr>
+          <a:xfrm>
+            <a:off x="1701800" y="3970020"/>
+            <a:ext cx="9525000" cy="845312"/>
+          </a:xfrm>
+          <a:prstGeom prst="rect">
+            <a:avLst/>
+          </a:prstGeom>
+          <a:noFill/>
+        </p:spPr>
+        <p:txBody>
+          <a:bodyPr wrap="square" lIns="0" rIns="0" tIns="0" bIns="0" anchor="ctr">
+            <a:noAutofit/>
+          </a:bodyPr>
+          <a:lstStyle/>
+          <a:p>
+            <a:pPr algn="l">
+              <a:lnSpc>
+                <a:spcPct val="100000"/>
+              </a:lnSpc>
+            </a:pPr>
+            <a:r>
+              <a:rPr sz="2600" b="0">
+                <a:solidFill>
+                  <a:srgbClr val="FFFFFF"/>
+                </a:solidFill>
+                <a:latin typeface="Calibri"/>
+              </a:rPr>
+              <a:t>Mỗi phiên chỉ một cơ chế cầm vòng lặp chính, theo lời dặn của README.</a:t>
+            </a:r>
+          </a:p>
+        </p:txBody>
+      </p:sp>
+      <p:sp>
+        <p:nvSpPr>
+          <p:cNvPr id="12" name="card"/>
+          <p:cNvSpPr/>
+          <p:nvPr/>
+        </p:nvSpPr>
+        <p:spPr>
+          <a:xfrm>
+            <a:off x="685800" y="5082032"/>
+            <a:ext cx="10820400" cy="1124712"/>
+          </a:xfrm>
+          <a:prstGeom prst="roundRect">
+            <a:avLst>
+              <a:gd name="adj" fmla="val 18066"/>
+            </a:avLst>
+          </a:prstGeom>
+          <a:solidFill>
+            <a:srgbClr val="3453E3"/>
+          </a:solidFill>
+          <a:ln>
+            <a:noFill/>
+          </a:ln>
+        </p:spPr>
+        <p:txBody>
+          <a:bodyPr rtlCol="0" anchor="ctr"/>
+          <a:lstStyle/>
+          <a:p>
+            <a:pPr algn="ctr"/>
+          </a:p>
+        </p:txBody>
+      </p:sp>
+      <p:sp>
+        <p:nvSpPr>
+          <p:cNvPr id="13" name="marker 4"/>
+          <p:cNvSpPr/>
+          <p:nvPr/>
+        </p:nvSpPr>
+        <p:spPr>
+          <a:xfrm>
+            <a:off x="965200" y="5390388"/>
+            <a:ext cx="508000" cy="508000"/>
+          </a:xfrm>
+          <a:prstGeom prst="ellipse">
+            <a:avLst/>
+          </a:prstGeom>
+          <a:solidFill>
+            <a:srgbClr val="F3EEE3"/>
+          </a:solidFill>
+          <a:ln>
+            <a:noFill/>
+          </a:ln>
+        </p:spPr>
+        <p:txBody>
+          <a:bodyPr rtlCol="0" anchor="ctr" lIns="0" rIns="0" tIns="0" bIns="0"/>
+          <a:lstStyle/>
+          <a:p>
+            <a:pPr algn="ctr"/>
+            <a:r>
+              <a:rPr sz="2000" b="1">
+                <a:solidFill>
+                  <a:srgbClr val="1F3FD1"/>
+                </a:solidFill>
+                <a:latin typeface="Calibri"/>
+              </a:rPr>
+              <a:t>4</a:t>
+            </a:r>
+          </a:p>
+        </p:txBody>
+      </p:sp>
+      <p:sp>
+        <p:nvSpPr>
+          <p:cNvPr id="14" name="card text"/>
+          <p:cNvSpPr txBox="1"/>
+          <p:nvPr/>
+        </p:nvSpPr>
+        <p:spPr>
+          <a:xfrm>
+            <a:off x="1701800" y="5221732"/>
+            <a:ext cx="9525000" cy="845312"/>
+          </a:xfrm>
+          <a:prstGeom prst="rect">
+            <a:avLst/>
+          </a:prstGeom>
+          <a:noFill/>
+        </p:spPr>
+        <p:txBody>
+          <a:bodyPr wrap="square" lIns="0" rIns="0" tIns="0" bIns="0" anchor="ctr">
+            <a:noAutofit/>
+          </a:bodyPr>
+          <a:lstStyle/>
+          <a:p>
+            <a:pPr algn="l">
+              <a:lnSpc>
+                <a:spcPct val="100000"/>
+              </a:lnSpc>
+            </a:pPr>
+            <a:r>
+              <a:rPr sz="2600" b="0">
+                <a:solidFill>
+                  <a:srgbClr val="FFFFFF"/>
+                </a:solidFill>
+                <a:latin typeface="Calibri"/>
+              </a:rPr>
+              <a:t>Worker sinh khi cần và tắt khi xong: trả tài nguyên ngay sau mỗi việc.</a:t>
+            </a:r>
+          </a:p>
+        </p:txBody>
+      </p:sp>
+      <p:sp>
+        <p:nvSpPr>
+          <p:cNvPr id="15" name="page"/>
           <p:cNvSpPr txBox="1"/>
           <p:nvPr/>
         </p:nvSpPr>
@@ -15747,14 +15679,14 @@
                 </a:solidFill>
                 <a:latin typeface="Calibri"/>
               </a:rPr>
-              <a:t>30/33</a:t>
-            </a:r>
-          </a:p>
-        </p:txBody>
-      </p:sp>
-      <p:sp>
-        <p:nvSpPr>
-          <p:cNvPr id="7" name="rail"/>
+              <a:t>30/34</a:t>
+            </a:r>
+          </a:p>
+        </p:txBody>
+      </p:sp>
+      <p:sp>
+        <p:nvSpPr>
+          <p:cNvPr id="16" name="rail"/>
           <p:cNvSpPr/>
           <p:nvPr/>
         </p:nvSpPr>
@@ -15783,14 +15715,14 @@
       </p:sp>
       <p:sp>
         <p:nvSpPr>
-          <p:cNvPr id="8" name="progress"/>
+          <p:cNvPr id="17" name="progress"/>
           <p:cNvSpPr/>
           <p:nvPr/>
         </p:nvSpPr>
         <p:spPr>
           <a:xfrm>
             <a:off x="685800" y="6426200"/>
-            <a:ext cx="9836727" cy="88900"/>
+            <a:ext cx="9547411" cy="88900"/>
           </a:xfrm>
           <a:prstGeom prst="rect">
             <a:avLst/>
@@ -15812,7 +15744,7 @@
       </p:sp>
       <p:sp>
         <p:nvSpPr>
-          <p:cNvPr id="9" name="footer"/>
+          <p:cNvPr id="18" name="footer"/>
           <p:cNvSpPr txBox="1"/>
           <p:nvPr/>
         </p:nvSpPr>
@@ -15863,7 +15795,7 @@
     <p:bg>
       <p:bgPr>
         <a:solidFill>
-          <a:srgbClr val="F3EEE3"/>
+          <a:srgbClr val="1F3FD1"/>
         </a:solidFill>
         <a:effectLst/>
       </p:bgPr>
@@ -15905,11 +15837,11 @@
             <a:r>
               <a:rPr sz="3600" b="1">
                 <a:solidFill>
-                  <a:srgbClr val="14161C"/>
+                  <a:srgbClr val="FFFFFF"/>
                 </a:solidFill>
                 <a:latin typeface="Cambria"/>
               </a:rPr>
-              <a:t>Từ khóa (1/2)</a:t>
+              <a:t>Học được gì từ thiết kế này (2/2)</a:t>
             </a:r>
           </a:p>
         </p:txBody>
@@ -15923,15 +15855,15 @@
         <p:spPr>
           <a:xfrm>
             <a:off x="685800" y="1326895"/>
-            <a:ext cx="10820400" cy="1545844"/>
+            <a:ext cx="10820400" cy="1124712"/>
           </a:xfrm>
           <a:prstGeom prst="roundRect">
             <a:avLst>
-              <a:gd name="adj" fmla="val 13144"/>
+              <a:gd name="adj" fmla="val 18066"/>
             </a:avLst>
           </a:prstGeom>
           <a:solidFill>
-            <a:srgbClr val="E8E0CF"/>
+            <a:srgbClr val="3453E3"/>
           </a:solidFill>
           <a:ln>
             <a:noFill/>
@@ -15947,103 +15879,52 @@
       </p:sp>
       <p:sp>
         <p:nvSpPr>
-          <p:cNvPr id="4" name="card text"/>
-          <p:cNvSpPr txBox="1"/>
-          <p:nvPr/>
-        </p:nvSpPr>
-        <p:spPr>
-          <a:xfrm>
-            <a:off x="965200" y="1466595"/>
-            <a:ext cx="10261600" cy="1266444"/>
-          </a:xfrm>
-          <a:prstGeom prst="rect">
-            <a:avLst/>
-          </a:prstGeom>
-          <a:noFill/>
-        </p:spPr>
-        <p:txBody>
-          <a:bodyPr wrap="square" lIns="0" rIns="0" tIns="0" bIns="0" anchor="ctr">
-            <a:noAutofit/>
-          </a:bodyPr>
-          <a:lstStyle/>
-          <a:p>
-            <a:pPr algn="l">
-              <a:lnSpc>
-                <a:spcPct val="100000"/>
-              </a:lnSpc>
-            </a:pPr>
-            <a:r>
-              <a:rPr sz="2600" b="1">
-                <a:solidFill>
-                  <a:srgbClr val="14161C"/>
-                </a:solidFill>
-                <a:latin typeface="Calibri"/>
-              </a:rPr>
-              <a:t>tmux</a:t>
-            </a:r>
-          </a:p>
-          <a:p>
-            <a:pPr algn="l">
-              <a:lnSpc>
-                <a:spcPct val="100000"/>
-              </a:lnSpc>
-              <a:spcBef>
-                <a:spcPts val="500"/>
-              </a:spcBef>
-            </a:pPr>
-            <a:r>
-              <a:rPr sz="2400" b="0">
-                <a:solidFill>
-                  <a:srgbClr val="14161C"/>
-                </a:solidFill>
-                <a:latin typeface="Calibri"/>
-              </a:rPr>
-              <a:t>Công cụ chia một cửa sổ terminal thành nhiều pane chạy song song; omc team dùng nó cho worker.</a:t>
-            </a:r>
-          </a:p>
-        </p:txBody>
-      </p:sp>
-      <p:sp>
-        <p:nvSpPr>
-          <p:cNvPr id="5" name="card"/>
-          <p:cNvSpPr/>
-          <p:nvPr/>
-        </p:nvSpPr>
-        <p:spPr>
-          <a:xfrm>
-            <a:off x="685800" y="2999740"/>
-            <a:ext cx="10820400" cy="1155700"/>
-          </a:xfrm>
-          <a:prstGeom prst="roundRect">
-            <a:avLst>
-              <a:gd name="adj" fmla="val 17582"/>
-            </a:avLst>
-          </a:prstGeom>
-          <a:solidFill>
-            <a:srgbClr val="E8E0CF"/>
+          <p:cNvPr id="4" name="marker 5"/>
+          <p:cNvSpPr/>
+          <p:nvPr/>
+        </p:nvSpPr>
+        <p:spPr>
+          <a:xfrm>
+            <a:off x="965200" y="1635252"/>
+            <a:ext cx="508000" cy="508000"/>
+          </a:xfrm>
+          <a:prstGeom prst="ellipse">
+            <a:avLst/>
+          </a:prstGeom>
+          <a:solidFill>
+            <a:srgbClr val="F3EEE3"/>
           </a:solidFill>
           <a:ln>
             <a:noFill/>
           </a:ln>
         </p:spPr>
         <p:txBody>
-          <a:bodyPr rtlCol="0" anchor="ctr"/>
-          <a:lstStyle/>
-          <a:p>
-            <a:pPr algn="ctr"/>
-          </a:p>
-        </p:txBody>
-      </p:sp>
-      <p:sp>
-        <p:nvSpPr>
-          <p:cNvPr id="6" name="card text"/>
-          <p:cNvSpPr txBox="1"/>
-          <p:nvPr/>
-        </p:nvSpPr>
-        <p:spPr>
-          <a:xfrm>
-            <a:off x="965200" y="3139440"/>
-            <a:ext cx="10261600" cy="876300"/>
+          <a:bodyPr rtlCol="0" anchor="ctr" lIns="0" rIns="0" tIns="0" bIns="0"/>
+          <a:lstStyle/>
+          <a:p>
+            <a:pPr algn="ctr"/>
+            <a:r>
+              <a:rPr sz="2000" b="1">
+                <a:solidFill>
+                  <a:srgbClr val="1F3FD1"/>
+                </a:solidFill>
+                <a:latin typeface="Calibri"/>
+              </a:rPr>
+              <a:t>5</a:t>
+            </a:r>
+          </a:p>
+        </p:txBody>
+      </p:sp>
+      <p:sp>
+        <p:nvSpPr>
+          <p:cNvPr id="5" name="card text"/>
+          <p:cNvSpPr txBox="1"/>
+          <p:nvPr/>
+        </p:nvSpPr>
+        <p:spPr>
+          <a:xfrm>
+            <a:off x="1701800" y="1466595"/>
+            <a:ext cx="9525000" cy="845312"/>
           </a:xfrm>
           <a:prstGeom prst="rect">
             <a:avLst/>
@@ -16062,54 +15943,72 @@
               </a:lnSpc>
             </a:pPr>
             <a:r>
-              <a:rPr sz="2600" b="1">
-                <a:solidFill>
-                  <a:srgbClr val="14161C"/>
-                </a:solidFill>
-                <a:latin typeface="Calibri"/>
-              </a:rPr>
-              <a:t>Worker</a:t>
-            </a:r>
-          </a:p>
-          <a:p>
-            <a:pPr algn="l">
-              <a:lnSpc>
-                <a:spcPct val="100000"/>
-              </a:lnSpc>
-              <a:spcBef>
-                <a:spcPts val="500"/>
-              </a:spcBef>
-            </a:pPr>
-            <a:r>
-              <a:rPr sz="2400" b="0">
-                <a:solidFill>
-                  <a:srgbClr val="14161C"/>
-                </a:solidFill>
-                <a:latin typeface="Calibri"/>
-              </a:rPr>
-              <a:t>Một tiến trình agent do omc team mở để làm một phần việc, tự tắt khi xong.</a:t>
-            </a:r>
-          </a:p>
-        </p:txBody>
-      </p:sp>
-      <p:sp>
-        <p:nvSpPr>
-          <p:cNvPr id="7" name="card"/>
-          <p:cNvSpPr/>
-          <p:nvPr/>
-        </p:nvSpPr>
-        <p:spPr>
-          <a:xfrm>
-            <a:off x="685800" y="4282440"/>
-            <a:ext cx="10820400" cy="1155700"/>
-          </a:xfrm>
-          <a:prstGeom prst="roundRect">
-            <a:avLst>
-              <a:gd name="adj" fmla="val 17582"/>
-            </a:avLst>
-          </a:prstGeom>
-          <a:solidFill>
-            <a:srgbClr val="E8E0CF"/>
+              <a:rPr sz="2600" b="0">
+                <a:solidFill>
+                  <a:srgbClr val="FFFFFF"/>
+                </a:solidFill>
+                <a:latin typeface="Calibri"/>
+              </a:rPr>
+              <a:t>Giữ trạng thái cục bộ cạnh dự án và nói rõ nó sống hay chết theo worktree.</a:t>
+            </a:r>
+          </a:p>
+        </p:txBody>
+      </p:sp>
+      <p:sp>
+        <p:nvSpPr>
+          <p:cNvPr id="6" name="page"/>
+          <p:cNvSpPr txBox="1"/>
+          <p:nvPr/>
+        </p:nvSpPr>
+        <p:spPr>
+          <a:xfrm>
+            <a:off x="9474200" y="304800"/>
+            <a:ext cx="2032000" cy="279400"/>
+          </a:xfrm>
+          <a:prstGeom prst="rect">
+            <a:avLst/>
+          </a:prstGeom>
+          <a:noFill/>
+        </p:spPr>
+        <p:txBody>
+          <a:bodyPr wrap="square" lIns="0" rIns="0" tIns="0" bIns="0" anchor="t">
+            <a:noAutofit/>
+          </a:bodyPr>
+          <a:lstStyle/>
+          <a:p>
+            <a:pPr algn="r">
+              <a:lnSpc>
+                <a:spcPct val="100000"/>
+              </a:lnSpc>
+            </a:pPr>
+            <a:r>
+              <a:rPr sz="1600" b="1">
+                <a:solidFill>
+                  <a:srgbClr val="FFFFFF"/>
+                </a:solidFill>
+                <a:latin typeface="Calibri"/>
+              </a:rPr>
+              <a:t>31/34</a:t>
+            </a:r>
+          </a:p>
+        </p:txBody>
+      </p:sp>
+      <p:sp>
+        <p:nvSpPr>
+          <p:cNvPr id="7" name="rail"/>
+          <p:cNvSpPr/>
+          <p:nvPr/>
+        </p:nvSpPr>
+        <p:spPr>
+          <a:xfrm>
+            <a:off x="685800" y="6451600"/>
+            <a:ext cx="10820400" cy="38100"/>
+          </a:xfrm>
+          <a:prstGeom prst="rect">
+            <a:avLst/>
+          </a:prstGeom>
+          <a:solidFill>
+            <a:srgbClr val="C9D2FF"/>
           </a:solidFill>
           <a:ln>
             <a:noFill/>
@@ -16125,117 +16024,20 @@
       </p:sp>
       <p:sp>
         <p:nvSpPr>
-          <p:cNvPr id="8" name="card text"/>
-          <p:cNvSpPr txBox="1"/>
-          <p:nvPr/>
-        </p:nvSpPr>
-        <p:spPr>
-          <a:xfrm>
-            <a:off x="965200" y="4422140"/>
-            <a:ext cx="10261600" cy="876300"/>
-          </a:xfrm>
-          <a:prstGeom prst="rect">
-            <a:avLst/>
-          </a:prstGeom>
-          <a:noFill/>
-        </p:spPr>
-        <p:txBody>
-          <a:bodyPr wrap="square" lIns="0" rIns="0" tIns="0" bIns="0" anchor="ctr">
-            <a:noAutofit/>
-          </a:bodyPr>
-          <a:lstStyle/>
-          <a:p>
-            <a:pPr algn="l">
-              <a:lnSpc>
-                <a:spcPct val="100000"/>
-              </a:lnSpc>
-            </a:pPr>
-            <a:r>
-              <a:rPr sz="2600" b="1">
-                <a:solidFill>
-                  <a:srgbClr val="14161C"/>
-                </a:solidFill>
-                <a:latin typeface="Calibri"/>
-              </a:rPr>
-              <a:t>Skill</a:t>
-            </a:r>
-          </a:p>
-          <a:p>
-            <a:pPr algn="l">
-              <a:lnSpc>
-                <a:spcPct val="100000"/>
-              </a:lnSpc>
-              <a:spcBef>
-                <a:spcPts val="500"/>
-              </a:spcBef>
-            </a:pPr>
-            <a:r>
-              <a:rPr sz="2400" b="0">
-                <a:solidFill>
-                  <a:srgbClr val="14161C"/>
-                </a:solidFill>
-                <a:latin typeface="Calibri"/>
-              </a:rPr>
-              <a:t>Lệnh slash do plugin cung cấp trong Claude Code, như /team hay /autopilot.</a:t>
-            </a:r>
-          </a:p>
-        </p:txBody>
-      </p:sp>
-      <p:sp>
-        <p:nvSpPr>
-          <p:cNvPr id="9" name="page"/>
-          <p:cNvSpPr txBox="1"/>
-          <p:nvPr/>
-        </p:nvSpPr>
-        <p:spPr>
-          <a:xfrm>
-            <a:off x="9474200" y="304800"/>
-            <a:ext cx="2032000" cy="279400"/>
-          </a:xfrm>
-          <a:prstGeom prst="rect">
-            <a:avLst/>
-          </a:prstGeom>
-          <a:noFill/>
-        </p:spPr>
-        <p:txBody>
-          <a:bodyPr wrap="square" lIns="0" rIns="0" tIns="0" bIns="0" anchor="t">
-            <a:noAutofit/>
-          </a:bodyPr>
-          <a:lstStyle/>
-          <a:p>
-            <a:pPr algn="r">
-              <a:lnSpc>
-                <a:spcPct val="100000"/>
-              </a:lnSpc>
-            </a:pPr>
-            <a:r>
-              <a:rPr sz="1600" b="1">
-                <a:solidFill>
-                  <a:srgbClr val="14161C"/>
-                </a:solidFill>
-                <a:latin typeface="Calibri"/>
-              </a:rPr>
-              <a:t>31/33</a:t>
-            </a:r>
-          </a:p>
-        </p:txBody>
-      </p:sp>
-      <p:sp>
-        <p:nvSpPr>
-          <p:cNvPr id="10" name="rail"/>
-          <p:cNvSpPr/>
-          <p:nvPr/>
-        </p:nvSpPr>
-        <p:spPr>
-          <a:xfrm>
-            <a:off x="685800" y="6451600"/>
-            <a:ext cx="10820400" cy="38100"/>
-          </a:xfrm>
-          <a:prstGeom prst="rect">
-            <a:avLst/>
-          </a:prstGeom>
-          <a:solidFill>
-            <a:srgbClr val="6B6A66"/>
+          <p:cNvPr id="8" name="progress"/>
+          <p:cNvSpPr/>
+          <p:nvPr/>
+        </p:nvSpPr>
+        <p:spPr>
+          <a:xfrm>
+            <a:off x="685800" y="6426200"/>
+            <a:ext cx="9865658" cy="88900"/>
+          </a:xfrm>
+          <a:prstGeom prst="rect">
+            <a:avLst/>
+          </a:prstGeom>
+          <a:solidFill>
+            <a:srgbClr val="FFB454"/>
           </a:solidFill>
           <a:ln>
             <a:noFill/>
@@ -16251,36 +16053,7 @@
       </p:sp>
       <p:sp>
         <p:nvSpPr>
-          <p:cNvPr id="11" name="progress"/>
-          <p:cNvSpPr/>
-          <p:nvPr/>
-        </p:nvSpPr>
-        <p:spPr>
-          <a:xfrm>
-            <a:off x="685800" y="6426200"/>
-            <a:ext cx="10164618" cy="88900"/>
-          </a:xfrm>
-          <a:prstGeom prst="rect">
-            <a:avLst/>
-          </a:prstGeom>
-          <a:solidFill>
-            <a:srgbClr val="E8472B"/>
-          </a:solidFill>
-          <a:ln>
-            <a:noFill/>
-          </a:ln>
-        </p:spPr>
-        <p:txBody>
-          <a:bodyPr rtlCol="0" anchor="ctr"/>
-          <a:lstStyle/>
-          <a:p>
-            <a:pPr algn="ctr"/>
-          </a:p>
-        </p:txBody>
-      </p:sp>
-      <p:sp>
-        <p:nvSpPr>
-          <p:cNvPr id="12" name="footer"/>
+          <p:cNvPr id="9" name="footer"/>
           <p:cNvSpPr txBox="1"/>
           <p:nvPr/>
         </p:nvSpPr>
@@ -16308,7 +16081,7 @@
             <a:r>
               <a:rPr sz="1200" b="0">
                 <a:solidFill>
-                  <a:srgbClr val="6B6A66"/>
+                  <a:srgbClr val="C9D2FF"/>
                 </a:solidFill>
                 <a:latin typeface="Calibri"/>
               </a:rPr>
@@ -16377,7 +16150,7 @@
                 </a:solidFill>
                 <a:latin typeface="Cambria"/>
               </a:rPr>
-              <a:t>Từ khóa (2/2)</a:t>
+              <a:t>Từ khóa (1/2)</a:t>
             </a:r>
           </a:p>
         </p:txBody>
@@ -16447,7 +16220,7 @@
                 </a:solidFill>
                 <a:latin typeface="Calibri"/>
               </a:rPr>
-              <a:t>Worktree</a:t>
+              <a:t>tmux</a:t>
             </a:r>
           </a:p>
           <a:p>
@@ -16466,14 +16239,192 @@
                 </a:solidFill>
                 <a:latin typeface="Calibri"/>
               </a:rPr>
-              <a:t>Bản làm việc riêng của git cho một nhánh; .omc/ của OMC nằm trong worktree liên kết.</a:t>
-            </a:r>
-          </a:p>
-        </p:txBody>
-      </p:sp>
-      <p:sp>
-        <p:nvSpPr>
-          <p:cNvPr id="5" name="page"/>
+              <a:t>Công cụ chia một cửa sổ terminal thành nhiều pane chạy song song; omc team dùng nó cho worker.</a:t>
+            </a:r>
+          </a:p>
+        </p:txBody>
+      </p:sp>
+      <p:sp>
+        <p:nvSpPr>
+          <p:cNvPr id="5" name="card"/>
+          <p:cNvSpPr/>
+          <p:nvPr/>
+        </p:nvSpPr>
+        <p:spPr>
+          <a:xfrm>
+            <a:off x="685800" y="2999740"/>
+            <a:ext cx="10820400" cy="1155700"/>
+          </a:xfrm>
+          <a:prstGeom prst="roundRect">
+            <a:avLst>
+              <a:gd name="adj" fmla="val 17582"/>
+            </a:avLst>
+          </a:prstGeom>
+          <a:solidFill>
+            <a:srgbClr val="E8E0CF"/>
+          </a:solidFill>
+          <a:ln>
+            <a:noFill/>
+          </a:ln>
+        </p:spPr>
+        <p:txBody>
+          <a:bodyPr rtlCol="0" anchor="ctr"/>
+          <a:lstStyle/>
+          <a:p>
+            <a:pPr algn="ctr"/>
+          </a:p>
+        </p:txBody>
+      </p:sp>
+      <p:sp>
+        <p:nvSpPr>
+          <p:cNvPr id="6" name="card text"/>
+          <p:cNvSpPr txBox="1"/>
+          <p:nvPr/>
+        </p:nvSpPr>
+        <p:spPr>
+          <a:xfrm>
+            <a:off x="965200" y="3139440"/>
+            <a:ext cx="10261600" cy="876300"/>
+          </a:xfrm>
+          <a:prstGeom prst="rect">
+            <a:avLst/>
+          </a:prstGeom>
+          <a:noFill/>
+        </p:spPr>
+        <p:txBody>
+          <a:bodyPr wrap="square" lIns="0" rIns="0" tIns="0" bIns="0" anchor="ctr">
+            <a:noAutofit/>
+          </a:bodyPr>
+          <a:lstStyle/>
+          <a:p>
+            <a:pPr algn="l">
+              <a:lnSpc>
+                <a:spcPct val="100000"/>
+              </a:lnSpc>
+            </a:pPr>
+            <a:r>
+              <a:rPr sz="2600" b="1">
+                <a:solidFill>
+                  <a:srgbClr val="14161C"/>
+                </a:solidFill>
+                <a:latin typeface="Calibri"/>
+              </a:rPr>
+              <a:t>Worker</a:t>
+            </a:r>
+          </a:p>
+          <a:p>
+            <a:pPr algn="l">
+              <a:lnSpc>
+                <a:spcPct val="100000"/>
+              </a:lnSpc>
+              <a:spcBef>
+                <a:spcPts val="500"/>
+              </a:spcBef>
+            </a:pPr>
+            <a:r>
+              <a:rPr sz="2400" b="0">
+                <a:solidFill>
+                  <a:srgbClr val="14161C"/>
+                </a:solidFill>
+                <a:latin typeface="Calibri"/>
+              </a:rPr>
+              <a:t>Một tiến trình agent do omc team mở để làm một phần việc, tự tắt khi xong.</a:t>
+            </a:r>
+          </a:p>
+        </p:txBody>
+      </p:sp>
+      <p:sp>
+        <p:nvSpPr>
+          <p:cNvPr id="7" name="card"/>
+          <p:cNvSpPr/>
+          <p:nvPr/>
+        </p:nvSpPr>
+        <p:spPr>
+          <a:xfrm>
+            <a:off x="685800" y="4282440"/>
+            <a:ext cx="10820400" cy="1155700"/>
+          </a:xfrm>
+          <a:prstGeom prst="roundRect">
+            <a:avLst>
+              <a:gd name="adj" fmla="val 17582"/>
+            </a:avLst>
+          </a:prstGeom>
+          <a:solidFill>
+            <a:srgbClr val="E8E0CF"/>
+          </a:solidFill>
+          <a:ln>
+            <a:noFill/>
+          </a:ln>
+        </p:spPr>
+        <p:txBody>
+          <a:bodyPr rtlCol="0" anchor="ctr"/>
+          <a:lstStyle/>
+          <a:p>
+            <a:pPr algn="ctr"/>
+          </a:p>
+        </p:txBody>
+      </p:sp>
+      <p:sp>
+        <p:nvSpPr>
+          <p:cNvPr id="8" name="card text"/>
+          <p:cNvSpPr txBox="1"/>
+          <p:nvPr/>
+        </p:nvSpPr>
+        <p:spPr>
+          <a:xfrm>
+            <a:off x="965200" y="4422140"/>
+            <a:ext cx="10261600" cy="876300"/>
+          </a:xfrm>
+          <a:prstGeom prst="rect">
+            <a:avLst/>
+          </a:prstGeom>
+          <a:noFill/>
+        </p:spPr>
+        <p:txBody>
+          <a:bodyPr wrap="square" lIns="0" rIns="0" tIns="0" bIns="0" anchor="ctr">
+            <a:noAutofit/>
+          </a:bodyPr>
+          <a:lstStyle/>
+          <a:p>
+            <a:pPr algn="l">
+              <a:lnSpc>
+                <a:spcPct val="100000"/>
+              </a:lnSpc>
+            </a:pPr>
+            <a:r>
+              <a:rPr sz="2600" b="1">
+                <a:solidFill>
+                  <a:srgbClr val="14161C"/>
+                </a:solidFill>
+                <a:latin typeface="Calibri"/>
+              </a:rPr>
+              <a:t>Skill</a:t>
+            </a:r>
+          </a:p>
+          <a:p>
+            <a:pPr algn="l">
+              <a:lnSpc>
+                <a:spcPct val="100000"/>
+              </a:lnSpc>
+              <a:spcBef>
+                <a:spcPts val="500"/>
+              </a:spcBef>
+            </a:pPr>
+            <a:r>
+              <a:rPr sz="2400" b="0">
+                <a:solidFill>
+                  <a:srgbClr val="14161C"/>
+                </a:solidFill>
+                <a:latin typeface="Calibri"/>
+              </a:rPr>
+              <a:t>Lệnh slash do plugin cung cấp trong Claude Code, như /team hay /autopilot.</a:t>
+            </a:r>
+          </a:p>
+        </p:txBody>
+      </p:sp>
+      <p:sp>
+        <p:nvSpPr>
+          <p:cNvPr id="9" name="page"/>
           <p:cNvSpPr txBox="1"/>
           <p:nvPr/>
         </p:nvSpPr>
@@ -16505,14 +16456,14 @@
                 </a:solidFill>
                 <a:latin typeface="Calibri"/>
               </a:rPr>
-              <a:t>32/33</a:t>
-            </a:r>
-          </a:p>
-        </p:txBody>
-      </p:sp>
-      <p:sp>
-        <p:nvSpPr>
-          <p:cNvPr id="6" name="rail"/>
+              <a:t>32/34</a:t>
+            </a:r>
+          </a:p>
+        </p:txBody>
+      </p:sp>
+      <p:sp>
+        <p:nvSpPr>
+          <p:cNvPr id="10" name="rail"/>
           <p:cNvSpPr/>
           <p:nvPr/>
         </p:nvSpPr>
@@ -16541,14 +16492,14 @@
       </p:sp>
       <p:sp>
         <p:nvSpPr>
-          <p:cNvPr id="7" name="progress"/>
+          <p:cNvPr id="11" name="progress"/>
           <p:cNvSpPr/>
           <p:nvPr/>
         </p:nvSpPr>
         <p:spPr>
           <a:xfrm>
             <a:off x="685800" y="6426200"/>
-            <a:ext cx="10492509" cy="88900"/>
+            <a:ext cx="10183905" cy="88900"/>
           </a:xfrm>
           <a:prstGeom prst="rect">
             <a:avLst/>
@@ -16570,7 +16521,7 @@
       </p:sp>
       <p:sp>
         <p:nvSpPr>
-          <p:cNvPr id="8" name="footer"/>
+          <p:cNvPr id="12" name="footer"/>
           <p:cNvSpPr txBox="1"/>
           <p:nvPr/>
         </p:nvSpPr>
@@ -16616,6 +16567,296 @@
 </file>
 
 <file path=ppt/slides/slide33.xml><?xml version="1.0" encoding="utf-8"?>
+<p:sld xmlns:a="http://schemas.openxmlformats.org/drawingml/2006/main" xmlns:p="http://schemas.openxmlformats.org/presentationml/2006/main" xmlns:r="http://schemas.openxmlformats.org/officeDocument/2006/relationships">
+  <p:cSld>
+    <p:bg>
+      <p:bgPr>
+        <a:solidFill>
+          <a:srgbClr val="F3EEE3"/>
+        </a:solidFill>
+        <a:effectLst/>
+      </p:bgPr>
+    </p:bg>
+    <p:spTree>
+      <p:nvGrpSpPr>
+        <p:cNvPr id="1" name=""/>
+        <p:cNvGrpSpPr/>
+        <p:nvPr/>
+      </p:nvGrpSpPr>
+      <p:grpSpPr/>
+      <p:sp>
+        <p:nvSpPr>
+          <p:cNvPr id="2" name="title"/>
+          <p:cNvSpPr txBox="1"/>
+          <p:nvPr/>
+        </p:nvSpPr>
+        <p:spPr>
+          <a:xfrm>
+            <a:off x="685800" y="609600"/>
+            <a:ext cx="10820400" cy="1524000"/>
+          </a:xfrm>
+          <a:prstGeom prst="rect">
+            <a:avLst/>
+          </a:prstGeom>
+          <a:noFill/>
+        </p:spPr>
+        <p:txBody>
+          <a:bodyPr wrap="square" lIns="0" rIns="0" tIns="0" bIns="0" anchor="t">
+            <a:noAutofit/>
+          </a:bodyPr>
+          <a:lstStyle/>
+          <a:p>
+            <a:pPr algn="l">
+              <a:lnSpc>
+                <a:spcPct val="100000"/>
+              </a:lnSpc>
+            </a:pPr>
+            <a:r>
+              <a:rPr sz="3600" b="1">
+                <a:solidFill>
+                  <a:srgbClr val="14161C"/>
+                </a:solidFill>
+                <a:latin typeface="Cambria"/>
+              </a:rPr>
+              <a:t>Từ khóa (2/2)</a:t>
+            </a:r>
+          </a:p>
+        </p:txBody>
+      </p:sp>
+      <p:sp>
+        <p:nvSpPr>
+          <p:cNvPr id="3" name="card"/>
+          <p:cNvSpPr/>
+          <p:nvPr/>
+        </p:nvSpPr>
+        <p:spPr>
+          <a:xfrm>
+            <a:off x="685800" y="1326895"/>
+            <a:ext cx="10820400" cy="1545844"/>
+          </a:xfrm>
+          <a:prstGeom prst="roundRect">
+            <a:avLst>
+              <a:gd name="adj" fmla="val 13144"/>
+            </a:avLst>
+          </a:prstGeom>
+          <a:solidFill>
+            <a:srgbClr val="E8E0CF"/>
+          </a:solidFill>
+          <a:ln>
+            <a:noFill/>
+          </a:ln>
+        </p:spPr>
+        <p:txBody>
+          <a:bodyPr rtlCol="0" anchor="ctr"/>
+          <a:lstStyle/>
+          <a:p>
+            <a:pPr algn="ctr"/>
+          </a:p>
+        </p:txBody>
+      </p:sp>
+      <p:sp>
+        <p:nvSpPr>
+          <p:cNvPr id="4" name="card text"/>
+          <p:cNvSpPr txBox="1"/>
+          <p:nvPr/>
+        </p:nvSpPr>
+        <p:spPr>
+          <a:xfrm>
+            <a:off x="965200" y="1466595"/>
+            <a:ext cx="10261600" cy="1266444"/>
+          </a:xfrm>
+          <a:prstGeom prst="rect">
+            <a:avLst/>
+          </a:prstGeom>
+          <a:noFill/>
+        </p:spPr>
+        <p:txBody>
+          <a:bodyPr wrap="square" lIns="0" rIns="0" tIns="0" bIns="0" anchor="ctr">
+            <a:noAutofit/>
+          </a:bodyPr>
+          <a:lstStyle/>
+          <a:p>
+            <a:pPr algn="l">
+              <a:lnSpc>
+                <a:spcPct val="100000"/>
+              </a:lnSpc>
+            </a:pPr>
+            <a:r>
+              <a:rPr sz="2600" b="1">
+                <a:solidFill>
+                  <a:srgbClr val="14161C"/>
+                </a:solidFill>
+                <a:latin typeface="Calibri"/>
+              </a:rPr>
+              <a:t>Worktree</a:t>
+            </a:r>
+          </a:p>
+          <a:p>
+            <a:pPr algn="l">
+              <a:lnSpc>
+                <a:spcPct val="100000"/>
+              </a:lnSpc>
+              <a:spcBef>
+                <a:spcPts val="500"/>
+              </a:spcBef>
+            </a:pPr>
+            <a:r>
+              <a:rPr sz="2400" b="0">
+                <a:solidFill>
+                  <a:srgbClr val="14161C"/>
+                </a:solidFill>
+                <a:latin typeface="Calibri"/>
+              </a:rPr>
+              <a:t>Bản làm việc riêng của git cho một nhánh; .omc/ của OMC nằm trong worktree liên kết.</a:t>
+            </a:r>
+          </a:p>
+        </p:txBody>
+      </p:sp>
+      <p:sp>
+        <p:nvSpPr>
+          <p:cNvPr id="5" name="page"/>
+          <p:cNvSpPr txBox="1"/>
+          <p:nvPr/>
+        </p:nvSpPr>
+        <p:spPr>
+          <a:xfrm>
+            <a:off x="9474200" y="304800"/>
+            <a:ext cx="2032000" cy="279400"/>
+          </a:xfrm>
+          <a:prstGeom prst="rect">
+            <a:avLst/>
+          </a:prstGeom>
+          <a:noFill/>
+        </p:spPr>
+        <p:txBody>
+          <a:bodyPr wrap="square" lIns="0" rIns="0" tIns="0" bIns="0" anchor="t">
+            <a:noAutofit/>
+          </a:bodyPr>
+          <a:lstStyle/>
+          <a:p>
+            <a:pPr algn="r">
+              <a:lnSpc>
+                <a:spcPct val="100000"/>
+              </a:lnSpc>
+            </a:pPr>
+            <a:r>
+              <a:rPr sz="1600" b="1">
+                <a:solidFill>
+                  <a:srgbClr val="14161C"/>
+                </a:solidFill>
+                <a:latin typeface="Calibri"/>
+              </a:rPr>
+              <a:t>33/34</a:t>
+            </a:r>
+          </a:p>
+        </p:txBody>
+      </p:sp>
+      <p:sp>
+        <p:nvSpPr>
+          <p:cNvPr id="6" name="rail"/>
+          <p:cNvSpPr/>
+          <p:nvPr/>
+        </p:nvSpPr>
+        <p:spPr>
+          <a:xfrm>
+            <a:off x="685800" y="6451600"/>
+            <a:ext cx="10820400" cy="38100"/>
+          </a:xfrm>
+          <a:prstGeom prst="rect">
+            <a:avLst/>
+          </a:prstGeom>
+          <a:solidFill>
+            <a:srgbClr val="6B6A66"/>
+          </a:solidFill>
+          <a:ln>
+            <a:noFill/>
+          </a:ln>
+        </p:spPr>
+        <p:txBody>
+          <a:bodyPr rtlCol="0" anchor="ctr"/>
+          <a:lstStyle/>
+          <a:p>
+            <a:pPr algn="ctr"/>
+          </a:p>
+        </p:txBody>
+      </p:sp>
+      <p:sp>
+        <p:nvSpPr>
+          <p:cNvPr id="7" name="progress"/>
+          <p:cNvSpPr/>
+          <p:nvPr/>
+        </p:nvSpPr>
+        <p:spPr>
+          <a:xfrm>
+            <a:off x="685800" y="6426200"/>
+            <a:ext cx="10502152" cy="88900"/>
+          </a:xfrm>
+          <a:prstGeom prst="rect">
+            <a:avLst/>
+          </a:prstGeom>
+          <a:solidFill>
+            <a:srgbClr val="E8472B"/>
+          </a:solidFill>
+          <a:ln>
+            <a:noFill/>
+          </a:ln>
+        </p:spPr>
+        <p:txBody>
+          <a:bodyPr rtlCol="0" anchor="ctr"/>
+          <a:lstStyle/>
+          <a:p>
+            <a:pPr algn="ctr"/>
+          </a:p>
+        </p:txBody>
+      </p:sp>
+      <p:sp>
+        <p:nvSpPr>
+          <p:cNvPr id="8" name="footer"/>
+          <p:cNvSpPr txBox="1"/>
+          <p:nvPr/>
+        </p:nvSpPr>
+        <p:spPr>
+          <a:xfrm>
+            <a:off x="685800" y="6578600"/>
+            <a:ext cx="7620000" cy="228600"/>
+          </a:xfrm>
+          <a:prstGeom prst="rect">
+            <a:avLst/>
+          </a:prstGeom>
+          <a:noFill/>
+        </p:spPr>
+        <p:txBody>
+          <a:bodyPr wrap="square" lIns="0" rIns="0" tIns="0" bIns="0" anchor="t">
+            <a:noAutofit/>
+          </a:bodyPr>
+          <a:lstStyle/>
+          <a:p>
+            <a:pPr algn="l">
+              <a:lnSpc>
+                <a:spcPct val="100000"/>
+              </a:lnSpc>
+            </a:pPr>
+            <a:r>
+              <a:rPr sz="1200" b="0">
+                <a:solidFill>
+                  <a:srgbClr val="6B6A66"/>
+                </a:solidFill>
+                <a:latin typeface="Calibri"/>
+              </a:rPr>
+              <a:t>Radar GitHub · oh-my-claudecode</a:t>
+            </a:r>
+          </a:p>
+        </p:txBody>
+      </p:sp>
+    </p:spTree>
+  </p:cSld>
+  <p:clrMapOvr>
+    <a:masterClrMapping/>
+  </p:clrMapOvr>
+</p:sld>
+</file>
+
+<file path=ppt/slides/slide34.xml><?xml version="1.0" encoding="utf-8"?>
 <p:sld xmlns:a="http://schemas.openxmlformats.org/drawingml/2006/main" xmlns:p="http://schemas.openxmlformats.org/presentationml/2006/main" xmlns:r="http://schemas.openxmlformats.org/officeDocument/2006/relationships">
   <p:cSld>
     <p:bg>
@@ -17124,7 +17365,7 @@
                 </a:solidFill>
                 <a:latin typeface="Calibri"/>
               </a:rPr>
-              <a:t>33/33</a:t>
+              <a:t>34/34</a:t>
             </a:r>
           </a:p>
         </p:txBody>
@@ -17649,7 +17890,7 @@
                 </a:solidFill>
                 <a:latin typeface="Calibri"/>
               </a:rPr>
-              <a:t>4/33</a:t>
+              <a:t>4/34</a:t>
             </a:r>
           </a:p>
         </p:txBody>
@@ -17692,7 +17933,7 @@
         <p:spPr>
           <a:xfrm>
             <a:off x="685800" y="6426200"/>
-            <a:ext cx="1311563" cy="88900"/>
+            <a:ext cx="1272988" cy="88900"/>
           </a:xfrm>
           <a:prstGeom prst="rect">
             <a:avLst/>
@@ -18272,7 +18513,7 @@
                 </a:solidFill>
                 <a:latin typeface="Calibri"/>
               </a:rPr>
-              <a:t>5/33</a:t>
+              <a:t>5/34</a:t>
             </a:r>
           </a:p>
         </p:txBody>
@@ -18315,7 +18556,7 @@
         <p:spPr>
           <a:xfrm>
             <a:off x="685800" y="6426200"/>
-            <a:ext cx="1639454" cy="88900"/>
+            <a:ext cx="1591235" cy="88900"/>
           </a:xfrm>
           <a:prstGeom prst="rect">
             <a:avLst/>
@@ -18901,7 +19142,7 @@
                 </a:solidFill>
                 <a:latin typeface="Calibri"/>
               </a:rPr>
-              <a:t>6/33</a:t>
+              <a:t>6/34</a:t>
             </a:r>
           </a:p>
         </p:txBody>
@@ -18944,7 +19185,7 @@
         <p:spPr>
           <a:xfrm>
             <a:off x="685800" y="6426200"/>
-            <a:ext cx="1967345" cy="88900"/>
+            <a:ext cx="1909482" cy="88900"/>
           </a:xfrm>
           <a:prstGeom prst="rect">
             <a:avLst/>
@@ -19491,7 +19732,7 @@
                 </a:solidFill>
                 <a:latin typeface="Calibri"/>
               </a:rPr>
-              <a:t>7/33</a:t>
+              <a:t>7/34</a:t>
             </a:r>
           </a:p>
         </p:txBody>
@@ -19534,7 +19775,7 @@
         <p:spPr>
           <a:xfrm>
             <a:off x="685800" y="6426200"/>
-            <a:ext cx="2295236" cy="88900"/>
+            <a:ext cx="2227729" cy="88900"/>
           </a:xfrm>
           <a:prstGeom prst="rect">
             <a:avLst/>
@@ -20385,7 +20626,7 @@
                 </a:solidFill>
                 <a:latin typeface="Calibri"/>
               </a:rPr>
-              <a:t>8/33</a:t>
+              <a:t>8/34</a:t>
             </a:r>
           </a:p>
         </p:txBody>
@@ -20428,7 +20669,7 @@
         <p:spPr>
           <a:xfrm>
             <a:off x="685800" y="6426200"/>
-            <a:ext cx="2623127" cy="88900"/>
+            <a:ext cx="2545976" cy="88900"/>
           </a:xfrm>
           <a:prstGeom prst="rect">
             <a:avLst/>
@@ -20998,7 +21239,7 @@
                 </a:solidFill>
                 <a:latin typeface="Calibri"/>
               </a:rPr>
-              <a:t>9/33</a:t>
+              <a:t>9/34</a:t>
             </a:r>
           </a:p>
         </p:txBody>
@@ -21041,7 +21282,7 @@
         <p:spPr>
           <a:xfrm>
             <a:off x="685800" y="6426200"/>
-            <a:ext cx="2951018" cy="88900"/>
+            <a:ext cx="2864223" cy="88900"/>
           </a:xfrm>
           <a:prstGeom prst="rect">
             <a:avLst/>
